--- a/graduation-project/汇报/矩阵求逆汇报.pptx
+++ b/graduation-project/汇报/矩阵求逆汇报.pptx
@@ -5,20 +5,24 @@
     <p:sldMasterId id="2147483648" r:id="rId1"/>
   </p:sldMasterIdLst>
   <p:notesMasterIdLst>
-    <p:notesMasterId r:id="rId9"/>
+    <p:notesMasterId r:id="rId13"/>
   </p:notesMasterIdLst>
   <p:sldIdLst>
     <p:sldId id="256" r:id="rId3"/>
-    <p:sldId id="273" r:id="rId4"/>
-    <p:sldId id="275" r:id="rId5"/>
-    <p:sldId id="278" r:id="rId6"/>
-    <p:sldId id="280" r:id="rId7"/>
-    <p:sldId id="281" r:id="rId8"/>
+    <p:sldId id="283" r:id="rId4"/>
+    <p:sldId id="281" r:id="rId5"/>
+    <p:sldId id="282" r:id="rId6"/>
+    <p:sldId id="275" r:id="rId7"/>
+    <p:sldId id="278" r:id="rId8"/>
+    <p:sldId id="280" r:id="rId9"/>
+    <p:sldId id="284" r:id="rId10"/>
+    <p:sldId id="285" r:id="rId11"/>
+    <p:sldId id="286" r:id="rId12"/>
   </p:sldIdLst>
   <p:sldSz cx="12192000" cy="6858000"/>
   <p:notesSz cx="6858000" cy="9144000"/>
   <p:custDataLst>
-    <p:tags r:id="rId13"/>
+    <p:tags r:id="rId17"/>
   </p:custDataLst>
   <p:defaultTextStyle>
     <a:defPPr>
@@ -123,7 +127,7 @@
             <a:srgbClr val="A4A3A4"/>
           </p15:clr>
         </p15:guide>
-        <p15:guide id="2" pos="3888" userDrawn="1">
+        <p15:guide id="2" pos="3909" userDrawn="1">
           <p15:clr>
             <a:srgbClr val="A4A3A4"/>
           </p15:clr>
@@ -3600,7 +3604,7 @@
 </p:sld>
 </file>
 
-<file path=ppt/slides/slide2.xml><?xml version="1.0" encoding="utf-8"?>
+<file path=ppt/slides/slide10.xml><?xml version="1.0" encoding="utf-8"?>
 <p:sld xmlns:a="http://schemas.openxmlformats.org/drawingml/2006/main" xmlns:r="http://schemas.openxmlformats.org/officeDocument/2006/relationships" xmlns:p="http://schemas.openxmlformats.org/presentationml/2006/main">
   <p:cSld>
     <p:bg>
@@ -3921,14 +3925,14 @@
                 <a:latin typeface="宋体" panose="02010600030101010101" pitchFamily="2" charset="-122"/>
                 <a:ea typeface="宋体" panose="02010600030101010101" pitchFamily="2" charset="-122"/>
               </a:rPr>
-              <a:t>误差</a:t>
+              <a:t>系统</a:t>
             </a:r>
             <a:r>
               <a:rPr lang="zh-CN" altLang="en-US" sz="2000" b="1" dirty="0">
                 <a:latin typeface="宋体" panose="02010600030101010101" pitchFamily="2" charset="-122"/>
                 <a:ea typeface="宋体" panose="02010600030101010101" pitchFamily="2" charset="-122"/>
               </a:rPr>
-              <a:t>分析</a:t>
+              <a:t>数据流</a:t>
             </a:r>
             <a:endParaRPr lang="zh-CN" altLang="en-US" sz="2000" b="1" dirty="0">
               <a:latin typeface="宋体" panose="02010600030101010101" pitchFamily="2" charset="-122"/>
@@ -3939,346 +3943,436 @@
       </p:sp>
       <p:sp>
         <p:nvSpPr>
-          <p:cNvPr id="5" name="文本框 4"/>
+          <p:cNvPr id="2" name="文本框 1"/>
           <p:cNvSpPr txBox="1"/>
           <p:nvPr/>
         </p:nvSpPr>
         <p:spPr>
           <a:xfrm>
-            <a:off x="280035" y="648335"/>
-            <a:ext cx="11784965" cy="609600"/>
-          </a:xfrm>
-          <a:prstGeom prst="rect">
-            <a:avLst/>
-          </a:prstGeom>
-          <a:noFill/>
-        </p:spPr>
-        <p:txBody>
-          <a:bodyPr wrap="square" rtlCol="0">
-            <a:noAutofit/>
-          </a:bodyPr>
-          <a:p>
-            <a:r>
-              <a:rPr lang="zh-CN" altLang="en-US" b="1">
-                <a:latin typeface="Cambria Math" panose="02040503050406030204" charset="0"/>
-                <a:cs typeface="Cambria Math" panose="02040503050406030204" charset="0"/>
-              </a:rPr>
-              <a:t>稀疏向后误差分析</a:t>
-            </a:r>
-            <a:endParaRPr lang="zh-CN" altLang="en-US" b="1">
-              <a:latin typeface="Cambria Math" panose="02040503050406030204" charset="0"/>
-              <a:cs typeface="Cambria Math" panose="02040503050406030204" charset="0"/>
-            </a:endParaRPr>
-          </a:p>
-        </p:txBody>
-      </p:sp>
-      <mc:AlternateContent xmlns:mc="http://schemas.openxmlformats.org/markup-compatibility/2006">
-        <mc:Choice xmlns:a14="http://schemas.microsoft.com/office/drawing/2010/main" Requires="a14">
-          <p:sp>
-            <p:nvSpPr>
-              <p:cNvPr id="6" name="文本框 5"/>
-              <p:cNvSpPr txBox="1"/>
-              <p:nvPr/>
-            </p:nvSpPr>
-            <p:spPr>
-              <a:xfrm>
-                <a:off x="310515" y="1167765"/>
-                <a:ext cx="11612880" cy="389890"/>
-              </a:xfrm>
-              <a:prstGeom prst="rect">
-                <a:avLst/>
-              </a:prstGeom>
-              <a:noFill/>
-            </p:spPr>
-            <p:txBody>
-              <a:bodyPr wrap="square" rtlCol="0">
-                <a:spAutoFit/>
-              </a:bodyPr>
-              <a:p>
-                <a:r>
-                  <a:rPr lang="zh-CN" altLang="en-US" b="1"/>
-                  <a:t>核心思想</a:t>
-                </a:r>
-                <a:r>
-                  <a:rPr lang="zh-CN" altLang="en-US"/>
-                  <a:t>：寻找微小的扰动</a:t>
-                </a:r>
-                <a14:m>
-                  <m:oMath xmlns:m="http://schemas.openxmlformats.org/officeDocument/2006/math">
-                    <m:r>
-                      <a:rPr lang="en-US" altLang="zh-CN" i="1">
-                        <a:latin typeface="Cambria Math" panose="02040503050406030204" charset="0"/>
-                        <a:cs typeface="Cambria Math" panose="02040503050406030204" charset="0"/>
-                      </a:rPr>
-                      <m:t>（</m:t>
-                    </m:r>
-                    <m:r>
-                      <a:rPr lang="en-US" altLang="zh-CN" i="1">
-                        <a:latin typeface="Cambria Math" panose="02040503050406030204" charset="0"/>
-                        <a:ea typeface="MS Mincho" charset="0"/>
-                        <a:cs typeface="Cambria Math" panose="02040503050406030204" charset="0"/>
-                      </a:rPr>
-                      <m:t>𝛿A</m:t>
-                    </m:r>
-                    <m:r>
-                      <a:rPr lang="en-US" altLang="zh-CN" i="1">
-                        <a:latin typeface="Cambria Math" panose="02040503050406030204" charset="0"/>
-                        <a:ea typeface="MS Mincho" charset="0"/>
-                        <a:cs typeface="Cambria Math" panose="02040503050406030204" charset="0"/>
-                      </a:rPr>
-                      <m:t>,</m:t>
-                    </m:r>
-                    <m:r>
-                      <a:rPr lang="en-US" altLang="zh-CN" i="1">
-                        <a:latin typeface="Cambria Math" panose="02040503050406030204" charset="0"/>
-                        <a:ea typeface="MS Mincho" charset="0"/>
-                        <a:cs typeface="Cambria Math" panose="02040503050406030204" charset="0"/>
-                      </a:rPr>
-                      <m:t>𝛿</m:t>
-                    </m:r>
-                    <m:r>
-                      <a:rPr lang="en-US" altLang="zh-CN" i="1">
-                        <a:latin typeface="Cambria Math" panose="02040503050406030204" charset="0"/>
-                        <a:ea typeface="MS Mincho" charset="0"/>
-                        <a:cs typeface="Cambria Math" panose="02040503050406030204" charset="0"/>
-                      </a:rPr>
-                      <m:t>𝑏</m:t>
-                    </m:r>
-                    <m:r>
-                      <a:rPr lang="en-US" altLang="zh-CN" i="1">
-                        <a:latin typeface="Cambria Math" panose="02040503050406030204" charset="0"/>
-                        <a:cs typeface="Cambria Math" panose="02040503050406030204" charset="0"/>
-                      </a:rPr>
-                      <m:t>）</m:t>
-                    </m:r>
-                  </m:oMath>
-                </a14:m>
-                <a:r>
-                  <a:rPr lang="zh-CN" altLang="en-US"/>
-                  <a:t>使得</a:t>
-                </a:r>
-                <a14:m>
-                  <m:oMath xmlns:m="http://schemas.openxmlformats.org/officeDocument/2006/math">
-                    <m:acc>
-                      <m:accPr>
-                        <m:chr m:val="̅"/>
-                        <m:ctrlPr>
-                          <a:rPr lang="en-US" altLang="zh-CN" i="1">
-                            <a:latin typeface="Cambria Math" panose="02040503050406030204" charset="0"/>
-                            <a:cs typeface="Cambria Math" panose="02040503050406030204" charset="0"/>
-                          </a:rPr>
-                        </m:ctrlPr>
-                      </m:accPr>
-                      <m:e>
-                        <m:r>
-                          <a:rPr lang="en-US" altLang="zh-CN" i="1">
-                            <a:latin typeface="Cambria Math" panose="02040503050406030204" charset="0"/>
-                            <a:cs typeface="Cambria Math" panose="02040503050406030204" charset="0"/>
-                          </a:rPr>
-                          <m:t>𝑥</m:t>
-                        </m:r>
-                      </m:e>
-                    </m:acc>
-                  </m:oMath>
-                </a14:m>
-                <a:r>
-                  <a:rPr lang="zh-CN" altLang="en-US"/>
-                  <a:t>是扰动系统</a:t>
-                </a:r>
-                <a14:m>
-                  <m:oMath xmlns:m="http://schemas.openxmlformats.org/officeDocument/2006/math">
-                    <m:r>
-                      <a:rPr lang="en-US" altLang="zh-CN" i="1">
-                        <a:latin typeface="Cambria Math" panose="02040503050406030204" charset="0"/>
-                        <a:cs typeface="Cambria Math" panose="02040503050406030204" charset="0"/>
-                      </a:rPr>
-                      <m:t>(</m:t>
-                    </m:r>
-                    <m:r>
-                      <a:rPr lang="en-US" altLang="zh-CN" i="1">
-                        <a:latin typeface="Cambria Math" panose="02040503050406030204" charset="0"/>
-                        <a:cs typeface="Cambria Math" panose="02040503050406030204" charset="0"/>
-                      </a:rPr>
-                      <m:t>A+</m:t>
-                    </m:r>
-                    <m:r>
-                      <a:rPr lang="en-US" altLang="zh-CN" i="1">
-                        <a:latin typeface="Cambria Math" panose="02040503050406030204" charset="0"/>
-                        <a:cs typeface="Cambria Math" panose="02040503050406030204" charset="0"/>
-                      </a:rPr>
-                      <m:t>𝛿</m:t>
-                    </m:r>
-                    <m:r>
-                      <a:rPr lang="en-US" altLang="zh-CN" i="1">
-                        <a:latin typeface="Cambria Math" panose="02040503050406030204" charset="0"/>
-                        <a:cs typeface="Cambria Math" panose="02040503050406030204" charset="0"/>
-                      </a:rPr>
-                      <m:t>𝐴</m:t>
-                    </m:r>
-                    <m:r>
-                      <a:rPr lang="en-US" altLang="zh-CN" i="1">
-                        <a:latin typeface="Cambria Math" panose="02040503050406030204" charset="0"/>
-                        <a:cs typeface="Cambria Math" panose="02040503050406030204" charset="0"/>
-                      </a:rPr>
-                      <m:t>)</m:t>
-                    </m:r>
-                    <m:acc>
-                      <m:accPr>
-                        <m:chr m:val="̅"/>
-                        <m:ctrlPr>
-                          <a:rPr lang="en-US" altLang="zh-CN" i="1">
-                            <a:latin typeface="Cambria Math" panose="02040503050406030204" charset="0"/>
-                            <a:cs typeface="Cambria Math" panose="02040503050406030204" charset="0"/>
-                          </a:rPr>
-                        </m:ctrlPr>
-                      </m:accPr>
-                      <m:e>
-                        <m:r>
-                          <a:rPr lang="en-US" altLang="zh-CN" i="1">
-                            <a:latin typeface="Cambria Math" panose="02040503050406030204" charset="0"/>
-                            <a:cs typeface="Cambria Math" panose="02040503050406030204" charset="0"/>
-                          </a:rPr>
-                          <m:t>𝑥</m:t>
-                        </m:r>
-                      </m:e>
-                    </m:acc>
-                    <m:r>
-                      <a:rPr lang="en-US" altLang="zh-CN" i="1">
-                        <a:latin typeface="Cambria Math" panose="02040503050406030204" charset="0"/>
-                        <a:cs typeface="Cambria Math" panose="02040503050406030204" charset="0"/>
-                      </a:rPr>
-                      <m:t>=</m:t>
-                    </m:r>
-                    <m:r>
-                      <a:rPr lang="en-US" altLang="zh-CN" i="1">
-                        <a:latin typeface="Cambria Math" panose="02040503050406030204" charset="0"/>
-                        <a:cs typeface="Cambria Math" panose="02040503050406030204" charset="0"/>
-                      </a:rPr>
-                      <m:t>𝑏</m:t>
-                    </m:r>
-                    <m:r>
-                      <a:rPr lang="en-US" altLang="zh-CN" i="1">
-                        <a:latin typeface="Cambria Math" panose="02040503050406030204" charset="0"/>
-                        <a:cs typeface="Cambria Math" panose="02040503050406030204" charset="0"/>
-                      </a:rPr>
-                      <m:t>+</m:t>
-                    </m:r>
-                    <m:r>
-                      <a:rPr lang="en-US" altLang="zh-CN" i="1">
-                        <a:latin typeface="Cambria Math" panose="02040503050406030204" charset="0"/>
-                        <a:cs typeface="Cambria Math" panose="02040503050406030204" charset="0"/>
-                      </a:rPr>
-                      <m:t>𝛿</m:t>
-                    </m:r>
-                    <m:r>
-                      <a:rPr lang="en-US" altLang="zh-CN" i="1">
-                        <a:latin typeface="Cambria Math" panose="02040503050406030204" charset="0"/>
-                        <a:cs typeface="Cambria Math" panose="02040503050406030204" charset="0"/>
-                      </a:rPr>
-                      <m:t>𝑏</m:t>
-                    </m:r>
-                  </m:oMath>
-                </a14:m>
-                <a:r>
-                  <a:rPr lang="en-US" altLang="zh-CN"/>
-                  <a:t> </a:t>
-                </a:r>
-                <a:r>
-                  <a:rPr lang="zh-CN" altLang="en-US"/>
-                  <a:t>的精确解。</a:t>
-                </a:r>
-                <a:endParaRPr lang="zh-CN" altLang="en-US"/>
-              </a:p>
-            </p:txBody>
-          </p:sp>
-        </mc:Choice>
-        <mc:Fallback>
-          <p:sp>
-            <p:nvSpPr>
-              <p:cNvPr id="6" name="文本框 5"/>
-              <p:cNvSpPr txBox="1">
-                <a:spLocks noRot="1" noChangeAspect="1" noMove="1" noResize="1" noEditPoints="1" noAdjustHandles="1" noChangeArrowheads="1" noChangeShapeType="1" noTextEdit="1"/>
-              </p:cNvSpPr>
-              <p:nvPr/>
-            </p:nvSpPr>
-            <p:spPr>
-              <a:xfrm>
-                <a:off x="310515" y="1167765"/>
-                <a:ext cx="11612880" cy="389890"/>
-              </a:xfrm>
-              <a:prstGeom prst="rect">
-                <a:avLst/>
-              </a:prstGeom>
-              <a:blipFill rotWithShape="1">
-                <a:blip r:embed="rId7"/>
-                <a:stretch>
-                  <a:fillRect/>
-                </a:stretch>
-              </a:blipFill>
-            </p:spPr>
-            <p:txBody>
-              <a:bodyPr/>
-              <a:lstStyle/>
-              <a:p>
-                <a:r>
-                  <a:rPr lang="zh-CN" altLang="en-US">
-                    <a:noFill/>
-                  </a:rPr>
-                  <a:t> </a:t>
-                </a:r>
-              </a:p>
-            </p:txBody>
-          </p:sp>
-        </mc:Fallback>
-      </mc:AlternateContent>
-      <p:pic>
-        <p:nvPicPr>
-          <p:cNvPr id="14" name="图片 13" descr="QianJianTec1768187418771"/>
-          <p:cNvPicPr>
-            <a:picLocks noChangeAspect="1"/>
-          </p:cNvPicPr>
-          <p:nvPr/>
-        </p:nvPicPr>
-        <p:blipFill>
-          <a:blip r:embed="rId8"/>
-          <a:stretch>
-            <a:fillRect/>
-          </a:stretch>
-        </p:blipFill>
-        <p:spPr>
-          <a:xfrm>
-            <a:off x="3636645" y="1974215"/>
-            <a:ext cx="4220210" cy="1304925"/>
+            <a:off x="222250" y="859790"/>
+            <a:ext cx="11748135" cy="2676525"/>
           </a:xfrm>
           <a:prstGeom prst="rect">
             <a:avLst/>
           </a:prstGeom>
         </p:spPr>
-      </p:pic>
-      <p:pic>
-        <p:nvPicPr>
-          <p:cNvPr id="15" name="图片 14" descr="QianJianTec1768187743679"/>
-          <p:cNvPicPr>
-            <a:picLocks noChangeAspect="1"/>
-          </p:cNvPicPr>
-          <p:nvPr/>
-        </p:nvPicPr>
-        <p:blipFill>
-          <a:blip r:embed="rId9"/>
-          <a:stretch>
-            <a:fillRect/>
-          </a:stretch>
-        </p:blipFill>
-        <p:spPr>
-          <a:xfrm>
-            <a:off x="3484245" y="3596640"/>
-            <a:ext cx="6339840" cy="1390650"/>
-          </a:xfrm>
-          <a:prstGeom prst="rect">
-            <a:avLst/>
-          </a:prstGeom>
-        </p:spPr>
-      </p:pic>
+        <p:txBody>
+          <a:bodyPr wrap="square">
+            <a:spAutoFit/>
+          </a:bodyPr>
+          <a:p>
+            <a:pPr indent="0" fontAlgn="auto">
+              <a:lnSpc>
+                <a:spcPct val="150000"/>
+              </a:lnSpc>
+              <a:spcBef>
+                <a:spcPct val="0"/>
+              </a:spcBef>
+            </a:pPr>
+            <a:r>
+              <a:rPr lang="zh-CN" altLang="en-US" sz="1600" b="1">
+                <a:latin typeface="+mn-ea"/>
+                <a:cs typeface="+mn-ea"/>
+              </a:rPr>
+              <a:t>第</a:t>
+            </a:r>
+            <a:r>
+              <a:rPr lang="zh-CN" altLang="en-US" sz="1600" b="1">
+                <a:latin typeface="+mn-ea"/>
+                <a:cs typeface="+mn-ea"/>
+              </a:rPr>
+              <a:t>三阶段</a:t>
+            </a:r>
+            <a:endParaRPr lang="zh-CN" altLang="en-US" sz="1600" b="1">
+              <a:latin typeface="+mn-ea"/>
+              <a:cs typeface="+mn-ea"/>
+            </a:endParaRPr>
+          </a:p>
+          <a:p>
+            <a:pPr marL="285750" indent="-285750" fontAlgn="auto">
+              <a:lnSpc>
+                <a:spcPct val="150000"/>
+              </a:lnSpc>
+              <a:spcBef>
+                <a:spcPct val="0"/>
+              </a:spcBef>
+              <a:buFont typeface="Wingdings" panose="05000000000000000000" charset="0"/>
+              <a:buChar char="l"/>
+            </a:pPr>
+            <a:r>
+              <a:rPr lang="zh-CN" altLang="en-US" sz="1600">
+                <a:latin typeface="+mn-ea"/>
+                <a:cs typeface="+mn-ea"/>
+              </a:rPr>
+              <a:t>初次求解与评估</a:t>
+            </a:r>
+            <a:r>
+              <a:rPr lang="en-US" altLang="zh-CN" sz="1600">
+                <a:latin typeface="+mn-ea"/>
+                <a:cs typeface="+mn-ea"/>
+              </a:rPr>
+              <a:t>:</a:t>
+            </a:r>
+            <a:r>
+              <a:rPr lang="zh-CN" altLang="en-US" sz="1600">
+                <a:latin typeface="+mn-ea"/>
+                <a:cs typeface="+mn-ea"/>
+              </a:rPr>
+              <a:t>基于硬件端算出的</a:t>
+            </a:r>
+            <a:r>
+              <a:rPr lang="en-US" altLang="zh-CN" sz="1600">
+                <a:latin typeface="+mn-ea"/>
+                <a:cs typeface="+mn-ea"/>
+              </a:rPr>
+              <a:t> L/U </a:t>
+            </a:r>
+            <a:r>
+              <a:rPr lang="zh-CN" altLang="en-US" sz="1600">
+                <a:latin typeface="+mn-ea"/>
+                <a:cs typeface="+mn-ea"/>
+              </a:rPr>
+              <a:t>因子求解</a:t>
+            </a:r>
+            <a:r>
+              <a:rPr lang="en-US" altLang="zh-CN" sz="1600">
+                <a:latin typeface="+mn-ea"/>
+                <a:cs typeface="+mn-ea"/>
+              </a:rPr>
+              <a:t> x0</a:t>
+            </a:r>
+            <a:endParaRPr lang="en-US" altLang="zh-CN" sz="1600">
+              <a:latin typeface="+mn-ea"/>
+              <a:cs typeface="+mn-ea"/>
+            </a:endParaRPr>
+          </a:p>
+          <a:p>
+            <a:pPr marL="285750" indent="-285750" fontAlgn="auto">
+              <a:lnSpc>
+                <a:spcPct val="150000"/>
+              </a:lnSpc>
+              <a:spcBef>
+                <a:spcPct val="0"/>
+              </a:spcBef>
+              <a:buFont typeface="Wingdings" panose="05000000000000000000" charset="0"/>
+              <a:buChar char="l"/>
+            </a:pPr>
+            <a:r>
+              <a:rPr lang="en-US" altLang="zh-CN" sz="1600">
+                <a:latin typeface="+mn-ea"/>
+                <a:cs typeface="+mn-ea"/>
+              </a:rPr>
+              <a:t>Host </a:t>
+            </a:r>
+            <a:r>
+              <a:rPr lang="zh-CN" altLang="en-US" sz="1600">
+                <a:latin typeface="+mn-ea"/>
+                <a:cs typeface="+mn-ea"/>
+              </a:rPr>
+              <a:t>计算</a:t>
+            </a:r>
+            <a:r>
+              <a:rPr lang="en-US" altLang="zh-CN" sz="1600">
+                <a:latin typeface="+mn-ea"/>
+                <a:cs typeface="+mn-ea"/>
+              </a:rPr>
+              <a:t> MUMPS </a:t>
+            </a:r>
+            <a:r>
+              <a:rPr lang="zh-CN" altLang="en-US" sz="1600">
+                <a:latin typeface="+mn-ea"/>
+                <a:cs typeface="+mn-ea"/>
+              </a:rPr>
+              <a:t>后误差</a:t>
+            </a:r>
+            <a:r>
+              <a:rPr lang="en-US" altLang="zh-CN" sz="1600">
+                <a:latin typeface="+mn-ea"/>
+                <a:cs typeface="+mn-ea"/>
+              </a:rPr>
+              <a:t> ω 1 </a:t>
+            </a:r>
+            <a:r>
+              <a:rPr lang="zh-CN" altLang="en-US" sz="1600">
+                <a:latin typeface="+mn-ea"/>
+                <a:cs typeface="+mn-ea"/>
+              </a:rPr>
+              <a:t>。若</a:t>
+            </a:r>
+            <a:r>
+              <a:rPr lang="en-US" altLang="zh-CN" sz="1600">
+                <a:latin typeface="+mn-ea"/>
+                <a:cs typeface="+mn-ea"/>
+              </a:rPr>
+              <a:t> ω 1&lt;Threshold</a:t>
+            </a:r>
+            <a:r>
+              <a:rPr lang="zh-CN" altLang="en-US" sz="1600">
+                <a:latin typeface="+mn-ea"/>
+                <a:cs typeface="+mn-ea"/>
+              </a:rPr>
+              <a:t>，流程结束。</a:t>
+            </a:r>
+            <a:endParaRPr lang="en-US" altLang="zh-CN" sz="1600">
+              <a:latin typeface="+mn-ea"/>
+              <a:cs typeface="+mn-ea"/>
+            </a:endParaRPr>
+          </a:p>
+          <a:p>
+            <a:pPr marL="285750" indent="-285750" fontAlgn="auto">
+              <a:lnSpc>
+                <a:spcPct val="150000"/>
+              </a:lnSpc>
+              <a:spcBef>
+                <a:spcPct val="0"/>
+              </a:spcBef>
+              <a:buFont typeface="Wingdings" panose="05000000000000000000" charset="0"/>
+              <a:buChar char="l"/>
+            </a:pPr>
+            <a:r>
+              <a:rPr lang="zh-CN" altLang="en-US" sz="1600">
+                <a:latin typeface="+mn-ea"/>
+                <a:cs typeface="+mn-ea"/>
+              </a:rPr>
+              <a:t>残差计算与缩放</a:t>
+            </a:r>
+            <a:r>
+              <a:rPr lang="en-US" altLang="zh-CN" sz="1600">
+                <a:latin typeface="+mn-ea"/>
+                <a:cs typeface="+mn-ea"/>
+              </a:rPr>
+              <a:t> (Residual &amp; Scaling):Host </a:t>
+            </a:r>
+            <a:r>
+              <a:rPr lang="zh-CN" altLang="en-US" sz="1600">
+                <a:latin typeface="+mn-ea"/>
+                <a:cs typeface="+mn-ea"/>
+              </a:rPr>
+              <a:t>高精度计算残差</a:t>
+            </a:r>
+            <a:r>
+              <a:rPr lang="en-US" altLang="zh-CN" sz="1600">
+                <a:latin typeface="+mn-ea"/>
+                <a:cs typeface="+mn-ea"/>
+              </a:rPr>
+              <a:t> r=b−Ax</a:t>
+            </a:r>
+            <a:r>
+              <a:rPr lang="zh-CN" altLang="en-US" sz="1600">
+                <a:latin typeface="+mn-ea"/>
+                <a:cs typeface="+mn-ea"/>
+              </a:rPr>
+              <a:t>。</a:t>
+            </a:r>
+            <a:endParaRPr lang="zh-CN" altLang="en-US" sz="1600">
+              <a:latin typeface="+mn-ea"/>
+              <a:cs typeface="+mn-ea"/>
+            </a:endParaRPr>
+          </a:p>
+          <a:p>
+            <a:pPr marL="285750" indent="-285750" fontAlgn="auto">
+              <a:lnSpc>
+                <a:spcPct val="150000"/>
+              </a:lnSpc>
+              <a:spcBef>
+                <a:spcPct val="0"/>
+              </a:spcBef>
+              <a:buFont typeface="Wingdings" panose="05000000000000000000" charset="0"/>
+              <a:buChar char="l"/>
+            </a:pPr>
+            <a:r>
+              <a:rPr lang="zh-CN" altLang="en-US" sz="1600">
+                <a:latin typeface="+mn-ea"/>
+                <a:cs typeface="+mn-ea"/>
+              </a:rPr>
+              <a:t>动态缩放：计算因子</a:t>
+            </a:r>
+            <a:r>
+              <a:rPr lang="en-US" altLang="zh-CN" sz="1600">
+                <a:latin typeface="+mn-ea"/>
+                <a:cs typeface="+mn-ea"/>
+              </a:rPr>
+              <a:t> α</a:t>
+            </a:r>
+            <a:r>
+              <a:rPr lang="zh-CN" altLang="en-US" sz="1600">
+                <a:latin typeface="+mn-ea"/>
+                <a:cs typeface="+mn-ea"/>
+              </a:rPr>
+              <a:t>，将残差放大为</a:t>
+            </a:r>
+            <a:r>
+              <a:rPr lang="en-US" altLang="zh-CN" sz="1600">
+                <a:latin typeface="+mn-ea"/>
+                <a:cs typeface="+mn-ea"/>
+              </a:rPr>
+              <a:t> r ′ =r⋅α </a:t>
+            </a:r>
+            <a:r>
+              <a:rPr lang="zh-CN" altLang="en-US" sz="1600">
+                <a:latin typeface="+mn-ea"/>
+                <a:cs typeface="+mn-ea"/>
+              </a:rPr>
+              <a:t>以规避下溢。</a:t>
+            </a:r>
+            <a:endParaRPr lang="zh-CN" altLang="en-US" sz="1600">
+              <a:latin typeface="+mn-ea"/>
+              <a:cs typeface="+mn-ea"/>
+            </a:endParaRPr>
+          </a:p>
+          <a:p>
+            <a:pPr marL="285750" indent="-285750" fontAlgn="auto">
+              <a:lnSpc>
+                <a:spcPct val="150000"/>
+              </a:lnSpc>
+              <a:spcBef>
+                <a:spcPct val="0"/>
+              </a:spcBef>
+              <a:buFont typeface="Wingdings" panose="05000000000000000000" charset="0"/>
+              <a:buChar char="l"/>
+            </a:pPr>
+            <a:r>
+              <a:rPr lang="zh-CN" altLang="en-US" sz="1600">
+                <a:latin typeface="+mn-ea"/>
+                <a:cs typeface="+mn-ea"/>
+              </a:rPr>
+              <a:t>修正量求解</a:t>
+            </a:r>
+            <a:r>
+              <a:rPr lang="en-US" altLang="zh-CN" sz="1600">
+                <a:latin typeface="+mn-ea"/>
+                <a:cs typeface="+mn-ea"/>
+              </a:rPr>
+              <a:t> (Solve for Correction):Host </a:t>
+            </a:r>
+            <a:r>
+              <a:rPr lang="zh-CN" altLang="en-US" sz="1600">
+                <a:latin typeface="+mn-ea"/>
+                <a:cs typeface="+mn-ea"/>
+              </a:rPr>
+              <a:t>将</a:t>
+            </a:r>
+            <a:r>
+              <a:rPr lang="en-US" altLang="zh-CN" sz="1600">
+                <a:latin typeface="+mn-ea"/>
+                <a:cs typeface="+mn-ea"/>
+              </a:rPr>
+              <a:t> r ′</a:t>
+            </a:r>
+            <a:r>
+              <a:rPr lang="zh-CN" altLang="en-US" sz="1600">
+                <a:latin typeface="+mn-ea"/>
+                <a:cs typeface="+mn-ea"/>
+              </a:rPr>
+              <a:t>发送给硬件端。</a:t>
+            </a:r>
+            <a:r>
+              <a:rPr lang="zh-CN" altLang="en-US" sz="1600">
+                <a:latin typeface="+mn-ea"/>
+                <a:cs typeface="+mn-ea"/>
+              </a:rPr>
+              <a:t>硬件端复用现有的</a:t>
+            </a:r>
+            <a:r>
+              <a:rPr lang="en-US" altLang="zh-CN" sz="1600">
+                <a:latin typeface="+mn-ea"/>
+                <a:cs typeface="+mn-ea"/>
+              </a:rPr>
+              <a:t> L/U </a:t>
+            </a:r>
+            <a:r>
+              <a:rPr lang="zh-CN" altLang="en-US" sz="1600">
+                <a:latin typeface="+mn-ea"/>
+                <a:cs typeface="+mn-ea"/>
+              </a:rPr>
+              <a:t>因子（不做分解），快速解出修正量</a:t>
+            </a:r>
+            <a:r>
+              <a:rPr lang="en-US" altLang="zh-CN" sz="1600">
+                <a:latin typeface="+mn-ea"/>
+                <a:cs typeface="+mn-ea"/>
+              </a:rPr>
+              <a:t> d ′</a:t>
+            </a:r>
+            <a:r>
+              <a:rPr lang="zh-CN" altLang="en-US" sz="1600">
+                <a:latin typeface="+mn-ea"/>
+                <a:cs typeface="+mn-ea"/>
+              </a:rPr>
+              <a:t>。</a:t>
+            </a:r>
+            <a:endParaRPr lang="en-US" altLang="zh-CN" sz="1600">
+              <a:latin typeface="+mn-ea"/>
+              <a:cs typeface="+mn-ea"/>
+            </a:endParaRPr>
+          </a:p>
+          <a:p>
+            <a:pPr marL="285750" indent="-285750" fontAlgn="auto">
+              <a:lnSpc>
+                <a:spcPct val="150000"/>
+              </a:lnSpc>
+              <a:spcBef>
+                <a:spcPct val="0"/>
+              </a:spcBef>
+              <a:buFont typeface="Wingdings" panose="05000000000000000000" charset="0"/>
+              <a:buChar char="l"/>
+            </a:pPr>
+            <a:r>
+              <a:rPr lang="zh-CN" altLang="en-US" sz="1600">
+                <a:latin typeface="+mn-ea"/>
+                <a:cs typeface="+mn-ea"/>
+              </a:rPr>
+              <a:t>解更新</a:t>
+            </a:r>
+            <a:r>
+              <a:rPr lang="en-US" altLang="zh-CN" sz="1600">
+                <a:latin typeface="+mn-ea"/>
+                <a:cs typeface="+mn-ea"/>
+              </a:rPr>
+              <a:t> (Update):Host </a:t>
+            </a:r>
+            <a:r>
+              <a:rPr lang="zh-CN" altLang="en-US" sz="1600">
+                <a:latin typeface="+mn-ea"/>
+                <a:cs typeface="+mn-ea"/>
+              </a:rPr>
+              <a:t>还原修正量</a:t>
+            </a:r>
+            <a:r>
+              <a:rPr lang="en-US" altLang="zh-CN" sz="1600">
+                <a:latin typeface="+mn-ea"/>
+                <a:cs typeface="+mn-ea"/>
+              </a:rPr>
+              <a:t> d=d ′/α</a:t>
+            </a:r>
+            <a:r>
+              <a:rPr lang="zh-CN" altLang="en-US" sz="1600">
+                <a:latin typeface="+mn-ea"/>
+                <a:cs typeface="+mn-ea"/>
+              </a:rPr>
+              <a:t>。更新解</a:t>
+            </a:r>
+            <a:r>
+              <a:rPr lang="en-US" altLang="zh-CN" sz="1600">
+                <a:latin typeface="+mn-ea"/>
+                <a:cs typeface="+mn-ea"/>
+              </a:rPr>
+              <a:t> x new=x+d</a:t>
+            </a:r>
+            <a:r>
+              <a:rPr lang="zh-CN" altLang="en-US" sz="1600">
+                <a:latin typeface="+mn-ea"/>
+                <a:cs typeface="+mn-ea"/>
+              </a:rPr>
+              <a:t>，重复评估直到收敛。</a:t>
+            </a:r>
+            <a:endParaRPr lang="zh-CN" altLang="en-US" sz="1600">
+              <a:latin typeface="+mn-ea"/>
+              <a:cs typeface="+mn-ea"/>
+            </a:endParaRPr>
+          </a:p>
+        </p:txBody>
+      </p:sp>
     </p:spTree>
   </p:cSld>
   <p:clrMapOvr>
@@ -4295,7 +4389,7 @@
 </p:sld>
 </file>
 
-<file path=ppt/slides/slide3.xml><?xml version="1.0" encoding="utf-8"?>
+<file path=ppt/slides/slide2.xml><?xml version="1.0" encoding="utf-8"?>
 <p:sld xmlns:a="http://schemas.openxmlformats.org/drawingml/2006/main" xmlns:r="http://schemas.openxmlformats.org/officeDocument/2006/relationships" xmlns:p="http://schemas.openxmlformats.org/presentationml/2006/main">
   <p:cSld>
     <p:bg>
@@ -4612,18 +4706,25 @@
               <a:buChar char="Ø"/>
             </a:pPr>
             <a:r>
+              <a:rPr lang="en-US" altLang="zh-CN" sz="2000" b="1" dirty="0">
+                <a:latin typeface="宋体" panose="02010600030101010101" pitchFamily="2" charset="-122"/>
+                <a:ea typeface="宋体" panose="02010600030101010101" pitchFamily="2" charset="-122"/>
+              </a:rPr>
+              <a:t>GCU </a:t>
+            </a:r>
+            <a:r>
               <a:rPr lang="zh-CN" altLang="en-US" sz="2000" b="1" dirty="0">
                 <a:latin typeface="宋体" panose="02010600030101010101" pitchFamily="2" charset="-122"/>
                 <a:ea typeface="宋体" panose="02010600030101010101" pitchFamily="2" charset="-122"/>
               </a:rPr>
-              <a:t>误差</a:t>
+              <a:t>全局</a:t>
             </a:r>
             <a:r>
               <a:rPr lang="zh-CN" altLang="en-US" sz="2000" b="1" dirty="0">
                 <a:latin typeface="宋体" panose="02010600030101010101" pitchFamily="2" charset="-122"/>
                 <a:ea typeface="宋体" panose="02010600030101010101" pitchFamily="2" charset="-122"/>
               </a:rPr>
-              <a:t>分析</a:t>
+              <a:t>控制器</a:t>
             </a:r>
             <a:endParaRPr lang="zh-CN" altLang="en-US" sz="2000" b="1" dirty="0">
               <a:latin typeface="宋体" panose="02010600030101010101" pitchFamily="2" charset="-122"/>
@@ -4634,7 +4735,7 @@
       </p:sp>
       <p:pic>
         <p:nvPicPr>
-          <p:cNvPr id="2" name="图片 1" descr="QianJianTec1768188136297"/>
+          <p:cNvPr id="2" name="图片 1" descr="GCU"/>
           <p:cNvPicPr>
             <a:picLocks noChangeAspect="1"/>
           </p:cNvPicPr>
@@ -4648,265 +4749,14 @@
         </p:blipFill>
         <p:spPr>
           <a:xfrm>
-            <a:off x="3329940" y="3983990"/>
-            <a:ext cx="5235575" cy="645160"/>
+            <a:off x="1360170" y="648335"/>
+            <a:ext cx="8862060" cy="5407660"/>
           </a:xfrm>
           <a:prstGeom prst="rect">
             <a:avLst/>
           </a:prstGeom>
         </p:spPr>
       </p:pic>
-      <p:pic>
-        <p:nvPicPr>
-          <p:cNvPr id="3" name="图片 2" descr="QianJianTec1768188319638"/>
-          <p:cNvPicPr>
-            <a:picLocks noChangeAspect="1"/>
-          </p:cNvPicPr>
-          <p:nvPr/>
-        </p:nvPicPr>
-        <p:blipFill>
-          <a:blip r:embed="rId8"/>
-          <a:stretch>
-            <a:fillRect/>
-          </a:stretch>
-        </p:blipFill>
-        <p:spPr>
-          <a:xfrm>
-            <a:off x="2250440" y="5081270"/>
-            <a:ext cx="8001000" cy="772795"/>
-          </a:xfrm>
-          <a:prstGeom prst="rect">
-            <a:avLst/>
-          </a:prstGeom>
-        </p:spPr>
-      </p:pic>
-      <mc:AlternateContent xmlns:mc="http://schemas.openxmlformats.org/markup-compatibility/2006">
-        <mc:Choice xmlns:a14="http://schemas.microsoft.com/office/drawing/2010/main" Requires="a14">
-          <p:sp>
-            <p:nvSpPr>
-              <p:cNvPr id="16" name="文本框 15"/>
-              <p:cNvSpPr txBox="1"/>
-              <p:nvPr/>
-            </p:nvSpPr>
-            <p:spPr>
-              <a:xfrm>
-                <a:off x="653415" y="824865"/>
-                <a:ext cx="11391900" cy="922020"/>
-              </a:xfrm>
-              <a:prstGeom prst="rect">
-                <a:avLst/>
-              </a:prstGeom>
-              <a:noFill/>
-            </p:spPr>
-            <p:txBody>
-              <a:bodyPr wrap="square" rtlCol="0">
-                <a:spAutoFit/>
-              </a:bodyPr>
-              <a:p>
-                <a:pPr indent="0" fontAlgn="auto">
-                  <a:lnSpc>
-                    <a:spcPct val="150000"/>
-                  </a:lnSpc>
-                </a:pPr>
-                <a14:m>
-                  <m:oMath xmlns:m="http://schemas.openxmlformats.org/officeDocument/2006/math">
-                    <m:sSub>
-                      <m:sSubPr>
-                        <m:ctrlPr>
-                          <a:rPr lang="en-US" altLang="zh-CN" i="1">
-                            <a:latin typeface="Cambria Math" panose="02040503050406030204" charset="0"/>
-                            <a:cs typeface="Cambria Math" panose="02040503050406030204" charset="0"/>
-                          </a:rPr>
-                        </m:ctrlPr>
-                      </m:sSubPr>
-                      <m:e>
-                        <m:r>
-                          <a:rPr lang="en-US" altLang="zh-CN" i="1">
-                            <a:latin typeface="Cambria Math" panose="02040503050406030204" charset="0"/>
-                            <a:cs typeface="Cambria Math" panose="02040503050406030204" charset="0"/>
-                          </a:rPr>
-                          <m:t>𝜔</m:t>
-                        </m:r>
-                      </m:e>
-                      <m:sub>
-                        <m:r>
-                          <a:rPr lang="en-US" altLang="zh-CN" i="1">
-                            <a:latin typeface="Cambria Math" panose="02040503050406030204" charset="0"/>
-                            <a:cs typeface="Cambria Math" panose="02040503050406030204" charset="0"/>
-                          </a:rPr>
-                          <m:t>1</m:t>
-                        </m:r>
-                      </m:sub>
-                    </m:sSub>
-                  </m:oMath>
-                </a14:m>
-                <a:r>
-                  <a:rPr lang="zh-CN" altLang="en-US">
-                    <a:latin typeface="Cambria Math" panose="02040503050406030204" charset="0"/>
-                    <a:cs typeface="Cambria Math" panose="02040503050406030204" charset="0"/>
-                  </a:rPr>
-                  <a:t>是针对大多数方程的标准放缩残差，</a:t>
-                </a:r>
-                <a14:m>
-                  <m:oMath xmlns:m="http://schemas.openxmlformats.org/officeDocument/2006/math">
-                    <m:sSub>
-                      <m:sSubPr>
-                        <m:ctrlPr>
-                          <a:rPr lang="en-US" altLang="zh-CN" i="1">
-                            <a:latin typeface="Cambria Math" panose="02040503050406030204" charset="0"/>
-                            <a:cs typeface="Cambria Math" panose="02040503050406030204" charset="0"/>
-                          </a:rPr>
-                        </m:ctrlPr>
-                      </m:sSubPr>
-                      <m:e>
-                        <m:r>
-                          <a:rPr lang="en-US" altLang="zh-CN" i="1">
-                            <a:latin typeface="Cambria Math" panose="02040503050406030204" charset="0"/>
-                            <a:cs typeface="Cambria Math" panose="02040503050406030204" charset="0"/>
-                          </a:rPr>
-                          <m:t>𝜔</m:t>
-                        </m:r>
-                      </m:e>
-                      <m:sub>
-                        <m:r>
-                          <a:rPr lang="en-US" altLang="zh-CN" i="1">
-                            <a:latin typeface="Cambria Math" panose="02040503050406030204" charset="0"/>
-                            <a:cs typeface="Cambria Math" panose="02040503050406030204" charset="0"/>
-                          </a:rPr>
-                          <m:t>2</m:t>
-                        </m:r>
-                      </m:sub>
-                    </m:sSub>
-                  </m:oMath>
-                </a14:m>
-                <a:r>
-                  <a:rPr lang="zh-CN" altLang="en-US">
-                    <a:latin typeface="Cambria Math" panose="02040503050406030204" charset="0"/>
-                    <a:cs typeface="Cambria Math" panose="02040503050406030204" charset="0"/>
-                  </a:rPr>
-                  <a:t>是对于分母过于小的方程的一个修正。那么求解出来的</a:t>
-                </a:r>
-                <a:r>
-                  <a:rPr lang="en-US" altLang="zh-CN">
-                    <a:latin typeface="Cambria Math" panose="02040503050406030204" charset="0"/>
-                    <a:cs typeface="Cambria Math" panose="02040503050406030204" charset="0"/>
-                  </a:rPr>
-                  <a:t>x</a:t>
-                </a:r>
-                <a:r>
-                  <a:rPr lang="zh-CN" altLang="en-US">
-                    <a:latin typeface="Cambria Math" panose="02040503050406030204" charset="0"/>
-                    <a:cs typeface="Cambria Math" panose="02040503050406030204" charset="0"/>
-                  </a:rPr>
-                  <a:t>就是如下公式的</a:t>
-                </a:r>
-                <a:r>
-                  <a:rPr lang="zh-CN" altLang="en-US">
-                    <a:latin typeface="Cambria Math" panose="02040503050406030204" charset="0"/>
-                    <a:cs typeface="Cambria Math" panose="02040503050406030204" charset="0"/>
-                  </a:rPr>
-                  <a:t>精确解</a:t>
-                </a:r>
-                <a:endParaRPr lang="zh-CN" altLang="en-US">
-                  <a:latin typeface="Cambria Math" panose="02040503050406030204" charset="0"/>
-                  <a:cs typeface="Cambria Math" panose="02040503050406030204" charset="0"/>
-                </a:endParaRPr>
-              </a:p>
-            </p:txBody>
-          </p:sp>
-        </mc:Choice>
-        <mc:Fallback>
-          <p:sp>
-            <p:nvSpPr>
-              <p:cNvPr id="16" name="文本框 15"/>
-              <p:cNvSpPr txBox="1">
-                <a:spLocks noRot="1" noChangeAspect="1" noMove="1" noResize="1" noEditPoints="1" noAdjustHandles="1" noChangeArrowheads="1" noChangeShapeType="1" noTextEdit="1"/>
-              </p:cNvSpPr>
-              <p:nvPr/>
-            </p:nvSpPr>
-            <p:spPr>
-              <a:xfrm>
-                <a:off x="653415" y="824865"/>
-                <a:ext cx="11391900" cy="922020"/>
-              </a:xfrm>
-              <a:prstGeom prst="rect">
-                <a:avLst/>
-              </a:prstGeom>
-              <a:blipFill rotWithShape="1">
-                <a:blip r:embed="rId9"/>
-                <a:stretch>
-                  <a:fillRect/>
-                </a:stretch>
-              </a:blipFill>
-            </p:spPr>
-            <p:txBody>
-              <a:bodyPr/>
-              <a:lstStyle/>
-              <a:p>
-                <a:r>
-                  <a:rPr lang="zh-CN" altLang="en-US">
-                    <a:noFill/>
-                  </a:rPr>
-                  <a:t> </a:t>
-                </a:r>
-              </a:p>
-            </p:txBody>
-          </p:sp>
-        </mc:Fallback>
-      </mc:AlternateContent>
-      <p:pic>
-        <p:nvPicPr>
-          <p:cNvPr id="17" name="图片 16" descr="QianJianTec1768189132228"/>
-          <p:cNvPicPr>
-            <a:picLocks noChangeAspect="1"/>
-          </p:cNvPicPr>
-          <p:nvPr/>
-        </p:nvPicPr>
-        <p:blipFill>
-          <a:blip r:embed="rId10"/>
-          <a:stretch>
-            <a:fillRect/>
-          </a:stretch>
-        </p:blipFill>
-        <p:spPr>
-          <a:xfrm>
-            <a:off x="3442335" y="1811020"/>
-            <a:ext cx="4809490" cy="646430"/>
-          </a:xfrm>
-          <a:prstGeom prst="rect">
-            <a:avLst/>
-          </a:prstGeom>
-        </p:spPr>
-      </p:pic>
-      <p:sp>
-        <p:nvSpPr>
-          <p:cNvPr id="20" name="文本框 19"/>
-          <p:cNvSpPr txBox="1"/>
-          <p:nvPr/>
-        </p:nvSpPr>
-        <p:spPr>
-          <a:xfrm>
-            <a:off x="561975" y="3036570"/>
-            <a:ext cx="3558540" cy="368300"/>
-          </a:xfrm>
-          <a:prstGeom prst="rect">
-            <a:avLst/>
-          </a:prstGeom>
-          <a:noFill/>
-        </p:spPr>
-        <p:txBody>
-          <a:bodyPr wrap="square" rtlCol="0">
-            <a:spAutoFit/>
-          </a:bodyPr>
-          <a:p>
-            <a:r>
-              <a:rPr lang="zh-CN" altLang="en-US"/>
-              <a:t>其中</a:t>
-            </a:r>
-            <a:endParaRPr lang="zh-CN" altLang="en-US"/>
-          </a:p>
-        </p:txBody>
-      </p:sp>
     </p:spTree>
   </p:cSld>
   <p:clrMapOvr>
@@ -4923,7 +4773,7 @@
 </p:sld>
 </file>
 
-<file path=ppt/slides/slide4.xml><?xml version="1.0" encoding="utf-8"?>
+<file path=ppt/slides/slide3.xml><?xml version="1.0" encoding="utf-8"?>
 <p:sld xmlns:a="http://schemas.openxmlformats.org/drawingml/2006/main" xmlns:r="http://schemas.openxmlformats.org/officeDocument/2006/relationships" xmlns:p="http://schemas.openxmlformats.org/presentationml/2006/main">
   <p:cSld>
     <p:bg>
@@ -5244,14 +5094,14 @@
                 <a:latin typeface="宋体" panose="02010600030101010101" pitchFamily="2" charset="-122"/>
                 <a:ea typeface="宋体" panose="02010600030101010101" pitchFamily="2" charset="-122"/>
               </a:rPr>
-              <a:t>误差</a:t>
+              <a:t>数据结构</a:t>
             </a:r>
             <a:r>
               <a:rPr lang="zh-CN" altLang="en-US" sz="2000" b="1" dirty="0">
                 <a:latin typeface="宋体" panose="02010600030101010101" pitchFamily="2" charset="-122"/>
                 <a:ea typeface="宋体" panose="02010600030101010101" pitchFamily="2" charset="-122"/>
               </a:rPr>
-              <a:t>分析</a:t>
+              <a:t>定义</a:t>
             </a:r>
             <a:endParaRPr lang="zh-CN" altLang="en-US" sz="2000" b="1" dirty="0">
               <a:latin typeface="宋体" panose="02010600030101010101" pitchFamily="2" charset="-122"/>
@@ -5281,20 +5131,6 @@
             <a:noAutofit/>
           </a:bodyPr>
           <a:p>
-            <a:r>
-              <a:rPr lang="zh-CN" altLang="en-US" b="1">
-                <a:latin typeface="Cambria Math" panose="02040503050406030204" charset="0"/>
-                <a:cs typeface="Cambria Math" panose="02040503050406030204" charset="0"/>
-              </a:rPr>
-              <a:t>稀疏</a:t>
-            </a:r>
-            <a:r>
-              <a:rPr lang="zh-CN" altLang="en-US" b="1">
-                <a:latin typeface="Cambria Math" panose="02040503050406030204" charset="0"/>
-                <a:cs typeface="Cambria Math" panose="02040503050406030204" charset="0"/>
-              </a:rPr>
-              <a:t>前向误差分析</a:t>
-            </a:r>
             <a:endParaRPr lang="zh-CN" altLang="en-US" b="1">
               <a:latin typeface="Cambria Math" panose="02040503050406030204" charset="0"/>
               <a:cs typeface="Cambria Math" panose="02040503050406030204" charset="0"/>
@@ -5302,58 +5138,9 @@
           </a:p>
         </p:txBody>
       </p:sp>
-      <p:sp>
-        <p:nvSpPr>
-          <p:cNvPr id="2" name="文本框 1"/>
-          <p:cNvSpPr txBox="1"/>
-          <p:nvPr/>
-        </p:nvSpPr>
-        <p:spPr>
-          <a:xfrm>
-            <a:off x="356235" y="1228725"/>
-            <a:ext cx="11391900" cy="368300"/>
-          </a:xfrm>
-          <a:prstGeom prst="rect">
-            <a:avLst/>
-          </a:prstGeom>
-          <a:noFill/>
-        </p:spPr>
-        <p:txBody>
-          <a:bodyPr wrap="square" rtlCol="0">
-            <a:spAutoFit/>
-          </a:bodyPr>
-          <a:p>
-            <a:r>
-              <a:rPr lang="zh-CN" altLang="en-US"/>
-              <a:t>若要获得前向误差，</a:t>
-            </a:r>
-            <a:r>
-              <a:rPr lang="en-US" altLang="zh-CN"/>
-              <a:t>MUMPS</a:t>
-            </a:r>
-            <a:r>
-              <a:rPr lang="zh-CN" altLang="en-US"/>
-              <a:t>可以计算前向误差的一个上界，但需要很高的计算成本</a:t>
-            </a:r>
-            <a:r>
-              <a:rPr lang="en-US" altLang="zh-CN"/>
-              <a:t> </a:t>
-            </a:r>
-            <a:r>
-              <a:rPr lang="zh-CN" altLang="en-US"/>
-              <a:t>。计算公式</a:t>
-            </a:r>
-            <a:r>
-              <a:rPr lang="zh-CN" altLang="en-US"/>
-              <a:t>如下：</a:t>
-            </a:r>
-            <a:endParaRPr lang="zh-CN" altLang="en-US"/>
-          </a:p>
-        </p:txBody>
-      </p:sp>
       <p:pic>
         <p:nvPicPr>
-          <p:cNvPr id="3" name="图片 2" descr="QianJianTec1768198239933"/>
+          <p:cNvPr id="13" name="图片 12"/>
           <p:cNvPicPr>
             <a:picLocks noChangeAspect="1"/>
           </p:cNvPicPr>
@@ -5367,173 +5154,14 @@
         </p:blipFill>
         <p:spPr>
           <a:xfrm>
-            <a:off x="2560320" y="2094230"/>
-            <a:ext cx="7202805" cy="1444625"/>
+            <a:off x="2329815" y="729615"/>
+            <a:ext cx="6852920" cy="5534660"/>
           </a:xfrm>
           <a:prstGeom prst="rect">
             <a:avLst/>
           </a:prstGeom>
         </p:spPr>
       </p:pic>
-      <mc:AlternateContent xmlns:mc="http://schemas.openxmlformats.org/markup-compatibility/2006">
-        <mc:Choice xmlns:a14="http://schemas.microsoft.com/office/drawing/2010/main" Requires="a14">
-          <p:sp>
-            <p:nvSpPr>
-              <p:cNvPr id="13" name="文本框 12"/>
-              <p:cNvSpPr txBox="1"/>
-              <p:nvPr/>
-            </p:nvSpPr>
-            <p:spPr>
-              <a:xfrm>
-                <a:off x="379095" y="3910965"/>
-                <a:ext cx="11155680" cy="368300"/>
-              </a:xfrm>
-              <a:prstGeom prst="rect">
-                <a:avLst/>
-              </a:prstGeom>
-              <a:noFill/>
-            </p:spPr>
-            <p:txBody>
-              <a:bodyPr wrap="square" rtlCol="0">
-                <a:spAutoFit/>
-              </a:bodyPr>
-              <a:p>
-                <a:r>
-                  <a:rPr lang="zh-CN" altLang="en-US"/>
-                  <a:t>其中</a:t>
-                </a:r>
-                <a:r>
-                  <a:rPr lang="en-US" altLang="zh-CN"/>
-                  <a:t> </a:t>
-                </a:r>
-                <a14:m>
-                  <m:oMath xmlns:m="http://schemas.openxmlformats.org/officeDocument/2006/math">
-                    <m:sSub>
-                      <m:sSubPr>
-                        <m:ctrlPr>
-                          <a:rPr lang="en-US" altLang="zh-CN" i="1">
-                            <a:latin typeface="Cambria Math" panose="02040503050406030204" charset="0"/>
-                            <a:cs typeface="Cambria Math" panose="02040503050406030204" charset="0"/>
-                          </a:rPr>
-                        </m:ctrlPr>
-                      </m:sSubPr>
-                      <m:e>
-                        <m:r>
-                          <a:rPr lang="en-US" altLang="zh-CN" i="1">
-                            <a:latin typeface="Cambria Math" panose="02040503050406030204" charset="0"/>
-                            <a:cs typeface="Cambria Math" panose="02040503050406030204" charset="0"/>
-                          </a:rPr>
-                          <m:t>𝑐𝑜𝑛𝑑</m:t>
-                        </m:r>
-                      </m:e>
-                      <m:sub>
-                        <m:r>
-                          <a:rPr lang="en-US" altLang="zh-CN" i="1">
-                            <a:latin typeface="Cambria Math" panose="02040503050406030204" charset="0"/>
-                            <a:cs typeface="Cambria Math" panose="02040503050406030204" charset="0"/>
-                          </a:rPr>
-                          <m:t>1</m:t>
-                        </m:r>
-                      </m:sub>
-                    </m:sSub>
-                  </m:oMath>
-                </a14:m>
-                <a:r>
-                  <a:rPr lang="en-US" altLang="zh-CN"/>
-                  <a:t>,</a:t>
-                </a:r>
-                <a14:m>
-                  <m:oMath xmlns:m="http://schemas.openxmlformats.org/officeDocument/2006/math">
-                    <m:sSub>
-                      <m:sSubPr>
-                        <m:ctrlPr>
-                          <a:rPr lang="en-US" altLang="zh-CN" i="1">
-                            <a:latin typeface="Cambria Math" panose="02040503050406030204" charset="0"/>
-                            <a:cs typeface="Cambria Math" panose="02040503050406030204" charset="0"/>
-                          </a:rPr>
-                        </m:ctrlPr>
-                      </m:sSubPr>
-                      <m:e>
-                        <m:r>
-                          <a:rPr lang="en-US" altLang="zh-CN" i="1">
-                            <a:latin typeface="Cambria Math" panose="02040503050406030204" charset="0"/>
-                            <a:cs typeface="Cambria Math" panose="02040503050406030204" charset="0"/>
-                          </a:rPr>
-                          <m:t>𝑐𝑜𝑛𝑑</m:t>
-                        </m:r>
-                      </m:e>
-                      <m:sub>
-                        <m:r>
-                          <a:rPr lang="en-US" altLang="zh-CN" i="1">
-                            <a:latin typeface="Cambria Math" panose="02040503050406030204" charset="0"/>
-                            <a:cs typeface="Cambria Math" panose="02040503050406030204" charset="0"/>
-                          </a:rPr>
-                          <m:t>2</m:t>
-                        </m:r>
-                      </m:sub>
-                    </m:sSub>
-                  </m:oMath>
-                </a14:m>
-                <a:r>
-                  <a:rPr lang="zh-CN" altLang="en-US"/>
-                  <a:t>为与系统相关的条件数</a:t>
-                </a:r>
-                <a:r>
-                  <a:rPr lang="en-US" altLang="zh-CN"/>
-                  <a:t>,</a:t>
-                </a:r>
-                <a:r>
-                  <a:rPr lang="zh-CN" altLang="en-US"/>
-                  <a:t>计算成本</a:t>
-                </a:r>
-                <a:r>
-                  <a:rPr lang="zh-CN" altLang="en-US"/>
-                  <a:t>较大</a:t>
-                </a:r>
-                <a:endParaRPr lang="zh-CN" altLang="en-US"/>
-              </a:p>
-            </p:txBody>
-          </p:sp>
-        </mc:Choice>
-        <mc:Fallback>
-          <p:sp>
-            <p:nvSpPr>
-              <p:cNvPr id="13" name="文本框 12"/>
-              <p:cNvSpPr txBox="1">
-                <a:spLocks noRot="1" noChangeAspect="1" noMove="1" noResize="1" noEditPoints="1" noAdjustHandles="1" noChangeArrowheads="1" noChangeShapeType="1" noTextEdit="1"/>
-              </p:cNvSpPr>
-              <p:nvPr/>
-            </p:nvSpPr>
-            <p:spPr>
-              <a:xfrm>
-                <a:off x="379095" y="3910965"/>
-                <a:ext cx="11155680" cy="368300"/>
-              </a:xfrm>
-              <a:prstGeom prst="rect">
-                <a:avLst/>
-              </a:prstGeom>
-              <a:blipFill rotWithShape="1">
-                <a:blip r:embed="rId8"/>
-                <a:stretch>
-                  <a:fillRect/>
-                </a:stretch>
-              </a:blipFill>
-            </p:spPr>
-            <p:txBody>
-              <a:bodyPr/>
-              <a:lstStyle/>
-              <a:p>
-                <a:r>
-                  <a:rPr lang="zh-CN" altLang="en-US">
-                    <a:noFill/>
-                  </a:rPr>
-                  <a:t> </a:t>
-                </a:r>
-              </a:p>
-            </p:txBody>
-          </p:sp>
-        </mc:Fallback>
-      </mc:AlternateContent>
     </p:spTree>
   </p:cSld>
   <p:clrMapOvr>
@@ -5550,7 +5178,7 @@
 </p:sld>
 </file>
 
-<file path=ppt/slides/slide5.xml><?xml version="1.0" encoding="utf-8"?>
+<file path=ppt/slides/slide4.xml><?xml version="1.0" encoding="utf-8"?>
 <p:sld xmlns:a="http://schemas.openxmlformats.org/drawingml/2006/main" xmlns:r="http://schemas.openxmlformats.org/officeDocument/2006/relationships" xmlns:p="http://schemas.openxmlformats.org/presentationml/2006/main">
   <p:cSld>
     <p:bg>
@@ -5908,6 +5536,13 @@
             <a:noAutofit/>
           </a:bodyPr>
           <a:p>
+            <a:r>
+              <a:rPr lang="zh-CN" altLang="en-US" b="1">
+                <a:latin typeface="Cambria Math" panose="02040503050406030204" charset="0"/>
+                <a:cs typeface="Cambria Math" panose="02040503050406030204" charset="0"/>
+              </a:rPr>
+              <a:t>稀疏向后误差分析</a:t>
+            </a:r>
             <a:endParaRPr lang="zh-CN" altLang="en-US" b="1">
               <a:latin typeface="Cambria Math" panose="02040503050406030204" charset="0"/>
               <a:cs typeface="Cambria Math" panose="02040503050406030204" charset="0"/>
@@ -5925,8 +5560,8 @@
             </p:nvSpPr>
             <p:spPr>
               <a:xfrm>
-                <a:off x="280035" y="931545"/>
-                <a:ext cx="11490960" cy="2241550"/>
+                <a:off x="310515" y="1167765"/>
+                <a:ext cx="11612880" cy="389890"/>
               </a:xfrm>
               <a:prstGeom prst="rect">
                 <a:avLst/>
@@ -5938,238 +5573,13 @@
                 <a:spAutoFit/>
               </a:bodyPr>
               <a:p>
-                <a:pPr marL="342900" indent="-342900" fontAlgn="auto">
-                  <a:lnSpc>
-                    <a:spcPct val="150000"/>
-                  </a:lnSpc>
-                  <a:buFont typeface="+mj-lt"/>
-                  <a:buAutoNum type="arabicPeriod"/>
-                </a:pPr>
+                <a:r>
+                  <a:rPr lang="zh-CN" altLang="en-US" b="1"/>
+                  <a:t>核心思想</a:t>
+                </a:r>
                 <a:r>
                   <a:rPr lang="zh-CN" altLang="en-US"/>
-                  <a:t>硬件求解：</a:t>
-                </a:r>
-                <a:r>
-                  <a:rPr lang="en-US" altLang="zh-CN"/>
-                  <a:t>LU</a:t>
-                </a:r>
-                <a:r>
-                  <a:rPr lang="zh-CN" altLang="en-US"/>
-                  <a:t>分解</a:t>
-                </a:r>
-                <a:r>
-                  <a:rPr lang="en-US" altLang="zh-CN"/>
-                  <a:t>+</a:t>
-                </a:r>
-                <a:r>
-                  <a:rPr lang="zh-CN" altLang="en-US"/>
-                  <a:t>三角求解</a:t>
-                </a:r>
-                <a:r>
-                  <a:rPr lang="en-US" altLang="zh-CN"/>
-                  <a:t> → </a:t>
-                </a:r>
-                <a14:m>
-                  <m:oMath xmlns:m="http://schemas.openxmlformats.org/officeDocument/2006/math">
-                    <m:sSub>
-                      <m:sSubPr>
-                        <m:ctrlPr>
-                          <a:rPr lang="en-US" altLang="zh-CN">
-                            <a:latin typeface="Cambria Math" panose="02040503050406030204" charset="0"/>
-                            <a:cs typeface="Cambria Math" panose="02040503050406030204" charset="0"/>
-                          </a:rPr>
-                        </m:ctrlPr>
-                      </m:sSubPr>
-                      <m:e>
-                        <m:r>
-                          <m:rPr>
-                            <m:sty m:val="p"/>
-                          </m:rPr>
-                          <a:rPr lang="en-US" altLang="zh-CN">
-                            <a:latin typeface="Cambria Math" panose="02040503050406030204" charset="0"/>
-                            <a:cs typeface="Cambria Math" panose="02040503050406030204" charset="0"/>
-                          </a:rPr>
-                          <m:t>x</m:t>
-                        </m:r>
-                      </m:e>
-                      <m:sub>
-                        <m:r>
-                          <a:rPr lang="en-US" altLang="zh-CN">
-                            <a:latin typeface="Cambria Math" panose="02040503050406030204" charset="0"/>
-                            <a:cs typeface="Cambria Math" panose="02040503050406030204" charset="0"/>
-                          </a:rPr>
-                          <m:t>0</m:t>
-                        </m:r>
-                      </m:sub>
-                    </m:sSub>
-                  </m:oMath>
-                </a14:m>
-                <a:endParaRPr lang="en-US" altLang="zh-CN">
-                  <a:latin typeface="Cambria Math" panose="02040503050406030204" charset="0"/>
-                  <a:cs typeface="Cambria Math" panose="02040503050406030204" charset="0"/>
-                </a:endParaRPr>
-              </a:p>
-              <a:p>
-                <a:pPr marL="342900" indent="-342900" fontAlgn="auto">
-                  <a:lnSpc>
-                    <a:spcPct val="150000"/>
-                  </a:lnSpc>
-                  <a:buFont typeface="+mj-lt"/>
-                  <a:buAutoNum type="arabicPeriod"/>
-                </a:pPr>
-                <a:r>
-                  <a:rPr lang="zh-CN" altLang="en-US">
-                    <a:latin typeface="Cambria Math" panose="02040503050406030204" charset="0"/>
-                    <a:cs typeface="Cambria Math" panose="02040503050406030204" charset="0"/>
-                  </a:rPr>
-                  <a:t>软件侧误差分析，使用双精度</a:t>
-                </a:r>
-                <a:r>
-                  <a:rPr lang="en-US" altLang="zh-CN">
-                    <a:latin typeface="Cambria Math" panose="02040503050406030204" charset="0"/>
-                    <a:cs typeface="Cambria Math" panose="02040503050406030204" charset="0"/>
-                  </a:rPr>
-                  <a:t>(</a:t>
-                </a:r>
-                <a:r>
-                  <a:rPr lang="zh-CN" altLang="en-US">
-                    <a:latin typeface="Cambria Math" panose="02040503050406030204" charset="0"/>
-                    <a:cs typeface="Cambria Math" panose="02040503050406030204" charset="0"/>
-                  </a:rPr>
-                  <a:t>更高的精度</a:t>
-                </a:r>
-                <a:r>
-                  <a:rPr lang="en-US" altLang="zh-CN">
-                    <a:latin typeface="Cambria Math" panose="02040503050406030204" charset="0"/>
-                    <a:cs typeface="Cambria Math" panose="02040503050406030204" charset="0"/>
-                  </a:rPr>
-                  <a:t>)</a:t>
-                </a:r>
-                <a:r>
-                  <a:rPr lang="zh-CN" altLang="en-US">
-                    <a:latin typeface="Cambria Math" panose="02040503050406030204" charset="0"/>
-                    <a:cs typeface="Cambria Math" panose="02040503050406030204" charset="0"/>
-                  </a:rPr>
-                  <a:t>计算</a:t>
-                </a:r>
-                <a14:m>
-                  <m:oMath xmlns:m="http://schemas.openxmlformats.org/officeDocument/2006/math">
-                    <m:sSub>
-                      <m:sSubPr>
-                        <m:ctrlPr>
-                          <a:rPr lang="en-US" altLang="zh-CN" i="1">
-                            <a:latin typeface="Cambria Math" panose="02040503050406030204" charset="0"/>
-                            <a:cs typeface="Cambria Math" panose="02040503050406030204" charset="0"/>
-                          </a:rPr>
-                        </m:ctrlPr>
-                      </m:sSubPr>
-                      <m:e>
-                        <m:r>
-                          <a:rPr lang="en-US" altLang="zh-CN" i="1">
-                            <a:latin typeface="Cambria Math" panose="02040503050406030204" charset="0"/>
-                            <a:cs typeface="Cambria Math" panose="02040503050406030204" charset="0"/>
-                          </a:rPr>
-                          <m:t>𝜔</m:t>
-                        </m:r>
-                      </m:e>
-                      <m:sub>
-                        <m:r>
-                          <a:rPr lang="en-US" altLang="zh-CN" i="1">
-                            <a:latin typeface="Cambria Math" panose="02040503050406030204" charset="0"/>
-                            <a:cs typeface="Cambria Math" panose="02040503050406030204" charset="0"/>
-                          </a:rPr>
-                          <m:t>1</m:t>
-                        </m:r>
-                      </m:sub>
-                    </m:sSub>
-                  </m:oMath>
-                </a14:m>
-                <a:r>
-                  <a:rPr lang="zh-CN" altLang="en-US">
-                    <a:latin typeface="Cambria Math" panose="02040503050406030204" charset="0"/>
-                    <a:cs typeface="Cambria Math" panose="02040503050406030204" charset="0"/>
-                  </a:rPr>
-                  <a:t>，若</a:t>
-                </a:r>
-                <a14:m>
-                  <m:oMath xmlns:m="http://schemas.openxmlformats.org/officeDocument/2006/math">
-                    <m:sSub>
-                      <m:sSubPr>
-                        <m:ctrlPr>
-                          <a:rPr lang="en-US" altLang="zh-CN" i="1">
-                            <a:latin typeface="Cambria Math" panose="02040503050406030204" charset="0"/>
-                            <a:cs typeface="Cambria Math" panose="02040503050406030204" charset="0"/>
-                          </a:rPr>
-                        </m:ctrlPr>
-                      </m:sSubPr>
-                      <m:e>
-                        <m:r>
-                          <a:rPr lang="en-US" altLang="zh-CN" i="1">
-                            <a:latin typeface="Cambria Math" panose="02040503050406030204" charset="0"/>
-                            <a:cs typeface="Cambria Math" panose="02040503050406030204" charset="0"/>
-                          </a:rPr>
-                          <m:t>𝜔</m:t>
-                        </m:r>
-                      </m:e>
-                      <m:sub>
-                        <m:r>
-                          <a:rPr lang="en-US" altLang="zh-CN" i="1">
-                            <a:latin typeface="Cambria Math" panose="02040503050406030204" charset="0"/>
-                            <a:cs typeface="Cambria Math" panose="02040503050406030204" charset="0"/>
-                          </a:rPr>
-                          <m:t>1</m:t>
-                        </m:r>
-                      </m:sub>
-                    </m:sSub>
-                    <m:r>
-                      <a:rPr lang="en-US" altLang="zh-CN" i="1">
-                        <a:latin typeface="Cambria Math" panose="02040503050406030204" charset="0"/>
-                        <a:cs typeface="Cambria Math" panose="02040503050406030204" charset="0"/>
-                      </a:rPr>
-                      <m:t>&lt;</m:t>
-                    </m:r>
-                    <m:r>
-                      <a:rPr lang="en-US" altLang="zh-CN" i="1">
-                        <a:latin typeface="Cambria Math" panose="02040503050406030204" charset="0"/>
-                        <a:cs typeface="Cambria Math" panose="02040503050406030204" charset="0"/>
-                      </a:rPr>
-                      <m:t>𝑇ℎ𝑟𝑒𝑠ℎ𝑜𝑙𝑑</m:t>
-                    </m:r>
-                  </m:oMath>
-                </a14:m>
-                <a:r>
-                  <a:rPr lang="zh-CN" altLang="en-US">
-                    <a:latin typeface="Cambria Math" panose="02040503050406030204" charset="0"/>
-                    <a:cs typeface="Cambria Math" panose="02040503050406030204" charset="0"/>
-                  </a:rPr>
-                  <a:t>则直接输出解，否则进入迭代求精</a:t>
-                </a:r>
-                <a:r>
-                  <a:rPr lang="zh-CN" altLang="en-US">
-                    <a:latin typeface="Cambria Math" panose="02040503050406030204" charset="0"/>
-                    <a:cs typeface="Cambria Math" panose="02040503050406030204" charset="0"/>
-                  </a:rPr>
-                  <a:t>阶段。</a:t>
-                </a:r>
-                <a:endParaRPr lang="zh-CN" altLang="en-US">
-                  <a:latin typeface="Cambria Math" panose="02040503050406030204" charset="0"/>
-                  <a:cs typeface="Cambria Math" panose="02040503050406030204" charset="0"/>
-                </a:endParaRPr>
-              </a:p>
-              <a:p>
-                <a:pPr marL="342900" indent="-342900" fontAlgn="auto">
-                  <a:lnSpc>
-                    <a:spcPct val="150000"/>
-                  </a:lnSpc>
-                  <a:buFont typeface="+mj-lt"/>
-                  <a:buAutoNum type="arabicPeriod"/>
-                </a:pPr>
-                <a:r>
-                  <a:rPr lang="zh-CN" altLang="en-US">
-                    <a:latin typeface="Cambria Math" panose="02040503050406030204" charset="0"/>
-                    <a:cs typeface="Cambria Math" panose="02040503050406030204" charset="0"/>
-                  </a:rPr>
-                  <a:t>软件侧计算残差</a:t>
+                  <a:t>：寻找微小的扰动</a:t>
                 </a:r>
                 <a14:m>
                   <m:oMath xmlns:m="http://schemas.openxmlformats.org/officeDocument/2006/math">
@@ -6178,8 +5588,153 @@
                         <a:latin typeface="Cambria Math" panose="02040503050406030204" charset="0"/>
                         <a:cs typeface="Cambria Math" panose="02040503050406030204" charset="0"/>
                       </a:rPr>
-                      <m:t>𝑟</m:t>
+                      <m:t>（</m:t>
                     </m:r>
+                    <m:r>
+                      <a:rPr lang="en-US" altLang="zh-CN" i="1">
+                        <a:latin typeface="Cambria Math" panose="02040503050406030204" charset="0"/>
+                        <a:ea typeface="MS Mincho" charset="0"/>
+                        <a:cs typeface="Cambria Math" panose="02040503050406030204" charset="0"/>
+                      </a:rPr>
+                      <m:t>𝛿</m:t>
+                    </m:r>
+                    <m:r>
+                      <a:rPr lang="en-US" altLang="zh-CN" i="1">
+                        <a:latin typeface="Cambria Math" panose="02040503050406030204" charset="0"/>
+                        <a:ea typeface="MS Mincho" charset="0"/>
+                        <a:cs typeface="Cambria Math" panose="02040503050406030204" charset="0"/>
+                      </a:rPr>
+                      <m:t>𝐴</m:t>
+                    </m:r>
+                    <m:r>
+                      <a:rPr lang="en-US" altLang="zh-CN" i="1">
+                        <a:latin typeface="Cambria Math" panose="02040503050406030204" charset="0"/>
+                        <a:ea typeface="MS Mincho" charset="0"/>
+                        <a:cs typeface="Cambria Math" panose="02040503050406030204" charset="0"/>
+                      </a:rPr>
+                      <m:t>,</m:t>
+                    </m:r>
+                    <m:r>
+                      <a:rPr lang="en-US" altLang="zh-CN" i="1">
+                        <a:latin typeface="Cambria Math" panose="02040503050406030204" charset="0"/>
+                        <a:ea typeface="MS Mincho" charset="0"/>
+                        <a:cs typeface="Cambria Math" panose="02040503050406030204" charset="0"/>
+                      </a:rPr>
+                      <m:t>𝛿</m:t>
+                    </m:r>
+                    <m:r>
+                      <a:rPr lang="en-US" altLang="zh-CN" i="1">
+                        <a:latin typeface="Cambria Math" panose="02040503050406030204" charset="0"/>
+                        <a:ea typeface="MS Mincho" charset="0"/>
+                        <a:cs typeface="Cambria Math" panose="02040503050406030204" charset="0"/>
+                      </a:rPr>
+                      <m:t>𝑏</m:t>
+                    </m:r>
+                    <m:r>
+                      <a:rPr lang="en-US" altLang="zh-CN" i="1">
+                        <a:latin typeface="Cambria Math" panose="02040503050406030204" charset="0"/>
+                        <a:cs typeface="Cambria Math" panose="02040503050406030204" charset="0"/>
+                      </a:rPr>
+                      <m:t>）</m:t>
+                    </m:r>
+                  </m:oMath>
+                </a14:m>
+                <a:r>
+                  <a:rPr lang="zh-CN" altLang="en-US"/>
+                  <a:t>使得</a:t>
+                </a:r>
+                <a14:m>
+                  <m:oMath xmlns:m="http://schemas.openxmlformats.org/officeDocument/2006/math">
+                    <m:acc>
+                      <m:accPr>
+                        <m:chr m:val="̅"/>
+                        <m:ctrlPr>
+                          <a:rPr lang="en-US" altLang="zh-CN" i="1">
+                            <a:latin typeface="Cambria Math" panose="02040503050406030204" charset="0"/>
+                            <a:cs typeface="Cambria Math" panose="02040503050406030204" charset="0"/>
+                          </a:rPr>
+                        </m:ctrlPr>
+                      </m:accPr>
+                      <m:e>
+                        <m:r>
+                          <a:rPr lang="en-US" altLang="zh-CN" i="1">
+                            <a:latin typeface="Cambria Math" panose="02040503050406030204" charset="0"/>
+                            <a:cs typeface="Cambria Math" panose="02040503050406030204" charset="0"/>
+                          </a:rPr>
+                          <m:t>𝑥</m:t>
+                        </m:r>
+                      </m:e>
+                    </m:acc>
+                  </m:oMath>
+                </a14:m>
+                <a:r>
+                  <a:rPr lang="zh-CN" altLang="en-US"/>
+                  <a:t>是扰动系统</a:t>
+                </a:r>
+                <a14:m>
+                  <m:oMath xmlns:m="http://schemas.openxmlformats.org/officeDocument/2006/math">
+                    <m:r>
+                      <a:rPr lang="en-US" altLang="zh-CN" i="1">
+                        <a:latin typeface="Cambria Math" panose="02040503050406030204" charset="0"/>
+                        <a:cs typeface="Cambria Math" panose="02040503050406030204" charset="0"/>
+                      </a:rPr>
+                      <m:t>(</m:t>
+                    </m:r>
+                    <m:r>
+                      <a:rPr lang="en-US" altLang="zh-CN" i="1">
+                        <a:latin typeface="Cambria Math" panose="02040503050406030204" charset="0"/>
+                        <a:cs typeface="Cambria Math" panose="02040503050406030204" charset="0"/>
+                      </a:rPr>
+                      <m:t>𝐴</m:t>
+                    </m:r>
+                    <m:r>
+                      <a:rPr lang="en-US" altLang="zh-CN" i="1">
+                        <a:latin typeface="Cambria Math" panose="02040503050406030204" charset="0"/>
+                        <a:cs typeface="Cambria Math" panose="02040503050406030204" charset="0"/>
+                      </a:rPr>
+                      <m:t>+</m:t>
+                    </m:r>
+                    <m:r>
+                      <a:rPr lang="en-US" altLang="zh-CN" i="1">
+                        <a:latin typeface="Cambria Math" panose="02040503050406030204" charset="0"/>
+                        <a:cs typeface="Cambria Math" panose="02040503050406030204" charset="0"/>
+                      </a:rPr>
+                      <m:t>𝛿</m:t>
+                    </m:r>
+                    <m:r>
+                      <a:rPr lang="en-US" altLang="zh-CN" i="1">
+                        <a:latin typeface="Cambria Math" panose="02040503050406030204" charset="0"/>
+                        <a:cs typeface="Cambria Math" panose="02040503050406030204" charset="0"/>
+                      </a:rPr>
+                      <m:t>𝐴</m:t>
+                    </m:r>
+                    <m:r>
+                      <a:rPr lang="en-US" altLang="zh-CN" i="1">
+                        <a:latin typeface="Cambria Math" panose="02040503050406030204" charset="0"/>
+                        <a:cs typeface="Cambria Math" panose="02040503050406030204" charset="0"/>
+                      </a:rPr>
+                      <m:t>)</m:t>
+                    </m:r>
+                    <m:acc>
+                      <m:accPr>
+                        <m:chr m:val="̅"/>
+                        <m:ctrlPr>
+                          <a:rPr lang="en-US" altLang="zh-CN" i="1">
+                            <a:latin typeface="Cambria Math" panose="02040503050406030204" charset="0"/>
+                            <a:cs typeface="Cambria Math" panose="02040503050406030204" charset="0"/>
+                          </a:rPr>
+                        </m:ctrlPr>
+                      </m:accPr>
+                      <m:e>
+                        <m:r>
+                          <a:rPr lang="en-US" altLang="zh-CN" i="1">
+                            <a:latin typeface="Cambria Math" panose="02040503050406030204" charset="0"/>
+                            <a:cs typeface="Cambria Math" panose="02040503050406030204" charset="0"/>
+                          </a:rPr>
+                          <m:t>𝑥</m:t>
+                        </m:r>
+                      </m:e>
+                    </m:acc>
                     <m:r>
                       <a:rPr lang="en-US" altLang="zh-CN" i="1">
                         <a:latin typeface="Cambria Math" panose="02040503050406030204" charset="0"/>
@@ -6192,375 +5747,8 @@
                         <a:latin typeface="Cambria Math" panose="02040503050406030204" charset="0"/>
                         <a:cs typeface="Cambria Math" panose="02040503050406030204" charset="0"/>
                       </a:rPr>
-                      <m:t>𝑏−𝐴</m:t>
+                      <m:t>𝑏</m:t>
                     </m:r>
-                    <m:sSub>
-                      <m:sSubPr>
-                        <m:ctrlPr>
-                          <a:rPr lang="en-US" altLang="zh-CN" i="1">
-                            <a:latin typeface="Cambria Math" panose="02040503050406030204" charset="0"/>
-                            <a:cs typeface="Cambria Math" panose="02040503050406030204" charset="0"/>
-                          </a:rPr>
-                        </m:ctrlPr>
-                      </m:sSubPr>
-                      <m:e>
-                        <m:r>
-                          <a:rPr lang="en-US" altLang="zh-CN" i="1">
-                            <a:latin typeface="Cambria Math" panose="02040503050406030204" charset="0"/>
-                            <a:cs typeface="Cambria Math" panose="02040503050406030204" charset="0"/>
-                          </a:rPr>
-                          <m:t>𝑥</m:t>
-                        </m:r>
-                      </m:e>
-                      <m:sub>
-                        <m:r>
-                          <a:rPr lang="en-US" altLang="zh-CN" i="1">
-                            <a:latin typeface="Cambria Math" panose="02040503050406030204" charset="0"/>
-                            <a:cs typeface="Cambria Math" panose="02040503050406030204" charset="0"/>
-                          </a:rPr>
-                          <m:t>𝑘</m:t>
-                        </m:r>
-                      </m:sub>
-                    </m:sSub>
-                  </m:oMath>
-                </a14:m>
-                <a:r>
-                  <a:rPr lang="zh-CN" altLang="en-US">
-                    <a:latin typeface="Cambria Math" panose="02040503050406030204" charset="0"/>
-                    <a:cs typeface="Cambria Math" panose="02040503050406030204" charset="0"/>
-                  </a:rPr>
-                  <a:t>，计算动态放缩因子</a:t>
-                </a:r>
-                <a14:m>
-                  <m:oMath xmlns:m="http://schemas.openxmlformats.org/officeDocument/2006/math">
-                    <m:r>
-                      <a:rPr lang="en-US" altLang="zh-CN" i="1">
-                        <a:latin typeface="Cambria Math" panose="02040503050406030204" charset="0"/>
-                        <a:cs typeface="Cambria Math" panose="02040503050406030204" charset="0"/>
-                      </a:rPr>
-                      <m:t>𝛼</m:t>
-                    </m:r>
-                  </m:oMath>
-                </a14:m>
-                <a:r>
-                  <a:rPr lang="zh-CN" altLang="en-US">
-                    <a:latin typeface="Cambria Math" panose="02040503050406030204" charset="0"/>
-                    <a:cs typeface="Cambria Math" panose="02040503050406030204" charset="0"/>
-                  </a:rPr>
-                  <a:t>，使得</a:t>
-                </a:r>
-                <a14:m>
-                  <m:oMath xmlns:m="http://schemas.openxmlformats.org/officeDocument/2006/math">
-                    <m:sSup>
-                      <m:sSupPr>
-                        <m:ctrlPr>
-                          <a:rPr lang="en-US" altLang="zh-CN" i="1">
-                            <a:latin typeface="Cambria Math" panose="02040503050406030204" charset="0"/>
-                            <a:cs typeface="Cambria Math" panose="02040503050406030204" charset="0"/>
-                          </a:rPr>
-                        </m:ctrlPr>
-                      </m:sSupPr>
-                      <m:e>
-                        <m:r>
-                          <a:rPr lang="en-US" altLang="zh-CN" i="1">
-                            <a:latin typeface="Cambria Math" panose="02040503050406030204" charset="0"/>
-                            <a:cs typeface="Cambria Math" panose="02040503050406030204" charset="0"/>
-                          </a:rPr>
-                          <m:t>r</m:t>
-                        </m:r>
-                      </m:e>
-                      <m:sup>
-                        <m:r>
-                          <a:rPr lang="en-US" altLang="zh-CN" i="1">
-                            <a:latin typeface="Cambria Math" panose="02040503050406030204" charset="0"/>
-                            <a:cs typeface="Cambria Math" panose="02040503050406030204" charset="0"/>
-                          </a:rPr>
-                          <m:t>’</m:t>
-                        </m:r>
-                      </m:sup>
-                    </m:sSup>
-                    <m:r>
-                      <a:rPr lang="en-US" altLang="zh-CN" i="1">
-                        <a:latin typeface="Cambria Math" panose="02040503050406030204" charset="0"/>
-                        <a:cs typeface="Cambria Math" panose="02040503050406030204" charset="0"/>
-                      </a:rPr>
-                      <m:t>=</m:t>
-                    </m:r>
-                    <m:r>
-                      <a:rPr lang="en-US" altLang="zh-CN" i="1">
-                        <a:latin typeface="Cambria Math" panose="02040503050406030204" charset="0"/>
-                        <a:cs typeface="Cambria Math" panose="02040503050406030204" charset="0"/>
-                      </a:rPr>
-                      <m:t>𝛼</m:t>
-                    </m:r>
-                    <m:r>
-                      <a:rPr lang="en-US" altLang="zh-CN" i="1">
-                        <a:latin typeface="Cambria Math" panose="02040503050406030204" charset="0"/>
-                        <a:cs typeface="Cambria Math" panose="02040503050406030204" charset="0"/>
-                      </a:rPr>
-                      <m:t>𝑟</m:t>
-                    </m:r>
-                  </m:oMath>
-                </a14:m>
-                <a:r>
-                  <a:rPr lang="en-US" altLang="zh-CN">
-                    <a:latin typeface="Cambria Math" panose="02040503050406030204" charset="0"/>
-                    <a:cs typeface="Cambria Math" panose="02040503050406030204" charset="0"/>
-                  </a:rPr>
-                  <a:t>.</a:t>
-                </a:r>
-                <a:r>
-                  <a:rPr lang="zh-CN" altLang="en-US">
-                    <a:latin typeface="Cambria Math" panose="02040503050406030204" charset="0"/>
-                    <a:cs typeface="Cambria Math" panose="02040503050406030204" charset="0"/>
-                  </a:rPr>
-                  <a:t>将</a:t>
-                </a:r>
-                <a14:m>
-                  <m:oMath xmlns:m="http://schemas.openxmlformats.org/officeDocument/2006/math">
-                    <m:sSup>
-                      <m:sSupPr>
-                        <m:ctrlPr>
-                          <a:rPr lang="en-US" altLang="zh-CN" i="1">
-                            <a:latin typeface="Cambria Math" panose="02040503050406030204" charset="0"/>
-                            <a:cs typeface="Cambria Math" panose="02040503050406030204" charset="0"/>
-                          </a:rPr>
-                        </m:ctrlPr>
-                      </m:sSupPr>
-                      <m:e>
-                        <m:r>
-                          <a:rPr lang="en-US" altLang="zh-CN" i="1">
-                            <a:latin typeface="Cambria Math" panose="02040503050406030204" charset="0"/>
-                            <a:cs typeface="Cambria Math" panose="02040503050406030204" charset="0"/>
-                          </a:rPr>
-                          <m:t>r</m:t>
-                        </m:r>
-                      </m:e>
-                      <m:sup>
-                        <m:r>
-                          <a:rPr lang="en-US" altLang="zh-CN" i="1">
-                            <a:latin typeface="Cambria Math" panose="02040503050406030204" charset="0"/>
-                            <a:cs typeface="Cambria Math" panose="02040503050406030204" charset="0"/>
-                          </a:rPr>
-                          <m:t>’</m:t>
-                        </m:r>
-                      </m:sup>
-                    </m:sSup>
-                  </m:oMath>
-                </a14:m>
-                <a:r>
-                  <a:rPr lang="zh-CN" altLang="en-US">
-                    <a:latin typeface="Cambria Math" panose="02040503050406030204" charset="0"/>
-                    <a:cs typeface="Cambria Math" panose="02040503050406030204" charset="0"/>
-                  </a:rPr>
-                  <a:t>发送到硬件侧，复用之前分解得到的</a:t>
-                </a:r>
-                <a:r>
-                  <a:rPr lang="en-US" altLang="zh-CN">
-                    <a:latin typeface="Cambria Math" panose="02040503050406030204" charset="0"/>
-                    <a:cs typeface="Cambria Math" panose="02040503050406030204" charset="0"/>
-                  </a:rPr>
-                  <a:t>LU</a:t>
-                </a:r>
-                <a:r>
-                  <a:rPr lang="zh-CN" altLang="en-US">
-                    <a:latin typeface="Cambria Math" panose="02040503050406030204" charset="0"/>
-                    <a:cs typeface="Cambria Math" panose="02040503050406030204" charset="0"/>
-                  </a:rPr>
-                  <a:t>，求解得到修正向量</a:t>
-                </a:r>
-                <a14:m>
-                  <m:oMath xmlns:m="http://schemas.openxmlformats.org/officeDocument/2006/math">
-                    <m:sSup>
-                      <m:sSupPr>
-                        <m:ctrlPr>
-                          <a:rPr lang="en-US" altLang="zh-CN" i="1">
-                            <a:latin typeface="Cambria Math" panose="02040503050406030204" charset="0"/>
-                            <a:cs typeface="Cambria Math" panose="02040503050406030204" charset="0"/>
-                          </a:rPr>
-                        </m:ctrlPr>
-                      </m:sSupPr>
-                      <m:e>
-                        <m:r>
-                          <a:rPr lang="en-US" altLang="zh-CN" i="1">
-                            <a:latin typeface="Cambria Math" panose="02040503050406030204" charset="0"/>
-                            <a:cs typeface="Cambria Math" panose="02040503050406030204" charset="0"/>
-                          </a:rPr>
-                          <m:t>d</m:t>
-                        </m:r>
-                      </m:e>
-                      <m:sup>
-                        <m:r>
-                          <a:rPr lang="en-US" altLang="zh-CN" i="1">
-                            <a:latin typeface="Cambria Math" panose="02040503050406030204" charset="0"/>
-                            <a:cs typeface="Cambria Math" panose="02040503050406030204" charset="0"/>
-                          </a:rPr>
-                          <m:t>’</m:t>
-                        </m:r>
-                      </m:sup>
-                    </m:sSup>
-                  </m:oMath>
-                </a14:m>
-                <a:r>
-                  <a:rPr lang="en-US" altLang="zh-CN">
-                    <a:latin typeface="Cambria Math" panose="02040503050406030204" charset="0"/>
-                    <a:cs typeface="Cambria Math" panose="02040503050406030204" charset="0"/>
-                  </a:rPr>
-                  <a:t>.</a:t>
-                </a:r>
-                <a:r>
-                  <a:rPr lang="zh-CN" altLang="en-US">
-                    <a:latin typeface="Cambria Math" panose="02040503050406030204" charset="0"/>
-                    <a:cs typeface="Cambria Math" panose="02040503050406030204" charset="0"/>
-                  </a:rPr>
-                  <a:t>软件侧计算</a:t>
-                </a:r>
-                <a14:m>
-                  <m:oMath xmlns:m="http://schemas.openxmlformats.org/officeDocument/2006/math">
-                    <m:r>
-                      <a:rPr lang="en-US" altLang="zh-CN" i="1">
-                        <a:latin typeface="Cambria Math" panose="02040503050406030204" charset="0"/>
-                        <a:cs typeface="Cambria Math" panose="02040503050406030204" charset="0"/>
-                      </a:rPr>
-                      <m:t>d</m:t>
-                    </m:r>
-                    <m:r>
-                      <a:rPr lang="en-US" altLang="zh-CN" i="1">
-                        <a:latin typeface="Cambria Math" panose="02040503050406030204" charset="0"/>
-                        <a:cs typeface="Cambria Math" panose="02040503050406030204" charset="0"/>
-                      </a:rPr>
-                      <m:t>=</m:t>
-                    </m:r>
-                    <m:sSup>
-                      <m:sSupPr>
-                        <m:ctrlPr>
-                          <a:rPr lang="en-US" altLang="zh-CN" i="1">
-                            <a:latin typeface="Cambria Math" panose="02040503050406030204" charset="0"/>
-                            <a:cs typeface="Cambria Math" panose="02040503050406030204" charset="0"/>
-                          </a:rPr>
-                        </m:ctrlPr>
-                      </m:sSupPr>
-                      <m:e>
-                        <m:r>
-                          <a:rPr lang="en-US" altLang="zh-CN" i="1">
-                            <a:latin typeface="Cambria Math" panose="02040503050406030204" charset="0"/>
-                            <a:cs typeface="Cambria Math" panose="02040503050406030204" charset="0"/>
-                          </a:rPr>
-                          <m:t>𝑑</m:t>
-                        </m:r>
-                      </m:e>
-                      <m:sup>
-                        <m:r>
-                          <a:rPr lang="en-US" altLang="zh-CN" i="1">
-                            <a:latin typeface="Cambria Math" panose="02040503050406030204" charset="0"/>
-                            <a:cs typeface="Cambria Math" panose="02040503050406030204" charset="0"/>
-                          </a:rPr>
-                          <m:t>’</m:t>
-                        </m:r>
-                      </m:sup>
-                    </m:sSup>
-                    <m:r>
-                      <a:rPr lang="en-US" altLang="zh-CN" i="1">
-                        <a:latin typeface="Cambria Math" panose="02040503050406030204" charset="0"/>
-                        <a:cs typeface="Cambria Math" panose="02040503050406030204" charset="0"/>
-                      </a:rPr>
-                      <m:t>/</m:t>
-                    </m:r>
-                    <m:r>
-                      <a:rPr lang="en-US" altLang="zh-CN" i="1">
-                        <a:latin typeface="Cambria Math" panose="02040503050406030204" charset="0"/>
-                        <a:cs typeface="Cambria Math" panose="02040503050406030204" charset="0"/>
-                      </a:rPr>
-                      <m:t>𝛼</m:t>
-                    </m:r>
-                  </m:oMath>
-                </a14:m>
-                <a:r>
-                  <a:rPr lang="en-US" altLang="zh-CN" i="1">
-                    <a:latin typeface="Cambria Math" panose="02040503050406030204" charset="0"/>
-                    <a:cs typeface="Cambria Math" panose="02040503050406030204" charset="0"/>
-                  </a:rPr>
-                  <a:t>,</a:t>
-                </a:r>
-                <a14:m>
-                  <m:oMath xmlns:m="http://schemas.openxmlformats.org/officeDocument/2006/math">
-                    <m:sSub>
-                      <m:sSubPr>
-                        <m:ctrlPr>
-                          <a:rPr lang="en-US" altLang="zh-CN" i="1">
-                            <a:latin typeface="Cambria Math" panose="02040503050406030204" charset="0"/>
-                            <a:cs typeface="Cambria Math" panose="02040503050406030204" charset="0"/>
-                          </a:rPr>
-                        </m:ctrlPr>
-                      </m:sSubPr>
-                      <m:e>
-                        <m:r>
-                          <a:rPr lang="en-US" altLang="zh-CN" i="1">
-                            <a:latin typeface="Cambria Math" panose="02040503050406030204" charset="0"/>
-                            <a:cs typeface="Cambria Math" panose="02040503050406030204" charset="0"/>
-                          </a:rPr>
-                          <m:t>𝑥</m:t>
-                        </m:r>
-                      </m:e>
-                      <m:sub>
-                        <m:r>
-                          <a:rPr lang="en-US" altLang="zh-CN" i="1">
-                            <a:latin typeface="Cambria Math" panose="02040503050406030204" charset="0"/>
-                            <a:cs typeface="Cambria Math" panose="02040503050406030204" charset="0"/>
-                          </a:rPr>
-                          <m:t>𝑘</m:t>
-                        </m:r>
-                        <m:r>
-                          <a:rPr lang="en-US" altLang="zh-CN" i="1">
-                            <a:latin typeface="Cambria Math" panose="02040503050406030204" charset="0"/>
-                            <a:cs typeface="Cambria Math" panose="02040503050406030204" charset="0"/>
-                          </a:rPr>
-                          <m:t>+</m:t>
-                        </m:r>
-                        <m:r>
-                          <a:rPr lang="en-US" altLang="zh-CN" i="1">
-                            <a:latin typeface="Cambria Math" panose="02040503050406030204" charset="0"/>
-                            <a:cs typeface="Cambria Math" panose="02040503050406030204" charset="0"/>
-                          </a:rPr>
-                          <m:t>1</m:t>
-                        </m:r>
-                      </m:sub>
-                    </m:sSub>
-                    <m:r>
-                      <a:rPr lang="en-US" altLang="zh-CN" i="1">
-                        <a:latin typeface="Cambria Math" panose="02040503050406030204" charset="0"/>
-                        <a:cs typeface="Cambria Math" panose="02040503050406030204" charset="0"/>
-                      </a:rPr>
-                      <m:t>=</m:t>
-                    </m:r>
-                    <m:sSub>
-                      <m:sSubPr>
-                        <m:ctrlPr>
-                          <a:rPr lang="en-US" altLang="zh-CN" i="1">
-                            <a:latin typeface="Cambria Math" panose="02040503050406030204" charset="0"/>
-                            <a:cs typeface="Cambria Math" panose="02040503050406030204" charset="0"/>
-                          </a:rPr>
-                        </m:ctrlPr>
-                      </m:sSubPr>
-                      <m:e>
-                        <m:r>
-                          <a:rPr lang="en-US" altLang="zh-CN" i="1">
-                            <a:latin typeface="Cambria Math" panose="02040503050406030204" charset="0"/>
-                            <a:cs typeface="Cambria Math" panose="02040503050406030204" charset="0"/>
-                          </a:rPr>
-                          <m:t>𝑥</m:t>
-                        </m:r>
-                      </m:e>
-                      <m:sub>
-                        <m:r>
-                          <a:rPr lang="en-US" altLang="zh-CN" i="1">
-                            <a:latin typeface="Cambria Math" panose="02040503050406030204" charset="0"/>
-                            <a:cs typeface="Cambria Math" panose="02040503050406030204" charset="0"/>
-                          </a:rPr>
-                          <m:t>𝑘</m:t>
-                        </m:r>
-                      </m:sub>
-                    </m:sSub>
                     <m:r>
                       <a:rPr lang="en-US" altLang="zh-CN" i="1">
                         <a:latin typeface="Cambria Math" panose="02040503050406030204" charset="0"/>
@@ -6573,28 +5761,26 @@
                         <a:latin typeface="Cambria Math" panose="02040503050406030204" charset="0"/>
                         <a:cs typeface="Cambria Math" panose="02040503050406030204" charset="0"/>
                       </a:rPr>
-                      <m:t>𝑑</m:t>
+                      <m:t>𝛿</m:t>
+                    </m:r>
+                    <m:r>
+                      <a:rPr lang="en-US" altLang="zh-CN" i="1">
+                        <a:latin typeface="Cambria Math" panose="02040503050406030204" charset="0"/>
+                        <a:cs typeface="Cambria Math" panose="02040503050406030204" charset="0"/>
+                      </a:rPr>
+                      <m:t>𝑏</m:t>
                     </m:r>
                   </m:oMath>
                 </a14:m>
                 <a:r>
-                  <a:rPr lang="zh-CN" altLang="en-US">
-                    <a:latin typeface="Cambria Math" panose="02040503050406030204" charset="0"/>
-                    <a:cs typeface="Cambria Math" panose="02040503050406030204" charset="0"/>
-                  </a:rPr>
-                  <a:t>。然后回到第二步</a:t>
-                </a:r>
-                <a:r>
-                  <a:rPr lang="zh-CN" altLang="en-US">
-                    <a:latin typeface="Cambria Math" panose="02040503050406030204" charset="0"/>
-                    <a:cs typeface="Cambria Math" panose="02040503050406030204" charset="0"/>
-                  </a:rPr>
-                  <a:t>循环。</a:t>
-                </a:r>
-                <a:endParaRPr lang="zh-CN" altLang="en-US">
-                  <a:latin typeface="Cambria Math" panose="02040503050406030204" charset="0"/>
-                  <a:cs typeface="Cambria Math" panose="02040503050406030204" charset="0"/>
-                </a:endParaRPr>
+                  <a:rPr lang="en-US" altLang="zh-CN"/>
+                  <a:t> </a:t>
+                </a:r>
+                <a:r>
+                  <a:rPr lang="zh-CN" altLang="en-US"/>
+                  <a:t>的精确解。</a:t>
+                </a:r>
+                <a:endParaRPr lang="zh-CN" altLang="en-US"/>
               </a:p>
             </p:txBody>
           </p:sp>
@@ -6610,8 +5796,8 @@
             </p:nvSpPr>
             <p:spPr>
               <a:xfrm>
-                <a:off x="280035" y="931545"/>
-                <a:ext cx="11490960" cy="2241550"/>
+                <a:off x="310515" y="1167765"/>
+                <a:ext cx="11612880" cy="389890"/>
               </a:xfrm>
               <a:prstGeom prst="rect">
                 <a:avLst/>
@@ -6638,6 +5824,54 @@
           </p:sp>
         </mc:Fallback>
       </mc:AlternateContent>
+      <p:pic>
+        <p:nvPicPr>
+          <p:cNvPr id="14" name="图片 13" descr="QianJianTec1768187418771"/>
+          <p:cNvPicPr>
+            <a:picLocks noChangeAspect="1"/>
+          </p:cNvPicPr>
+          <p:nvPr/>
+        </p:nvPicPr>
+        <p:blipFill>
+          <a:blip r:embed="rId8"/>
+          <a:stretch>
+            <a:fillRect/>
+          </a:stretch>
+        </p:blipFill>
+        <p:spPr>
+          <a:xfrm>
+            <a:off x="3636645" y="1974215"/>
+            <a:ext cx="4220210" cy="1304925"/>
+          </a:xfrm>
+          <a:prstGeom prst="rect">
+            <a:avLst/>
+          </a:prstGeom>
+        </p:spPr>
+      </p:pic>
+      <p:pic>
+        <p:nvPicPr>
+          <p:cNvPr id="15" name="图片 14" descr="QianJianTec1768187743679"/>
+          <p:cNvPicPr>
+            <a:picLocks noChangeAspect="1"/>
+          </p:cNvPicPr>
+          <p:nvPr/>
+        </p:nvPicPr>
+        <p:blipFill>
+          <a:blip r:embed="rId9"/>
+          <a:stretch>
+            <a:fillRect/>
+          </a:stretch>
+        </p:blipFill>
+        <p:spPr>
+          <a:xfrm>
+            <a:off x="3484245" y="3596640"/>
+            <a:ext cx="6339840" cy="1390650"/>
+          </a:xfrm>
+          <a:prstGeom prst="rect">
+            <a:avLst/>
+          </a:prstGeom>
+        </p:spPr>
+      </p:pic>
     </p:spTree>
   </p:cSld>
   <p:clrMapOvr>
@@ -6654,7 +5888,7 @@
 </p:sld>
 </file>
 
-<file path=ppt/slides/slide6.xml><?xml version="1.0" encoding="utf-8"?>
+<file path=ppt/slides/slide5.xml><?xml version="1.0" encoding="utf-8"?>
 <p:sld xmlns:a="http://schemas.openxmlformats.org/drawingml/2006/main" xmlns:r="http://schemas.openxmlformats.org/officeDocument/2006/relationships" xmlns:p="http://schemas.openxmlformats.org/presentationml/2006/main">
   <p:cSld>
     <p:bg>
@@ -6975,14 +6209,642 @@
                 <a:latin typeface="宋体" panose="02010600030101010101" pitchFamily="2" charset="-122"/>
                 <a:ea typeface="宋体" panose="02010600030101010101" pitchFamily="2" charset="-122"/>
               </a:rPr>
-              <a:t>数据结构</a:t>
+              <a:t>误差</a:t>
             </a:r>
             <a:r>
               <a:rPr lang="zh-CN" altLang="en-US" sz="2000" b="1" dirty="0">
                 <a:latin typeface="宋体" panose="02010600030101010101" pitchFamily="2" charset="-122"/>
                 <a:ea typeface="宋体" panose="02010600030101010101" pitchFamily="2" charset="-122"/>
               </a:rPr>
-              <a:t>定义</a:t>
+              <a:t>分析</a:t>
+            </a:r>
+            <a:endParaRPr lang="zh-CN" altLang="en-US" sz="2000" b="1" dirty="0">
+              <a:latin typeface="宋体" panose="02010600030101010101" pitchFamily="2" charset="-122"/>
+              <a:ea typeface="宋体" panose="02010600030101010101" pitchFamily="2" charset="-122"/>
+            </a:endParaRPr>
+          </a:p>
+        </p:txBody>
+      </p:sp>
+      <p:pic>
+        <p:nvPicPr>
+          <p:cNvPr id="2" name="图片 1" descr="QianJianTec1768188136297"/>
+          <p:cNvPicPr>
+            <a:picLocks noChangeAspect="1"/>
+          </p:cNvPicPr>
+          <p:nvPr/>
+        </p:nvPicPr>
+        <p:blipFill>
+          <a:blip r:embed="rId7"/>
+          <a:stretch>
+            <a:fillRect/>
+          </a:stretch>
+        </p:blipFill>
+        <p:spPr>
+          <a:xfrm>
+            <a:off x="3329940" y="3983990"/>
+            <a:ext cx="5235575" cy="645160"/>
+          </a:xfrm>
+          <a:prstGeom prst="rect">
+            <a:avLst/>
+          </a:prstGeom>
+        </p:spPr>
+      </p:pic>
+      <p:pic>
+        <p:nvPicPr>
+          <p:cNvPr id="3" name="图片 2" descr="QianJianTec1768188319638"/>
+          <p:cNvPicPr>
+            <a:picLocks noChangeAspect="1"/>
+          </p:cNvPicPr>
+          <p:nvPr/>
+        </p:nvPicPr>
+        <p:blipFill>
+          <a:blip r:embed="rId8"/>
+          <a:stretch>
+            <a:fillRect/>
+          </a:stretch>
+        </p:blipFill>
+        <p:spPr>
+          <a:xfrm>
+            <a:off x="2250440" y="5081270"/>
+            <a:ext cx="8001000" cy="772795"/>
+          </a:xfrm>
+          <a:prstGeom prst="rect">
+            <a:avLst/>
+          </a:prstGeom>
+        </p:spPr>
+      </p:pic>
+      <mc:AlternateContent xmlns:mc="http://schemas.openxmlformats.org/markup-compatibility/2006">
+        <mc:Choice xmlns:a14="http://schemas.microsoft.com/office/drawing/2010/main" Requires="a14">
+          <p:sp>
+            <p:nvSpPr>
+              <p:cNvPr id="16" name="文本框 15"/>
+              <p:cNvSpPr txBox="1"/>
+              <p:nvPr/>
+            </p:nvSpPr>
+            <p:spPr>
+              <a:xfrm>
+                <a:off x="653415" y="824865"/>
+                <a:ext cx="11391900" cy="922020"/>
+              </a:xfrm>
+              <a:prstGeom prst="rect">
+                <a:avLst/>
+              </a:prstGeom>
+              <a:noFill/>
+            </p:spPr>
+            <p:txBody>
+              <a:bodyPr wrap="square" rtlCol="0">
+                <a:spAutoFit/>
+              </a:bodyPr>
+              <a:p>
+                <a:pPr indent="0" fontAlgn="auto">
+                  <a:lnSpc>
+                    <a:spcPct val="150000"/>
+                  </a:lnSpc>
+                </a:pPr>
+                <a14:m>
+                  <m:oMath xmlns:m="http://schemas.openxmlformats.org/officeDocument/2006/math">
+                    <m:sSub>
+                      <m:sSubPr>
+                        <m:ctrlPr>
+                          <a:rPr lang="en-US" altLang="zh-CN" i="1">
+                            <a:latin typeface="Cambria Math" panose="02040503050406030204" charset="0"/>
+                            <a:cs typeface="Cambria Math" panose="02040503050406030204" charset="0"/>
+                          </a:rPr>
+                        </m:ctrlPr>
+                      </m:sSubPr>
+                      <m:e>
+                        <m:r>
+                          <a:rPr lang="en-US" altLang="zh-CN" i="1">
+                            <a:latin typeface="Cambria Math" panose="02040503050406030204" charset="0"/>
+                            <a:cs typeface="Cambria Math" panose="02040503050406030204" charset="0"/>
+                          </a:rPr>
+                          <m:t>𝜔</m:t>
+                        </m:r>
+                      </m:e>
+                      <m:sub>
+                        <m:r>
+                          <a:rPr lang="en-US" altLang="zh-CN" i="1">
+                            <a:latin typeface="Cambria Math" panose="02040503050406030204" charset="0"/>
+                            <a:cs typeface="Cambria Math" panose="02040503050406030204" charset="0"/>
+                          </a:rPr>
+                          <m:t>1</m:t>
+                        </m:r>
+                      </m:sub>
+                    </m:sSub>
+                  </m:oMath>
+                </a14:m>
+                <a:r>
+                  <a:rPr lang="zh-CN" altLang="en-US">
+                    <a:latin typeface="Cambria Math" panose="02040503050406030204" charset="0"/>
+                    <a:cs typeface="Cambria Math" panose="02040503050406030204" charset="0"/>
+                  </a:rPr>
+                  <a:t>是针对大多数方程的标准放缩残差，</a:t>
+                </a:r>
+                <a14:m>
+                  <m:oMath xmlns:m="http://schemas.openxmlformats.org/officeDocument/2006/math">
+                    <m:sSub>
+                      <m:sSubPr>
+                        <m:ctrlPr>
+                          <a:rPr lang="en-US" altLang="zh-CN" i="1">
+                            <a:latin typeface="Cambria Math" panose="02040503050406030204" charset="0"/>
+                            <a:cs typeface="Cambria Math" panose="02040503050406030204" charset="0"/>
+                          </a:rPr>
+                        </m:ctrlPr>
+                      </m:sSubPr>
+                      <m:e>
+                        <m:r>
+                          <a:rPr lang="en-US" altLang="zh-CN" i="1">
+                            <a:latin typeface="Cambria Math" panose="02040503050406030204" charset="0"/>
+                            <a:cs typeface="Cambria Math" panose="02040503050406030204" charset="0"/>
+                          </a:rPr>
+                          <m:t>𝜔</m:t>
+                        </m:r>
+                      </m:e>
+                      <m:sub>
+                        <m:r>
+                          <a:rPr lang="en-US" altLang="zh-CN" i="1">
+                            <a:latin typeface="Cambria Math" panose="02040503050406030204" charset="0"/>
+                            <a:cs typeface="Cambria Math" panose="02040503050406030204" charset="0"/>
+                          </a:rPr>
+                          <m:t>2</m:t>
+                        </m:r>
+                      </m:sub>
+                    </m:sSub>
+                  </m:oMath>
+                </a14:m>
+                <a:r>
+                  <a:rPr lang="zh-CN" altLang="en-US">
+                    <a:latin typeface="Cambria Math" panose="02040503050406030204" charset="0"/>
+                    <a:cs typeface="Cambria Math" panose="02040503050406030204" charset="0"/>
+                  </a:rPr>
+                  <a:t>是对于分母过于小的方程的一个修正。那么求解出来的</a:t>
+                </a:r>
+                <a:r>
+                  <a:rPr lang="en-US" altLang="zh-CN">
+                    <a:latin typeface="Cambria Math" panose="02040503050406030204" charset="0"/>
+                    <a:cs typeface="Cambria Math" panose="02040503050406030204" charset="0"/>
+                  </a:rPr>
+                  <a:t>x</a:t>
+                </a:r>
+                <a:r>
+                  <a:rPr lang="zh-CN" altLang="en-US">
+                    <a:latin typeface="Cambria Math" panose="02040503050406030204" charset="0"/>
+                    <a:cs typeface="Cambria Math" panose="02040503050406030204" charset="0"/>
+                  </a:rPr>
+                  <a:t>就是如下公式的</a:t>
+                </a:r>
+                <a:r>
+                  <a:rPr lang="zh-CN" altLang="en-US">
+                    <a:latin typeface="Cambria Math" panose="02040503050406030204" charset="0"/>
+                    <a:cs typeface="Cambria Math" panose="02040503050406030204" charset="0"/>
+                  </a:rPr>
+                  <a:t>精确解</a:t>
+                </a:r>
+                <a:endParaRPr lang="zh-CN" altLang="en-US">
+                  <a:latin typeface="Cambria Math" panose="02040503050406030204" charset="0"/>
+                  <a:cs typeface="Cambria Math" panose="02040503050406030204" charset="0"/>
+                </a:endParaRPr>
+              </a:p>
+            </p:txBody>
+          </p:sp>
+        </mc:Choice>
+        <mc:Fallback>
+          <p:sp>
+            <p:nvSpPr>
+              <p:cNvPr id="16" name="文本框 15"/>
+              <p:cNvSpPr txBox="1">
+                <a:spLocks noRot="1" noChangeAspect="1" noMove="1" noResize="1" noEditPoints="1" noAdjustHandles="1" noChangeArrowheads="1" noChangeShapeType="1" noTextEdit="1"/>
+              </p:cNvSpPr>
+              <p:nvPr/>
+            </p:nvSpPr>
+            <p:spPr>
+              <a:xfrm>
+                <a:off x="653415" y="824865"/>
+                <a:ext cx="11391900" cy="922020"/>
+              </a:xfrm>
+              <a:prstGeom prst="rect">
+                <a:avLst/>
+              </a:prstGeom>
+              <a:blipFill rotWithShape="1">
+                <a:blip r:embed="rId9"/>
+                <a:stretch>
+                  <a:fillRect/>
+                </a:stretch>
+              </a:blipFill>
+            </p:spPr>
+            <p:txBody>
+              <a:bodyPr/>
+              <a:lstStyle/>
+              <a:p>
+                <a:r>
+                  <a:rPr lang="zh-CN" altLang="en-US">
+                    <a:noFill/>
+                  </a:rPr>
+                  <a:t> </a:t>
+                </a:r>
+              </a:p>
+            </p:txBody>
+          </p:sp>
+        </mc:Fallback>
+      </mc:AlternateContent>
+      <p:pic>
+        <p:nvPicPr>
+          <p:cNvPr id="17" name="图片 16" descr="QianJianTec1768189132228"/>
+          <p:cNvPicPr>
+            <a:picLocks noChangeAspect="1"/>
+          </p:cNvPicPr>
+          <p:nvPr/>
+        </p:nvPicPr>
+        <p:blipFill>
+          <a:blip r:embed="rId10"/>
+          <a:stretch>
+            <a:fillRect/>
+          </a:stretch>
+        </p:blipFill>
+        <p:spPr>
+          <a:xfrm>
+            <a:off x="3442335" y="1811020"/>
+            <a:ext cx="4809490" cy="646430"/>
+          </a:xfrm>
+          <a:prstGeom prst="rect">
+            <a:avLst/>
+          </a:prstGeom>
+        </p:spPr>
+      </p:pic>
+      <p:sp>
+        <p:nvSpPr>
+          <p:cNvPr id="20" name="文本框 19"/>
+          <p:cNvSpPr txBox="1"/>
+          <p:nvPr/>
+        </p:nvSpPr>
+        <p:spPr>
+          <a:xfrm>
+            <a:off x="561975" y="3036570"/>
+            <a:ext cx="3558540" cy="368300"/>
+          </a:xfrm>
+          <a:prstGeom prst="rect">
+            <a:avLst/>
+          </a:prstGeom>
+          <a:noFill/>
+        </p:spPr>
+        <p:txBody>
+          <a:bodyPr wrap="square" rtlCol="0">
+            <a:spAutoFit/>
+          </a:bodyPr>
+          <a:p>
+            <a:r>
+              <a:rPr lang="zh-CN" altLang="en-US"/>
+              <a:t>其中</a:t>
+            </a:r>
+            <a:endParaRPr lang="zh-CN" altLang="en-US"/>
+          </a:p>
+        </p:txBody>
+      </p:sp>
+    </p:spTree>
+  </p:cSld>
+  <p:clrMapOvr>
+    <a:masterClrMapping/>
+  </p:clrMapOvr>
+  <mc:AlternateContent xmlns:mc="http://schemas.openxmlformats.org/markup-compatibility/2006">
+    <mc:Choice xmlns:p14="http://schemas.microsoft.com/office/powerpoint/2010/main" Requires="p14">
+      <p:transition spd="slow" p14:dur="2000" advTm="35111"/>
+    </mc:Choice>
+    <mc:Fallback>
+      <p:transition spd="slow" advTm="35111"/>
+    </mc:Fallback>
+  </mc:AlternateContent>
+</p:sld>
+</file>
+
+<file path=ppt/slides/slide6.xml><?xml version="1.0" encoding="utf-8"?>
+<p:sld xmlns:a="http://schemas.openxmlformats.org/drawingml/2006/main" xmlns:r="http://schemas.openxmlformats.org/officeDocument/2006/relationships" xmlns:p="http://schemas.openxmlformats.org/presentationml/2006/main">
+  <p:cSld>
+    <p:bg>
+      <p:bgPr>
+        <a:blipFill dpi="0" rotWithShape="1">
+          <a:blip r:embed="rId1">
+            <a:lum/>
+          </a:blip>
+          <a:srcRect/>
+          <a:stretch>
+            <a:fillRect/>
+          </a:stretch>
+        </a:blipFill>
+        <a:effectLst/>
+      </p:bgPr>
+    </p:bg>
+    <p:spTree>
+      <p:nvGrpSpPr>
+        <p:cNvPr id="1" name=""/>
+        <p:cNvGrpSpPr/>
+        <p:nvPr/>
+      </p:nvGrpSpPr>
+      <p:grpSpPr>
+        <a:xfrm>
+          <a:off x="0" y="0"/>
+          <a:ext cx="0" cy="0"/>
+          <a:chOff x="0" y="0"/>
+          <a:chExt cx="0" cy="0"/>
+        </a:xfrm>
+      </p:grpSpPr>
+      <p:sp>
+        <p:nvSpPr>
+          <p:cNvPr id="4" name="文本框 3"/>
+          <p:cNvSpPr txBox="1"/>
+          <p:nvPr/>
+        </p:nvSpPr>
+        <p:spPr>
+          <a:xfrm>
+            <a:off x="0" y="6477345"/>
+            <a:ext cx="12192000" cy="400109"/>
+          </a:xfrm>
+          <a:prstGeom prst="rect">
+            <a:avLst/>
+          </a:prstGeom>
+          <a:solidFill>
+            <a:schemeClr val="accent5">
+              <a:lumMod val="50000"/>
+            </a:schemeClr>
+          </a:solidFill>
+          <a:ln>
+            <a:noFill/>
+          </a:ln>
+        </p:spPr>
+        <p:txBody>
+          <a:bodyPr wrap="square" rtlCol="0">
+            <a:spAutoFit/>
+          </a:bodyPr>
+          <a:lstStyle/>
+          <a:p>
+            <a:endParaRPr lang="zh-CN" altLang="en-US" dirty="0"/>
+          </a:p>
+        </p:txBody>
+      </p:sp>
+      <p:grpSp>
+        <p:nvGrpSpPr>
+          <p:cNvPr id="7" name="组合 6"/>
+          <p:cNvGrpSpPr/>
+          <p:nvPr/>
+        </p:nvGrpSpPr>
+        <p:grpSpPr>
+          <a:xfrm>
+            <a:off x="5284670" y="6492733"/>
+            <a:ext cx="1843236" cy="400109"/>
+            <a:chOff x="76140" y="6477345"/>
+            <a:chExt cx="1947504" cy="400109"/>
+          </a:xfrm>
+        </p:grpSpPr>
+        <p:pic>
+          <p:nvPicPr>
+            <p:cNvPr id="8" name="图片 7"/>
+            <p:cNvPicPr>
+              <a:picLocks noChangeAspect="1"/>
+            </p:cNvPicPr>
+            <p:nvPr/>
+          </p:nvPicPr>
+          <p:blipFill>
+            <a:blip r:embed="rId2">
+              <a:biLevel thresh="25000"/>
+              <a:extLst>
+                <a:ext uri="{28A0092B-C50C-407E-A947-70E740481C1C}">
+                  <a14:useLocalDpi xmlns:a14="http://schemas.microsoft.com/office/drawing/2010/main" val="0"/>
+                </a:ext>
+              </a:extLst>
+            </a:blip>
+            <a:stretch>
+              <a:fillRect/>
+            </a:stretch>
+          </p:blipFill>
+          <p:spPr>
+            <a:xfrm>
+              <a:off x="76140" y="6477345"/>
+              <a:ext cx="400109" cy="400109"/>
+            </a:xfrm>
+            <a:prstGeom prst="rect">
+              <a:avLst/>
+            </a:prstGeom>
+          </p:spPr>
+        </p:pic>
+        <p:pic>
+          <p:nvPicPr>
+            <p:cNvPr id="9" name="图片 8"/>
+            <p:cNvPicPr>
+              <a:picLocks noChangeAspect="1"/>
+            </p:cNvPicPr>
+            <p:nvPr/>
+          </p:nvPicPr>
+          <p:blipFill rotWithShape="1">
+            <a:blip r:embed="rId3">
+              <a:biLevel thresh="25000"/>
+            </a:blip>
+            <a:srcRect l="1" t="6582" r="-25334" b="26979"/>
+            <a:stretch>
+              <a:fillRect/>
+            </a:stretch>
+          </p:blipFill>
+          <p:spPr>
+            <a:xfrm>
+              <a:off x="414611" y="6477345"/>
+              <a:ext cx="724874" cy="380655"/>
+            </a:xfrm>
+            <a:prstGeom prst="rect">
+              <a:avLst/>
+            </a:prstGeom>
+          </p:spPr>
+        </p:pic>
+        <p:pic>
+          <p:nvPicPr>
+            <p:cNvPr id="10" name="图片 9"/>
+            <p:cNvPicPr>
+              <a:picLocks noChangeAspect="1"/>
+            </p:cNvPicPr>
+            <p:nvPr/>
+          </p:nvPicPr>
+          <p:blipFill rotWithShape="1">
+            <a:blip r:embed="rId2">
+              <a:biLevel thresh="25000"/>
+              <a:extLst>
+                <a:ext uri="{28A0092B-C50C-407E-A947-70E740481C1C}">
+                  <a14:useLocalDpi xmlns:a14="http://schemas.microsoft.com/office/drawing/2010/main" val="0"/>
+                </a:ext>
+              </a:extLst>
+            </a:blip>
+            <a:srcRect l="32814" t="12432" r="55484" b="78542"/>
+            <a:stretch>
+              <a:fillRect/>
+            </a:stretch>
+          </p:blipFill>
+          <p:spPr>
+            <a:xfrm rot="1259126">
+              <a:off x="895509" y="6508504"/>
+              <a:ext cx="402920" cy="310802"/>
+            </a:xfrm>
+            <a:prstGeom prst="rect">
+              <a:avLst/>
+            </a:prstGeom>
+          </p:spPr>
+        </p:pic>
+        <p:pic>
+          <p:nvPicPr>
+            <p:cNvPr id="11" name="图片 10"/>
+            <p:cNvPicPr>
+              <a:picLocks noChangeAspect="1"/>
+            </p:cNvPicPr>
+            <p:nvPr/>
+          </p:nvPicPr>
+          <p:blipFill rotWithShape="1">
+            <a:blip r:embed="rId4"/>
+            <a:srcRect t="-1" b="16526"/>
+            <a:stretch>
+              <a:fillRect/>
+            </a:stretch>
+          </p:blipFill>
+          <p:spPr>
+            <a:xfrm rot="589386">
+              <a:off x="1256498" y="6481317"/>
+              <a:ext cx="388026" cy="326437"/>
+            </a:xfrm>
+            <a:prstGeom prst="rect">
+              <a:avLst/>
+            </a:prstGeom>
+          </p:spPr>
+        </p:pic>
+        <p:pic>
+          <p:nvPicPr>
+            <p:cNvPr id="12" name="图片 11"/>
+            <p:cNvPicPr>
+              <a:picLocks noChangeAspect="1"/>
+            </p:cNvPicPr>
+            <p:nvPr/>
+          </p:nvPicPr>
+          <p:blipFill rotWithShape="1">
+            <a:blip r:embed="rId5"/>
+            <a:srcRect t="18211" b="8984"/>
+            <a:stretch>
+              <a:fillRect/>
+            </a:stretch>
+          </p:blipFill>
+          <p:spPr>
+            <a:xfrm>
+              <a:off x="1554468" y="6496881"/>
+              <a:ext cx="469176" cy="341581"/>
+            </a:xfrm>
+            <a:prstGeom prst="rect">
+              <a:avLst/>
+            </a:prstGeom>
+          </p:spPr>
+        </p:pic>
+      </p:grpSp>
+      <p:cxnSp>
+        <p:nvCxnSpPr>
+          <p:cNvPr id="48" name="直接连接符 47"/>
+          <p:cNvCxnSpPr/>
+          <p:nvPr/>
+        </p:nvCxnSpPr>
+        <p:spPr>
+          <a:xfrm>
+            <a:off x="9678572" y="560438"/>
+            <a:ext cx="2180493" cy="0"/>
+          </a:xfrm>
+          <a:prstGeom prst="line">
+            <a:avLst/>
+          </a:prstGeom>
+          <a:ln w="15875">
+            <a:solidFill>
+              <a:srgbClr val="1F4E79"/>
+            </a:solidFill>
+          </a:ln>
+        </p:spPr>
+        <p:style>
+          <a:lnRef idx="1">
+            <a:schemeClr val="accent1"/>
+          </a:lnRef>
+          <a:fillRef idx="0">
+            <a:schemeClr val="accent1"/>
+          </a:fillRef>
+          <a:effectRef idx="0">
+            <a:schemeClr val="accent1"/>
+          </a:effectRef>
+          <a:fontRef idx="minor">
+            <a:schemeClr val="tx1"/>
+          </a:fontRef>
+        </p:style>
+      </p:cxnSp>
+      <p:pic>
+        <p:nvPicPr>
+          <p:cNvPr id="49" name="图片 48"/>
+          <p:cNvPicPr>
+            <a:picLocks noChangeAspect="1"/>
+          </p:cNvPicPr>
+          <p:nvPr/>
+        </p:nvPicPr>
+        <p:blipFill>
+          <a:blip r:embed="rId6"/>
+          <a:stretch>
+            <a:fillRect/>
+          </a:stretch>
+        </p:blipFill>
+        <p:spPr>
+          <a:xfrm>
+            <a:off x="10166517" y="67522"/>
+            <a:ext cx="1291381" cy="580723"/>
+          </a:xfrm>
+          <a:prstGeom prst="rect">
+            <a:avLst/>
+          </a:prstGeom>
+        </p:spPr>
+      </p:pic>
+      <p:sp>
+        <p:nvSpPr>
+          <p:cNvPr id="18" name="标题 17"/>
+          <p:cNvSpPr>
+            <a:spLocks noGrp="1"/>
+          </p:cNvSpPr>
+          <p:nvPr>
+            <p:ph type="title"/>
+          </p:nvPr>
+        </p:nvSpPr>
+        <p:spPr>
+          <a:xfrm>
+            <a:off x="95250" y="67310"/>
+            <a:ext cx="3437255" cy="581025"/>
+          </a:xfrm>
+          <a:noFill/>
+          <a:ln>
+            <a:noFill/>
+          </a:ln>
+          <a:extLst>
+            <a:ext uri="{909E8E84-426E-40DD-AFC4-6F175D3DCCD1}">
+              <a14:hiddenFill xmlns:a14="http://schemas.microsoft.com/office/drawing/2010/main">
+                <a:solidFill>
+                  <a:schemeClr val="bg1"/>
+                </a:solidFill>
+              </a14:hiddenFill>
+            </a:ext>
+          </a:extLst>
+        </p:spPr>
+        <p:txBody>
+          <a:bodyPr>
+            <a:normAutofit/>
+          </a:bodyPr>
+          <a:p>
+            <a:pPr marL="342900" indent="-342900">
+              <a:buFont typeface="Wingdings" panose="05000000000000000000" charset="0"/>
+              <a:buChar char="Ø"/>
+            </a:pPr>
+            <a:r>
+              <a:rPr lang="zh-CN" altLang="en-US" sz="2000" b="1" dirty="0">
+                <a:latin typeface="宋体" panose="02010600030101010101" pitchFamily="2" charset="-122"/>
+                <a:ea typeface="宋体" panose="02010600030101010101" pitchFamily="2" charset="-122"/>
+              </a:rPr>
+              <a:t>误差</a:t>
+            </a:r>
+            <a:r>
+              <a:rPr lang="zh-CN" altLang="en-US" sz="2000" b="1" dirty="0">
+                <a:latin typeface="宋体" panose="02010600030101010101" pitchFamily="2" charset="-122"/>
+                <a:ea typeface="宋体" panose="02010600030101010101" pitchFamily="2" charset="-122"/>
+              </a:rPr>
+              <a:t>分析</a:t>
             </a:r>
             <a:endParaRPr lang="zh-CN" altLang="en-US" sz="2000" b="1" dirty="0">
               <a:latin typeface="宋体" panose="02010600030101010101" pitchFamily="2" charset="-122"/>
@@ -7012,6 +6874,20 @@
             <a:noAutofit/>
           </a:bodyPr>
           <a:p>
+            <a:r>
+              <a:rPr lang="zh-CN" altLang="en-US" b="1">
+                <a:latin typeface="Cambria Math" panose="02040503050406030204" charset="0"/>
+                <a:cs typeface="Cambria Math" panose="02040503050406030204" charset="0"/>
+              </a:rPr>
+              <a:t>稀疏</a:t>
+            </a:r>
+            <a:r>
+              <a:rPr lang="zh-CN" altLang="en-US" b="1">
+                <a:latin typeface="Cambria Math" panose="02040503050406030204" charset="0"/>
+                <a:cs typeface="Cambria Math" panose="02040503050406030204" charset="0"/>
+              </a:rPr>
+              <a:t>前向误差分析</a:t>
+            </a:r>
             <a:endParaRPr lang="zh-CN" altLang="en-US" b="1">
               <a:latin typeface="Cambria Math" panose="02040503050406030204" charset="0"/>
               <a:cs typeface="Cambria Math" panose="02040503050406030204" charset="0"/>
@@ -7019,9 +6895,58 @@
           </a:p>
         </p:txBody>
       </p:sp>
+      <p:sp>
+        <p:nvSpPr>
+          <p:cNvPr id="2" name="文本框 1"/>
+          <p:cNvSpPr txBox="1"/>
+          <p:nvPr/>
+        </p:nvSpPr>
+        <p:spPr>
+          <a:xfrm>
+            <a:off x="356235" y="1228725"/>
+            <a:ext cx="11391900" cy="368300"/>
+          </a:xfrm>
+          <a:prstGeom prst="rect">
+            <a:avLst/>
+          </a:prstGeom>
+          <a:noFill/>
+        </p:spPr>
+        <p:txBody>
+          <a:bodyPr wrap="square" rtlCol="0">
+            <a:spAutoFit/>
+          </a:bodyPr>
+          <a:p>
+            <a:r>
+              <a:rPr lang="zh-CN" altLang="en-US"/>
+              <a:t>若要获得前向误差，</a:t>
+            </a:r>
+            <a:r>
+              <a:rPr lang="en-US" altLang="zh-CN"/>
+              <a:t>MUMPS</a:t>
+            </a:r>
+            <a:r>
+              <a:rPr lang="zh-CN" altLang="en-US"/>
+              <a:t>可以计算前向误差的一个上界，但需要很高的计算成本</a:t>
+            </a:r>
+            <a:r>
+              <a:rPr lang="en-US" altLang="zh-CN"/>
+              <a:t> </a:t>
+            </a:r>
+            <a:r>
+              <a:rPr lang="zh-CN" altLang="en-US"/>
+              <a:t>。计算公式</a:t>
+            </a:r>
+            <a:r>
+              <a:rPr lang="zh-CN" altLang="en-US"/>
+              <a:t>如下：</a:t>
+            </a:r>
+            <a:endParaRPr lang="zh-CN" altLang="en-US"/>
+          </a:p>
+        </p:txBody>
+      </p:sp>
       <p:pic>
         <p:nvPicPr>
-          <p:cNvPr id="3" name="图片 2"/>
+          <p:cNvPr id="3" name="图片 2" descr="QianJianTec1768198239933"/>
           <p:cNvPicPr>
             <a:picLocks noChangeAspect="1"/>
           </p:cNvPicPr>
@@ -7035,14 +6960,3160 @@
         </p:blipFill>
         <p:spPr>
           <a:xfrm>
-            <a:off x="2430780" y="721360"/>
-            <a:ext cx="7308215" cy="5307965"/>
+            <a:off x="2560320" y="2094230"/>
+            <a:ext cx="7202805" cy="1444625"/>
           </a:xfrm>
           <a:prstGeom prst="rect">
             <a:avLst/>
           </a:prstGeom>
         </p:spPr>
       </p:pic>
+      <mc:AlternateContent xmlns:mc="http://schemas.openxmlformats.org/markup-compatibility/2006">
+        <mc:Choice xmlns:a14="http://schemas.microsoft.com/office/drawing/2010/main" Requires="a14">
+          <p:sp>
+            <p:nvSpPr>
+              <p:cNvPr id="13" name="文本框 12"/>
+              <p:cNvSpPr txBox="1"/>
+              <p:nvPr/>
+            </p:nvSpPr>
+            <p:spPr>
+              <a:xfrm>
+                <a:off x="379095" y="3910965"/>
+                <a:ext cx="11155680" cy="368300"/>
+              </a:xfrm>
+              <a:prstGeom prst="rect">
+                <a:avLst/>
+              </a:prstGeom>
+              <a:noFill/>
+            </p:spPr>
+            <p:txBody>
+              <a:bodyPr wrap="square" rtlCol="0">
+                <a:spAutoFit/>
+              </a:bodyPr>
+              <a:p>
+                <a:r>
+                  <a:rPr lang="zh-CN" altLang="en-US"/>
+                  <a:t>其中</a:t>
+                </a:r>
+                <a:r>
+                  <a:rPr lang="en-US" altLang="zh-CN"/>
+                  <a:t> </a:t>
+                </a:r>
+                <a14:m>
+                  <m:oMath xmlns:m="http://schemas.openxmlformats.org/officeDocument/2006/math">
+                    <m:sSub>
+                      <m:sSubPr>
+                        <m:ctrlPr>
+                          <a:rPr lang="en-US" altLang="zh-CN" i="1">
+                            <a:latin typeface="Cambria Math" panose="02040503050406030204" charset="0"/>
+                            <a:cs typeface="Cambria Math" panose="02040503050406030204" charset="0"/>
+                          </a:rPr>
+                        </m:ctrlPr>
+                      </m:sSubPr>
+                      <m:e>
+                        <m:r>
+                          <a:rPr lang="en-US" altLang="zh-CN" i="1">
+                            <a:latin typeface="Cambria Math" panose="02040503050406030204" charset="0"/>
+                            <a:cs typeface="Cambria Math" panose="02040503050406030204" charset="0"/>
+                          </a:rPr>
+                          <m:t>𝑐𝑜𝑛𝑑</m:t>
+                        </m:r>
+                      </m:e>
+                      <m:sub>
+                        <m:r>
+                          <a:rPr lang="en-US" altLang="zh-CN" i="1">
+                            <a:latin typeface="Cambria Math" panose="02040503050406030204" charset="0"/>
+                            <a:cs typeface="Cambria Math" panose="02040503050406030204" charset="0"/>
+                          </a:rPr>
+                          <m:t>1</m:t>
+                        </m:r>
+                      </m:sub>
+                    </m:sSub>
+                  </m:oMath>
+                </a14:m>
+                <a:r>
+                  <a:rPr lang="en-US" altLang="zh-CN"/>
+                  <a:t>,</a:t>
+                </a:r>
+                <a14:m>
+                  <m:oMath xmlns:m="http://schemas.openxmlformats.org/officeDocument/2006/math">
+                    <m:sSub>
+                      <m:sSubPr>
+                        <m:ctrlPr>
+                          <a:rPr lang="en-US" altLang="zh-CN" i="1">
+                            <a:latin typeface="Cambria Math" panose="02040503050406030204" charset="0"/>
+                            <a:cs typeface="Cambria Math" panose="02040503050406030204" charset="0"/>
+                          </a:rPr>
+                        </m:ctrlPr>
+                      </m:sSubPr>
+                      <m:e>
+                        <m:r>
+                          <a:rPr lang="en-US" altLang="zh-CN" i="1">
+                            <a:latin typeface="Cambria Math" panose="02040503050406030204" charset="0"/>
+                            <a:cs typeface="Cambria Math" panose="02040503050406030204" charset="0"/>
+                          </a:rPr>
+                          <m:t>𝑐𝑜𝑛𝑑</m:t>
+                        </m:r>
+                      </m:e>
+                      <m:sub>
+                        <m:r>
+                          <a:rPr lang="en-US" altLang="zh-CN" i="1">
+                            <a:latin typeface="Cambria Math" panose="02040503050406030204" charset="0"/>
+                            <a:cs typeface="Cambria Math" panose="02040503050406030204" charset="0"/>
+                          </a:rPr>
+                          <m:t>2</m:t>
+                        </m:r>
+                      </m:sub>
+                    </m:sSub>
+                  </m:oMath>
+                </a14:m>
+                <a:r>
+                  <a:rPr lang="zh-CN" altLang="en-US"/>
+                  <a:t>为与系统相关的条件数</a:t>
+                </a:r>
+                <a:r>
+                  <a:rPr lang="en-US" altLang="zh-CN"/>
+                  <a:t>,</a:t>
+                </a:r>
+                <a:r>
+                  <a:rPr lang="zh-CN" altLang="en-US"/>
+                  <a:t>计算成本</a:t>
+                </a:r>
+                <a:r>
+                  <a:rPr lang="zh-CN" altLang="en-US"/>
+                  <a:t>较大</a:t>
+                </a:r>
+                <a:endParaRPr lang="zh-CN" altLang="en-US"/>
+              </a:p>
+            </p:txBody>
+          </p:sp>
+        </mc:Choice>
+        <mc:Fallback>
+          <p:sp>
+            <p:nvSpPr>
+              <p:cNvPr id="13" name="文本框 12"/>
+              <p:cNvSpPr txBox="1">
+                <a:spLocks noRot="1" noChangeAspect="1" noMove="1" noResize="1" noEditPoints="1" noAdjustHandles="1" noChangeArrowheads="1" noChangeShapeType="1" noTextEdit="1"/>
+              </p:cNvSpPr>
+              <p:nvPr/>
+            </p:nvSpPr>
+            <p:spPr>
+              <a:xfrm>
+                <a:off x="379095" y="3910965"/>
+                <a:ext cx="11155680" cy="368300"/>
+              </a:xfrm>
+              <a:prstGeom prst="rect">
+                <a:avLst/>
+              </a:prstGeom>
+              <a:blipFill rotWithShape="1">
+                <a:blip r:embed="rId8"/>
+                <a:stretch>
+                  <a:fillRect/>
+                </a:stretch>
+              </a:blipFill>
+            </p:spPr>
+            <p:txBody>
+              <a:bodyPr/>
+              <a:lstStyle/>
+              <a:p>
+                <a:r>
+                  <a:rPr lang="zh-CN" altLang="en-US">
+                    <a:noFill/>
+                  </a:rPr>
+                  <a:t> </a:t>
+                </a:r>
+              </a:p>
+            </p:txBody>
+          </p:sp>
+        </mc:Fallback>
+      </mc:AlternateContent>
+    </p:spTree>
+  </p:cSld>
+  <p:clrMapOvr>
+    <a:masterClrMapping/>
+  </p:clrMapOvr>
+  <mc:AlternateContent xmlns:mc="http://schemas.openxmlformats.org/markup-compatibility/2006">
+    <mc:Choice xmlns:p14="http://schemas.microsoft.com/office/powerpoint/2010/main" Requires="p14">
+      <p:transition spd="slow" p14:dur="2000" advTm="35111"/>
+    </mc:Choice>
+    <mc:Fallback>
+      <p:transition spd="slow" advTm="35111"/>
+    </mc:Fallback>
+  </mc:AlternateContent>
+</p:sld>
+</file>
+
+<file path=ppt/slides/slide7.xml><?xml version="1.0" encoding="utf-8"?>
+<p:sld xmlns:a="http://schemas.openxmlformats.org/drawingml/2006/main" xmlns:r="http://schemas.openxmlformats.org/officeDocument/2006/relationships" xmlns:p="http://schemas.openxmlformats.org/presentationml/2006/main">
+  <p:cSld>
+    <p:bg>
+      <p:bgPr>
+        <a:blipFill dpi="0" rotWithShape="1">
+          <a:blip r:embed="rId1">
+            <a:lum/>
+          </a:blip>
+          <a:srcRect/>
+          <a:stretch>
+            <a:fillRect/>
+          </a:stretch>
+        </a:blipFill>
+        <a:effectLst/>
+      </p:bgPr>
+    </p:bg>
+    <p:spTree>
+      <p:nvGrpSpPr>
+        <p:cNvPr id="1" name=""/>
+        <p:cNvGrpSpPr/>
+        <p:nvPr/>
+      </p:nvGrpSpPr>
+      <p:grpSpPr>
+        <a:xfrm>
+          <a:off x="0" y="0"/>
+          <a:ext cx="0" cy="0"/>
+          <a:chOff x="0" y="0"/>
+          <a:chExt cx="0" cy="0"/>
+        </a:xfrm>
+      </p:grpSpPr>
+      <p:sp>
+        <p:nvSpPr>
+          <p:cNvPr id="4" name="文本框 3"/>
+          <p:cNvSpPr txBox="1"/>
+          <p:nvPr/>
+        </p:nvSpPr>
+        <p:spPr>
+          <a:xfrm>
+            <a:off x="0" y="6477345"/>
+            <a:ext cx="12192000" cy="400109"/>
+          </a:xfrm>
+          <a:prstGeom prst="rect">
+            <a:avLst/>
+          </a:prstGeom>
+          <a:solidFill>
+            <a:schemeClr val="accent5">
+              <a:lumMod val="50000"/>
+            </a:schemeClr>
+          </a:solidFill>
+          <a:ln>
+            <a:noFill/>
+          </a:ln>
+        </p:spPr>
+        <p:txBody>
+          <a:bodyPr wrap="square" rtlCol="0">
+            <a:spAutoFit/>
+          </a:bodyPr>
+          <a:lstStyle/>
+          <a:p>
+            <a:endParaRPr lang="zh-CN" altLang="en-US" dirty="0"/>
+          </a:p>
+        </p:txBody>
+      </p:sp>
+      <p:grpSp>
+        <p:nvGrpSpPr>
+          <p:cNvPr id="7" name="组合 6"/>
+          <p:cNvGrpSpPr/>
+          <p:nvPr/>
+        </p:nvGrpSpPr>
+        <p:grpSpPr>
+          <a:xfrm>
+            <a:off x="5284670" y="6492733"/>
+            <a:ext cx="1843236" cy="400109"/>
+            <a:chOff x="76140" y="6477345"/>
+            <a:chExt cx="1947504" cy="400109"/>
+          </a:xfrm>
+        </p:grpSpPr>
+        <p:pic>
+          <p:nvPicPr>
+            <p:cNvPr id="8" name="图片 7"/>
+            <p:cNvPicPr>
+              <a:picLocks noChangeAspect="1"/>
+            </p:cNvPicPr>
+            <p:nvPr/>
+          </p:nvPicPr>
+          <p:blipFill>
+            <a:blip r:embed="rId2">
+              <a:biLevel thresh="25000"/>
+              <a:extLst>
+                <a:ext uri="{28A0092B-C50C-407E-A947-70E740481C1C}">
+                  <a14:useLocalDpi xmlns:a14="http://schemas.microsoft.com/office/drawing/2010/main" val="0"/>
+                </a:ext>
+              </a:extLst>
+            </a:blip>
+            <a:stretch>
+              <a:fillRect/>
+            </a:stretch>
+          </p:blipFill>
+          <p:spPr>
+            <a:xfrm>
+              <a:off x="76140" y="6477345"/>
+              <a:ext cx="400109" cy="400109"/>
+            </a:xfrm>
+            <a:prstGeom prst="rect">
+              <a:avLst/>
+            </a:prstGeom>
+          </p:spPr>
+        </p:pic>
+        <p:pic>
+          <p:nvPicPr>
+            <p:cNvPr id="9" name="图片 8"/>
+            <p:cNvPicPr>
+              <a:picLocks noChangeAspect="1"/>
+            </p:cNvPicPr>
+            <p:nvPr/>
+          </p:nvPicPr>
+          <p:blipFill rotWithShape="1">
+            <a:blip r:embed="rId3">
+              <a:biLevel thresh="25000"/>
+            </a:blip>
+            <a:srcRect l="1" t="6582" r="-25334" b="26979"/>
+            <a:stretch>
+              <a:fillRect/>
+            </a:stretch>
+          </p:blipFill>
+          <p:spPr>
+            <a:xfrm>
+              <a:off x="414611" y="6477345"/>
+              <a:ext cx="724874" cy="380655"/>
+            </a:xfrm>
+            <a:prstGeom prst="rect">
+              <a:avLst/>
+            </a:prstGeom>
+          </p:spPr>
+        </p:pic>
+        <p:pic>
+          <p:nvPicPr>
+            <p:cNvPr id="10" name="图片 9"/>
+            <p:cNvPicPr>
+              <a:picLocks noChangeAspect="1"/>
+            </p:cNvPicPr>
+            <p:nvPr/>
+          </p:nvPicPr>
+          <p:blipFill rotWithShape="1">
+            <a:blip r:embed="rId2">
+              <a:biLevel thresh="25000"/>
+              <a:extLst>
+                <a:ext uri="{28A0092B-C50C-407E-A947-70E740481C1C}">
+                  <a14:useLocalDpi xmlns:a14="http://schemas.microsoft.com/office/drawing/2010/main" val="0"/>
+                </a:ext>
+              </a:extLst>
+            </a:blip>
+            <a:srcRect l="32814" t="12432" r="55484" b="78542"/>
+            <a:stretch>
+              <a:fillRect/>
+            </a:stretch>
+          </p:blipFill>
+          <p:spPr>
+            <a:xfrm rot="1259126">
+              <a:off x="895509" y="6508504"/>
+              <a:ext cx="402920" cy="310802"/>
+            </a:xfrm>
+            <a:prstGeom prst="rect">
+              <a:avLst/>
+            </a:prstGeom>
+          </p:spPr>
+        </p:pic>
+        <p:pic>
+          <p:nvPicPr>
+            <p:cNvPr id="11" name="图片 10"/>
+            <p:cNvPicPr>
+              <a:picLocks noChangeAspect="1"/>
+            </p:cNvPicPr>
+            <p:nvPr/>
+          </p:nvPicPr>
+          <p:blipFill rotWithShape="1">
+            <a:blip r:embed="rId4"/>
+            <a:srcRect t="-1" b="16526"/>
+            <a:stretch>
+              <a:fillRect/>
+            </a:stretch>
+          </p:blipFill>
+          <p:spPr>
+            <a:xfrm rot="589386">
+              <a:off x="1256498" y="6481317"/>
+              <a:ext cx="388026" cy="326437"/>
+            </a:xfrm>
+            <a:prstGeom prst="rect">
+              <a:avLst/>
+            </a:prstGeom>
+          </p:spPr>
+        </p:pic>
+        <p:pic>
+          <p:nvPicPr>
+            <p:cNvPr id="12" name="图片 11"/>
+            <p:cNvPicPr>
+              <a:picLocks noChangeAspect="1"/>
+            </p:cNvPicPr>
+            <p:nvPr/>
+          </p:nvPicPr>
+          <p:blipFill rotWithShape="1">
+            <a:blip r:embed="rId5"/>
+            <a:srcRect t="18211" b="8984"/>
+            <a:stretch>
+              <a:fillRect/>
+            </a:stretch>
+          </p:blipFill>
+          <p:spPr>
+            <a:xfrm>
+              <a:off x="1554468" y="6496881"/>
+              <a:ext cx="469176" cy="341581"/>
+            </a:xfrm>
+            <a:prstGeom prst="rect">
+              <a:avLst/>
+            </a:prstGeom>
+          </p:spPr>
+        </p:pic>
+      </p:grpSp>
+      <p:cxnSp>
+        <p:nvCxnSpPr>
+          <p:cNvPr id="48" name="直接连接符 47"/>
+          <p:cNvCxnSpPr/>
+          <p:nvPr/>
+        </p:nvCxnSpPr>
+        <p:spPr>
+          <a:xfrm>
+            <a:off x="9678572" y="560438"/>
+            <a:ext cx="2180493" cy="0"/>
+          </a:xfrm>
+          <a:prstGeom prst="line">
+            <a:avLst/>
+          </a:prstGeom>
+          <a:ln w="15875">
+            <a:solidFill>
+              <a:srgbClr val="1F4E79"/>
+            </a:solidFill>
+          </a:ln>
+        </p:spPr>
+        <p:style>
+          <a:lnRef idx="1">
+            <a:schemeClr val="accent1"/>
+          </a:lnRef>
+          <a:fillRef idx="0">
+            <a:schemeClr val="accent1"/>
+          </a:fillRef>
+          <a:effectRef idx="0">
+            <a:schemeClr val="accent1"/>
+          </a:effectRef>
+          <a:fontRef idx="minor">
+            <a:schemeClr val="tx1"/>
+          </a:fontRef>
+        </p:style>
+      </p:cxnSp>
+      <p:pic>
+        <p:nvPicPr>
+          <p:cNvPr id="49" name="图片 48"/>
+          <p:cNvPicPr>
+            <a:picLocks noChangeAspect="1"/>
+          </p:cNvPicPr>
+          <p:nvPr/>
+        </p:nvPicPr>
+        <p:blipFill>
+          <a:blip r:embed="rId6"/>
+          <a:stretch>
+            <a:fillRect/>
+          </a:stretch>
+        </p:blipFill>
+        <p:spPr>
+          <a:xfrm>
+            <a:off x="10166517" y="67522"/>
+            <a:ext cx="1291381" cy="580723"/>
+          </a:xfrm>
+          <a:prstGeom prst="rect">
+            <a:avLst/>
+          </a:prstGeom>
+        </p:spPr>
+      </p:pic>
+      <p:sp>
+        <p:nvSpPr>
+          <p:cNvPr id="18" name="标题 17"/>
+          <p:cNvSpPr>
+            <a:spLocks noGrp="1"/>
+          </p:cNvSpPr>
+          <p:nvPr>
+            <p:ph type="title"/>
+          </p:nvPr>
+        </p:nvSpPr>
+        <p:spPr>
+          <a:xfrm>
+            <a:off x="95250" y="67310"/>
+            <a:ext cx="3437255" cy="581025"/>
+          </a:xfrm>
+          <a:noFill/>
+          <a:ln>
+            <a:noFill/>
+          </a:ln>
+          <a:extLst>
+            <a:ext uri="{909E8E84-426E-40DD-AFC4-6F175D3DCCD1}">
+              <a14:hiddenFill xmlns:a14="http://schemas.microsoft.com/office/drawing/2010/main">
+                <a:solidFill>
+                  <a:schemeClr val="bg1"/>
+                </a:solidFill>
+              </a14:hiddenFill>
+            </a:ext>
+          </a:extLst>
+        </p:spPr>
+        <p:txBody>
+          <a:bodyPr>
+            <a:normAutofit/>
+          </a:bodyPr>
+          <a:p>
+            <a:pPr marL="342900" indent="-342900">
+              <a:buFont typeface="Wingdings" panose="05000000000000000000" charset="0"/>
+              <a:buChar char="Ø"/>
+            </a:pPr>
+            <a:r>
+              <a:rPr lang="zh-CN" altLang="en-US" sz="2000" b="1" dirty="0">
+                <a:latin typeface="宋体" panose="02010600030101010101" pitchFamily="2" charset="-122"/>
+                <a:ea typeface="宋体" panose="02010600030101010101" pitchFamily="2" charset="-122"/>
+              </a:rPr>
+              <a:t>误差</a:t>
+            </a:r>
+            <a:r>
+              <a:rPr lang="zh-CN" altLang="en-US" sz="2000" b="1" dirty="0">
+                <a:latin typeface="宋体" panose="02010600030101010101" pitchFamily="2" charset="-122"/>
+                <a:ea typeface="宋体" panose="02010600030101010101" pitchFamily="2" charset="-122"/>
+              </a:rPr>
+              <a:t>分析</a:t>
+            </a:r>
+            <a:endParaRPr lang="zh-CN" altLang="en-US" sz="2000" b="1" dirty="0">
+              <a:latin typeface="宋体" panose="02010600030101010101" pitchFamily="2" charset="-122"/>
+              <a:ea typeface="宋体" panose="02010600030101010101" pitchFamily="2" charset="-122"/>
+            </a:endParaRPr>
+          </a:p>
+        </p:txBody>
+      </p:sp>
+      <p:sp>
+        <p:nvSpPr>
+          <p:cNvPr id="5" name="文本框 4"/>
+          <p:cNvSpPr txBox="1"/>
+          <p:nvPr/>
+        </p:nvSpPr>
+        <p:spPr>
+          <a:xfrm>
+            <a:off x="280035" y="648335"/>
+            <a:ext cx="11784965" cy="609600"/>
+          </a:xfrm>
+          <a:prstGeom prst="rect">
+            <a:avLst/>
+          </a:prstGeom>
+          <a:noFill/>
+        </p:spPr>
+        <p:txBody>
+          <a:bodyPr wrap="square" rtlCol="0">
+            <a:noAutofit/>
+          </a:bodyPr>
+          <a:p>
+            <a:endParaRPr lang="zh-CN" altLang="en-US" b="1">
+              <a:latin typeface="Cambria Math" panose="02040503050406030204" charset="0"/>
+              <a:cs typeface="Cambria Math" panose="02040503050406030204" charset="0"/>
+            </a:endParaRPr>
+          </a:p>
+        </p:txBody>
+      </p:sp>
+      <mc:AlternateContent xmlns:mc="http://schemas.openxmlformats.org/markup-compatibility/2006">
+        <mc:Choice xmlns:a14="http://schemas.microsoft.com/office/drawing/2010/main" Requires="a14">
+          <p:sp>
+            <p:nvSpPr>
+              <p:cNvPr id="6" name="文本框 5"/>
+              <p:cNvSpPr txBox="1"/>
+              <p:nvPr/>
+            </p:nvSpPr>
+            <p:spPr>
+              <a:xfrm>
+                <a:off x="280035" y="931545"/>
+                <a:ext cx="11490960" cy="2241550"/>
+              </a:xfrm>
+              <a:prstGeom prst="rect">
+                <a:avLst/>
+              </a:prstGeom>
+              <a:noFill/>
+            </p:spPr>
+            <p:txBody>
+              <a:bodyPr wrap="square" rtlCol="0">
+                <a:spAutoFit/>
+              </a:bodyPr>
+              <a:p>
+                <a:pPr marL="342900" indent="-342900" fontAlgn="auto">
+                  <a:lnSpc>
+                    <a:spcPct val="150000"/>
+                  </a:lnSpc>
+                  <a:buFont typeface="+mj-lt"/>
+                  <a:buAutoNum type="arabicPeriod"/>
+                </a:pPr>
+                <a:r>
+                  <a:rPr lang="zh-CN" altLang="en-US"/>
+                  <a:t>硬件求解：</a:t>
+                </a:r>
+                <a:r>
+                  <a:rPr lang="en-US" altLang="zh-CN"/>
+                  <a:t>LU</a:t>
+                </a:r>
+                <a:r>
+                  <a:rPr lang="zh-CN" altLang="en-US"/>
+                  <a:t>分解</a:t>
+                </a:r>
+                <a:r>
+                  <a:rPr lang="en-US" altLang="zh-CN"/>
+                  <a:t>+</a:t>
+                </a:r>
+                <a:r>
+                  <a:rPr lang="zh-CN" altLang="en-US"/>
+                  <a:t>三角求解</a:t>
+                </a:r>
+                <a:r>
+                  <a:rPr lang="en-US" altLang="zh-CN"/>
+                  <a:t> → </a:t>
+                </a:r>
+                <a14:m>
+                  <m:oMath xmlns:m="http://schemas.openxmlformats.org/officeDocument/2006/math">
+                    <m:sSub>
+                      <m:sSubPr>
+                        <m:ctrlPr>
+                          <a:rPr lang="en-US" altLang="zh-CN">
+                            <a:latin typeface="Cambria Math" panose="02040503050406030204" charset="0"/>
+                            <a:cs typeface="Cambria Math" panose="02040503050406030204" charset="0"/>
+                          </a:rPr>
+                        </m:ctrlPr>
+                      </m:sSubPr>
+                      <m:e>
+                        <m:r>
+                          <m:rPr>
+                            <m:sty m:val="p"/>
+                          </m:rPr>
+                          <a:rPr lang="en-US" altLang="zh-CN">
+                            <a:latin typeface="Cambria Math" panose="02040503050406030204" charset="0"/>
+                            <a:cs typeface="Cambria Math" panose="02040503050406030204" charset="0"/>
+                          </a:rPr>
+                          <m:t>x</m:t>
+                        </m:r>
+                      </m:e>
+                      <m:sub>
+                        <m:r>
+                          <a:rPr lang="en-US" altLang="zh-CN">
+                            <a:latin typeface="Cambria Math" panose="02040503050406030204" charset="0"/>
+                            <a:cs typeface="Cambria Math" panose="02040503050406030204" charset="0"/>
+                          </a:rPr>
+                          <m:t>0</m:t>
+                        </m:r>
+                      </m:sub>
+                    </m:sSub>
+                  </m:oMath>
+                </a14:m>
+                <a:endParaRPr lang="en-US" altLang="zh-CN">
+                  <a:latin typeface="Cambria Math" panose="02040503050406030204" charset="0"/>
+                  <a:cs typeface="Cambria Math" panose="02040503050406030204" charset="0"/>
+                </a:endParaRPr>
+              </a:p>
+              <a:p>
+                <a:pPr marL="342900" indent="-342900" fontAlgn="auto">
+                  <a:lnSpc>
+                    <a:spcPct val="150000"/>
+                  </a:lnSpc>
+                  <a:buFont typeface="+mj-lt"/>
+                  <a:buAutoNum type="arabicPeriod"/>
+                </a:pPr>
+                <a:r>
+                  <a:rPr lang="zh-CN" altLang="en-US">
+                    <a:latin typeface="Cambria Math" panose="02040503050406030204" charset="0"/>
+                    <a:cs typeface="Cambria Math" panose="02040503050406030204" charset="0"/>
+                  </a:rPr>
+                  <a:t>软件侧误差分析，使用双精度</a:t>
+                </a:r>
+                <a:r>
+                  <a:rPr lang="en-US" altLang="zh-CN">
+                    <a:latin typeface="Cambria Math" panose="02040503050406030204" charset="0"/>
+                    <a:cs typeface="Cambria Math" panose="02040503050406030204" charset="0"/>
+                  </a:rPr>
+                  <a:t>(</a:t>
+                </a:r>
+                <a:r>
+                  <a:rPr lang="zh-CN" altLang="en-US">
+                    <a:latin typeface="Cambria Math" panose="02040503050406030204" charset="0"/>
+                    <a:cs typeface="Cambria Math" panose="02040503050406030204" charset="0"/>
+                  </a:rPr>
+                  <a:t>更高的精度</a:t>
+                </a:r>
+                <a:r>
+                  <a:rPr lang="en-US" altLang="zh-CN">
+                    <a:latin typeface="Cambria Math" panose="02040503050406030204" charset="0"/>
+                    <a:cs typeface="Cambria Math" panose="02040503050406030204" charset="0"/>
+                  </a:rPr>
+                  <a:t>)</a:t>
+                </a:r>
+                <a:r>
+                  <a:rPr lang="zh-CN" altLang="en-US">
+                    <a:latin typeface="Cambria Math" panose="02040503050406030204" charset="0"/>
+                    <a:cs typeface="Cambria Math" panose="02040503050406030204" charset="0"/>
+                  </a:rPr>
+                  <a:t>计算</a:t>
+                </a:r>
+                <a14:m>
+                  <m:oMath xmlns:m="http://schemas.openxmlformats.org/officeDocument/2006/math">
+                    <m:sSub>
+                      <m:sSubPr>
+                        <m:ctrlPr>
+                          <a:rPr lang="en-US" altLang="zh-CN" i="1">
+                            <a:latin typeface="Cambria Math" panose="02040503050406030204" charset="0"/>
+                            <a:cs typeface="Cambria Math" panose="02040503050406030204" charset="0"/>
+                          </a:rPr>
+                        </m:ctrlPr>
+                      </m:sSubPr>
+                      <m:e>
+                        <m:r>
+                          <a:rPr lang="en-US" altLang="zh-CN" i="1">
+                            <a:latin typeface="Cambria Math" panose="02040503050406030204" charset="0"/>
+                            <a:cs typeface="Cambria Math" panose="02040503050406030204" charset="0"/>
+                          </a:rPr>
+                          <m:t>𝜔</m:t>
+                        </m:r>
+                      </m:e>
+                      <m:sub>
+                        <m:r>
+                          <a:rPr lang="en-US" altLang="zh-CN" i="1">
+                            <a:latin typeface="Cambria Math" panose="02040503050406030204" charset="0"/>
+                            <a:cs typeface="Cambria Math" panose="02040503050406030204" charset="0"/>
+                          </a:rPr>
+                          <m:t>1</m:t>
+                        </m:r>
+                      </m:sub>
+                    </m:sSub>
+                  </m:oMath>
+                </a14:m>
+                <a:r>
+                  <a:rPr lang="zh-CN" altLang="en-US">
+                    <a:latin typeface="Cambria Math" panose="02040503050406030204" charset="0"/>
+                    <a:cs typeface="Cambria Math" panose="02040503050406030204" charset="0"/>
+                  </a:rPr>
+                  <a:t>，若</a:t>
+                </a:r>
+                <a14:m>
+                  <m:oMath xmlns:m="http://schemas.openxmlformats.org/officeDocument/2006/math">
+                    <m:sSub>
+                      <m:sSubPr>
+                        <m:ctrlPr>
+                          <a:rPr lang="en-US" altLang="zh-CN" i="1">
+                            <a:latin typeface="Cambria Math" panose="02040503050406030204" charset="0"/>
+                            <a:cs typeface="Cambria Math" panose="02040503050406030204" charset="0"/>
+                          </a:rPr>
+                        </m:ctrlPr>
+                      </m:sSubPr>
+                      <m:e>
+                        <m:r>
+                          <a:rPr lang="en-US" altLang="zh-CN" i="1">
+                            <a:latin typeface="Cambria Math" panose="02040503050406030204" charset="0"/>
+                            <a:cs typeface="Cambria Math" panose="02040503050406030204" charset="0"/>
+                          </a:rPr>
+                          <m:t>𝜔</m:t>
+                        </m:r>
+                      </m:e>
+                      <m:sub>
+                        <m:r>
+                          <a:rPr lang="en-US" altLang="zh-CN" i="1">
+                            <a:latin typeface="Cambria Math" panose="02040503050406030204" charset="0"/>
+                            <a:cs typeface="Cambria Math" panose="02040503050406030204" charset="0"/>
+                          </a:rPr>
+                          <m:t>1</m:t>
+                        </m:r>
+                      </m:sub>
+                    </m:sSub>
+                    <m:r>
+                      <a:rPr lang="en-US" altLang="zh-CN" i="1">
+                        <a:latin typeface="Cambria Math" panose="02040503050406030204" charset="0"/>
+                        <a:cs typeface="Cambria Math" panose="02040503050406030204" charset="0"/>
+                      </a:rPr>
+                      <m:t>&lt;</m:t>
+                    </m:r>
+                    <m:r>
+                      <a:rPr lang="en-US" altLang="zh-CN" i="1">
+                        <a:latin typeface="Cambria Math" panose="02040503050406030204" charset="0"/>
+                        <a:cs typeface="Cambria Math" panose="02040503050406030204" charset="0"/>
+                      </a:rPr>
+                      <m:t>𝑇ℎ𝑟𝑒𝑠ℎ𝑜𝑙𝑑</m:t>
+                    </m:r>
+                  </m:oMath>
+                </a14:m>
+                <a:r>
+                  <a:rPr lang="zh-CN" altLang="en-US">
+                    <a:latin typeface="Cambria Math" panose="02040503050406030204" charset="0"/>
+                    <a:cs typeface="Cambria Math" panose="02040503050406030204" charset="0"/>
+                  </a:rPr>
+                  <a:t>则直接输出解，否则进入迭代求精</a:t>
+                </a:r>
+                <a:r>
+                  <a:rPr lang="zh-CN" altLang="en-US">
+                    <a:latin typeface="Cambria Math" panose="02040503050406030204" charset="0"/>
+                    <a:cs typeface="Cambria Math" panose="02040503050406030204" charset="0"/>
+                  </a:rPr>
+                  <a:t>阶段。</a:t>
+                </a:r>
+                <a:endParaRPr lang="zh-CN" altLang="en-US">
+                  <a:latin typeface="Cambria Math" panose="02040503050406030204" charset="0"/>
+                  <a:cs typeface="Cambria Math" panose="02040503050406030204" charset="0"/>
+                </a:endParaRPr>
+              </a:p>
+              <a:p>
+                <a:pPr marL="342900" indent="-342900" fontAlgn="auto">
+                  <a:lnSpc>
+                    <a:spcPct val="150000"/>
+                  </a:lnSpc>
+                  <a:buFont typeface="+mj-lt"/>
+                  <a:buAutoNum type="arabicPeriod"/>
+                </a:pPr>
+                <a:r>
+                  <a:rPr lang="zh-CN" altLang="en-US">
+                    <a:latin typeface="Cambria Math" panose="02040503050406030204" charset="0"/>
+                    <a:cs typeface="Cambria Math" panose="02040503050406030204" charset="0"/>
+                  </a:rPr>
+                  <a:t>软件侧计算残差</a:t>
+                </a:r>
+                <a14:m>
+                  <m:oMath xmlns:m="http://schemas.openxmlformats.org/officeDocument/2006/math">
+                    <m:r>
+                      <a:rPr lang="en-US" altLang="zh-CN" i="1">
+                        <a:latin typeface="Cambria Math" panose="02040503050406030204" charset="0"/>
+                        <a:cs typeface="Cambria Math" panose="02040503050406030204" charset="0"/>
+                      </a:rPr>
+                      <m:t>𝑟</m:t>
+                    </m:r>
+                    <m:r>
+                      <a:rPr lang="en-US" altLang="zh-CN" i="1">
+                        <a:latin typeface="Cambria Math" panose="02040503050406030204" charset="0"/>
+                        <a:cs typeface="Cambria Math" panose="02040503050406030204" charset="0"/>
+                      </a:rPr>
+                      <m:t>=</m:t>
+                    </m:r>
+                    <m:r>
+                      <a:rPr lang="en-US" altLang="zh-CN" i="1">
+                        <a:latin typeface="Cambria Math" panose="02040503050406030204" charset="0"/>
+                        <a:cs typeface="Cambria Math" panose="02040503050406030204" charset="0"/>
+                      </a:rPr>
+                      <m:t>𝑏−𝐴</m:t>
+                    </m:r>
+                    <m:sSub>
+                      <m:sSubPr>
+                        <m:ctrlPr>
+                          <a:rPr lang="en-US" altLang="zh-CN" i="1">
+                            <a:latin typeface="Cambria Math" panose="02040503050406030204" charset="0"/>
+                            <a:cs typeface="Cambria Math" panose="02040503050406030204" charset="0"/>
+                          </a:rPr>
+                        </m:ctrlPr>
+                      </m:sSubPr>
+                      <m:e>
+                        <m:r>
+                          <a:rPr lang="en-US" altLang="zh-CN" i="1">
+                            <a:latin typeface="Cambria Math" panose="02040503050406030204" charset="0"/>
+                            <a:cs typeface="Cambria Math" panose="02040503050406030204" charset="0"/>
+                          </a:rPr>
+                          <m:t>𝑥</m:t>
+                        </m:r>
+                      </m:e>
+                      <m:sub>
+                        <m:r>
+                          <a:rPr lang="en-US" altLang="zh-CN" i="1">
+                            <a:latin typeface="Cambria Math" panose="02040503050406030204" charset="0"/>
+                            <a:cs typeface="Cambria Math" panose="02040503050406030204" charset="0"/>
+                          </a:rPr>
+                          <m:t>𝑘</m:t>
+                        </m:r>
+                      </m:sub>
+                    </m:sSub>
+                  </m:oMath>
+                </a14:m>
+                <a:r>
+                  <a:rPr lang="zh-CN" altLang="en-US">
+                    <a:latin typeface="Cambria Math" panose="02040503050406030204" charset="0"/>
+                    <a:cs typeface="Cambria Math" panose="02040503050406030204" charset="0"/>
+                  </a:rPr>
+                  <a:t>，计算动态放缩因子</a:t>
+                </a:r>
+                <a14:m>
+                  <m:oMath xmlns:m="http://schemas.openxmlformats.org/officeDocument/2006/math">
+                    <m:r>
+                      <a:rPr lang="en-US" altLang="zh-CN" i="1">
+                        <a:latin typeface="Cambria Math" panose="02040503050406030204" charset="0"/>
+                        <a:cs typeface="Cambria Math" panose="02040503050406030204" charset="0"/>
+                      </a:rPr>
+                      <m:t>𝛼</m:t>
+                    </m:r>
+                  </m:oMath>
+                </a14:m>
+                <a:r>
+                  <a:rPr lang="zh-CN" altLang="en-US">
+                    <a:latin typeface="Cambria Math" panose="02040503050406030204" charset="0"/>
+                    <a:cs typeface="Cambria Math" panose="02040503050406030204" charset="0"/>
+                  </a:rPr>
+                  <a:t>，使得</a:t>
+                </a:r>
+                <a14:m>
+                  <m:oMath xmlns:m="http://schemas.openxmlformats.org/officeDocument/2006/math">
+                    <m:sSup>
+                      <m:sSupPr>
+                        <m:ctrlPr>
+                          <a:rPr lang="en-US" altLang="zh-CN" i="1">
+                            <a:latin typeface="Cambria Math" panose="02040503050406030204" charset="0"/>
+                            <a:cs typeface="Cambria Math" panose="02040503050406030204" charset="0"/>
+                          </a:rPr>
+                        </m:ctrlPr>
+                      </m:sSupPr>
+                      <m:e>
+                        <m:r>
+                          <a:rPr lang="en-US" altLang="zh-CN" i="1">
+                            <a:latin typeface="Cambria Math" panose="02040503050406030204" charset="0"/>
+                            <a:cs typeface="Cambria Math" panose="02040503050406030204" charset="0"/>
+                          </a:rPr>
+                          <m:t>r</m:t>
+                        </m:r>
+                      </m:e>
+                      <m:sup>
+                        <m:r>
+                          <a:rPr lang="en-US" altLang="zh-CN" i="1">
+                            <a:latin typeface="Cambria Math" panose="02040503050406030204" charset="0"/>
+                            <a:cs typeface="Cambria Math" panose="02040503050406030204" charset="0"/>
+                          </a:rPr>
+                          <m:t>’</m:t>
+                        </m:r>
+                      </m:sup>
+                    </m:sSup>
+                    <m:r>
+                      <a:rPr lang="en-US" altLang="zh-CN" i="1">
+                        <a:latin typeface="Cambria Math" panose="02040503050406030204" charset="0"/>
+                        <a:cs typeface="Cambria Math" panose="02040503050406030204" charset="0"/>
+                      </a:rPr>
+                      <m:t>=</m:t>
+                    </m:r>
+                    <m:r>
+                      <a:rPr lang="en-US" altLang="zh-CN" i="1">
+                        <a:latin typeface="Cambria Math" panose="02040503050406030204" charset="0"/>
+                        <a:cs typeface="Cambria Math" panose="02040503050406030204" charset="0"/>
+                      </a:rPr>
+                      <m:t>𝛼</m:t>
+                    </m:r>
+                    <m:r>
+                      <a:rPr lang="en-US" altLang="zh-CN" i="1">
+                        <a:latin typeface="Cambria Math" panose="02040503050406030204" charset="0"/>
+                        <a:cs typeface="Cambria Math" panose="02040503050406030204" charset="0"/>
+                      </a:rPr>
+                      <m:t>𝑟</m:t>
+                    </m:r>
+                  </m:oMath>
+                </a14:m>
+                <a:r>
+                  <a:rPr lang="en-US" altLang="zh-CN">
+                    <a:latin typeface="Cambria Math" panose="02040503050406030204" charset="0"/>
+                    <a:cs typeface="Cambria Math" panose="02040503050406030204" charset="0"/>
+                  </a:rPr>
+                  <a:t>.</a:t>
+                </a:r>
+                <a:r>
+                  <a:rPr lang="zh-CN" altLang="en-US">
+                    <a:latin typeface="Cambria Math" panose="02040503050406030204" charset="0"/>
+                    <a:cs typeface="Cambria Math" panose="02040503050406030204" charset="0"/>
+                  </a:rPr>
+                  <a:t>将</a:t>
+                </a:r>
+                <a14:m>
+                  <m:oMath xmlns:m="http://schemas.openxmlformats.org/officeDocument/2006/math">
+                    <m:sSup>
+                      <m:sSupPr>
+                        <m:ctrlPr>
+                          <a:rPr lang="en-US" altLang="zh-CN" i="1">
+                            <a:latin typeface="Cambria Math" panose="02040503050406030204" charset="0"/>
+                            <a:cs typeface="Cambria Math" panose="02040503050406030204" charset="0"/>
+                          </a:rPr>
+                        </m:ctrlPr>
+                      </m:sSupPr>
+                      <m:e>
+                        <m:r>
+                          <a:rPr lang="en-US" altLang="zh-CN" i="1">
+                            <a:latin typeface="Cambria Math" panose="02040503050406030204" charset="0"/>
+                            <a:cs typeface="Cambria Math" panose="02040503050406030204" charset="0"/>
+                          </a:rPr>
+                          <m:t>r</m:t>
+                        </m:r>
+                      </m:e>
+                      <m:sup>
+                        <m:r>
+                          <a:rPr lang="en-US" altLang="zh-CN" i="1">
+                            <a:latin typeface="Cambria Math" panose="02040503050406030204" charset="0"/>
+                            <a:cs typeface="Cambria Math" panose="02040503050406030204" charset="0"/>
+                          </a:rPr>
+                          <m:t>’</m:t>
+                        </m:r>
+                      </m:sup>
+                    </m:sSup>
+                  </m:oMath>
+                </a14:m>
+                <a:r>
+                  <a:rPr lang="zh-CN" altLang="en-US">
+                    <a:latin typeface="Cambria Math" panose="02040503050406030204" charset="0"/>
+                    <a:cs typeface="Cambria Math" panose="02040503050406030204" charset="0"/>
+                  </a:rPr>
+                  <a:t>发送到硬件侧，复用之前分解得到的</a:t>
+                </a:r>
+                <a:r>
+                  <a:rPr lang="en-US" altLang="zh-CN">
+                    <a:latin typeface="Cambria Math" panose="02040503050406030204" charset="0"/>
+                    <a:cs typeface="Cambria Math" panose="02040503050406030204" charset="0"/>
+                  </a:rPr>
+                  <a:t>LU</a:t>
+                </a:r>
+                <a:r>
+                  <a:rPr lang="zh-CN" altLang="en-US">
+                    <a:latin typeface="Cambria Math" panose="02040503050406030204" charset="0"/>
+                    <a:cs typeface="Cambria Math" panose="02040503050406030204" charset="0"/>
+                  </a:rPr>
+                  <a:t>，求解得到修正向量</a:t>
+                </a:r>
+                <a14:m>
+                  <m:oMath xmlns:m="http://schemas.openxmlformats.org/officeDocument/2006/math">
+                    <m:sSup>
+                      <m:sSupPr>
+                        <m:ctrlPr>
+                          <a:rPr lang="en-US" altLang="zh-CN" i="1">
+                            <a:latin typeface="Cambria Math" panose="02040503050406030204" charset="0"/>
+                            <a:cs typeface="Cambria Math" panose="02040503050406030204" charset="0"/>
+                          </a:rPr>
+                        </m:ctrlPr>
+                      </m:sSupPr>
+                      <m:e>
+                        <m:r>
+                          <a:rPr lang="en-US" altLang="zh-CN" i="1">
+                            <a:latin typeface="Cambria Math" panose="02040503050406030204" charset="0"/>
+                            <a:cs typeface="Cambria Math" panose="02040503050406030204" charset="0"/>
+                          </a:rPr>
+                          <m:t>d</m:t>
+                        </m:r>
+                      </m:e>
+                      <m:sup>
+                        <m:r>
+                          <a:rPr lang="en-US" altLang="zh-CN" i="1">
+                            <a:latin typeface="Cambria Math" panose="02040503050406030204" charset="0"/>
+                            <a:cs typeface="Cambria Math" panose="02040503050406030204" charset="0"/>
+                          </a:rPr>
+                          <m:t>’</m:t>
+                        </m:r>
+                      </m:sup>
+                    </m:sSup>
+                  </m:oMath>
+                </a14:m>
+                <a:r>
+                  <a:rPr lang="en-US" altLang="zh-CN">
+                    <a:latin typeface="Cambria Math" panose="02040503050406030204" charset="0"/>
+                    <a:cs typeface="Cambria Math" panose="02040503050406030204" charset="0"/>
+                  </a:rPr>
+                  <a:t>.</a:t>
+                </a:r>
+                <a:r>
+                  <a:rPr lang="zh-CN" altLang="en-US">
+                    <a:latin typeface="Cambria Math" panose="02040503050406030204" charset="0"/>
+                    <a:cs typeface="Cambria Math" panose="02040503050406030204" charset="0"/>
+                  </a:rPr>
+                  <a:t>软件侧计算</a:t>
+                </a:r>
+                <a14:m>
+                  <m:oMath xmlns:m="http://schemas.openxmlformats.org/officeDocument/2006/math">
+                    <m:r>
+                      <a:rPr lang="en-US" altLang="zh-CN" i="1">
+                        <a:latin typeface="Cambria Math" panose="02040503050406030204" charset="0"/>
+                        <a:cs typeface="Cambria Math" panose="02040503050406030204" charset="0"/>
+                      </a:rPr>
+                      <m:t>d</m:t>
+                    </m:r>
+                    <m:r>
+                      <a:rPr lang="en-US" altLang="zh-CN" i="1">
+                        <a:latin typeface="Cambria Math" panose="02040503050406030204" charset="0"/>
+                        <a:cs typeface="Cambria Math" panose="02040503050406030204" charset="0"/>
+                      </a:rPr>
+                      <m:t>=</m:t>
+                    </m:r>
+                    <m:sSup>
+                      <m:sSupPr>
+                        <m:ctrlPr>
+                          <a:rPr lang="en-US" altLang="zh-CN" i="1">
+                            <a:latin typeface="Cambria Math" panose="02040503050406030204" charset="0"/>
+                            <a:cs typeface="Cambria Math" panose="02040503050406030204" charset="0"/>
+                          </a:rPr>
+                        </m:ctrlPr>
+                      </m:sSupPr>
+                      <m:e>
+                        <m:r>
+                          <a:rPr lang="en-US" altLang="zh-CN" i="1">
+                            <a:latin typeface="Cambria Math" panose="02040503050406030204" charset="0"/>
+                            <a:cs typeface="Cambria Math" panose="02040503050406030204" charset="0"/>
+                          </a:rPr>
+                          <m:t>𝑑</m:t>
+                        </m:r>
+                      </m:e>
+                      <m:sup>
+                        <m:r>
+                          <a:rPr lang="en-US" altLang="zh-CN" i="1">
+                            <a:latin typeface="Cambria Math" panose="02040503050406030204" charset="0"/>
+                            <a:cs typeface="Cambria Math" panose="02040503050406030204" charset="0"/>
+                          </a:rPr>
+                          <m:t>’</m:t>
+                        </m:r>
+                      </m:sup>
+                    </m:sSup>
+                    <m:r>
+                      <a:rPr lang="en-US" altLang="zh-CN" i="1">
+                        <a:latin typeface="Cambria Math" panose="02040503050406030204" charset="0"/>
+                        <a:cs typeface="Cambria Math" panose="02040503050406030204" charset="0"/>
+                      </a:rPr>
+                      <m:t>/</m:t>
+                    </m:r>
+                    <m:r>
+                      <a:rPr lang="en-US" altLang="zh-CN" i="1">
+                        <a:latin typeface="Cambria Math" panose="02040503050406030204" charset="0"/>
+                        <a:cs typeface="Cambria Math" panose="02040503050406030204" charset="0"/>
+                      </a:rPr>
+                      <m:t>𝛼</m:t>
+                    </m:r>
+                  </m:oMath>
+                </a14:m>
+                <a:r>
+                  <a:rPr lang="en-US" altLang="zh-CN" i="1">
+                    <a:latin typeface="Cambria Math" panose="02040503050406030204" charset="0"/>
+                    <a:cs typeface="Cambria Math" panose="02040503050406030204" charset="0"/>
+                  </a:rPr>
+                  <a:t>,</a:t>
+                </a:r>
+                <a14:m>
+                  <m:oMath xmlns:m="http://schemas.openxmlformats.org/officeDocument/2006/math">
+                    <m:sSub>
+                      <m:sSubPr>
+                        <m:ctrlPr>
+                          <a:rPr lang="en-US" altLang="zh-CN" i="1">
+                            <a:latin typeface="Cambria Math" panose="02040503050406030204" charset="0"/>
+                            <a:cs typeface="Cambria Math" panose="02040503050406030204" charset="0"/>
+                          </a:rPr>
+                        </m:ctrlPr>
+                      </m:sSubPr>
+                      <m:e>
+                        <m:r>
+                          <a:rPr lang="en-US" altLang="zh-CN" i="1">
+                            <a:latin typeface="Cambria Math" panose="02040503050406030204" charset="0"/>
+                            <a:cs typeface="Cambria Math" panose="02040503050406030204" charset="0"/>
+                          </a:rPr>
+                          <m:t>𝑥</m:t>
+                        </m:r>
+                      </m:e>
+                      <m:sub>
+                        <m:r>
+                          <a:rPr lang="en-US" altLang="zh-CN" i="1">
+                            <a:latin typeface="Cambria Math" panose="02040503050406030204" charset="0"/>
+                            <a:cs typeface="Cambria Math" panose="02040503050406030204" charset="0"/>
+                          </a:rPr>
+                          <m:t>𝑘</m:t>
+                        </m:r>
+                        <m:r>
+                          <a:rPr lang="en-US" altLang="zh-CN" i="1">
+                            <a:latin typeface="Cambria Math" panose="02040503050406030204" charset="0"/>
+                            <a:cs typeface="Cambria Math" panose="02040503050406030204" charset="0"/>
+                          </a:rPr>
+                          <m:t>+</m:t>
+                        </m:r>
+                        <m:r>
+                          <a:rPr lang="en-US" altLang="zh-CN" i="1">
+                            <a:latin typeface="Cambria Math" panose="02040503050406030204" charset="0"/>
+                            <a:cs typeface="Cambria Math" panose="02040503050406030204" charset="0"/>
+                          </a:rPr>
+                          <m:t>1</m:t>
+                        </m:r>
+                      </m:sub>
+                    </m:sSub>
+                    <m:r>
+                      <a:rPr lang="en-US" altLang="zh-CN" i="1">
+                        <a:latin typeface="Cambria Math" panose="02040503050406030204" charset="0"/>
+                        <a:cs typeface="Cambria Math" panose="02040503050406030204" charset="0"/>
+                      </a:rPr>
+                      <m:t>=</m:t>
+                    </m:r>
+                    <m:sSub>
+                      <m:sSubPr>
+                        <m:ctrlPr>
+                          <a:rPr lang="en-US" altLang="zh-CN" i="1">
+                            <a:latin typeface="Cambria Math" panose="02040503050406030204" charset="0"/>
+                            <a:cs typeface="Cambria Math" panose="02040503050406030204" charset="0"/>
+                          </a:rPr>
+                        </m:ctrlPr>
+                      </m:sSubPr>
+                      <m:e>
+                        <m:r>
+                          <a:rPr lang="en-US" altLang="zh-CN" i="1">
+                            <a:latin typeface="Cambria Math" panose="02040503050406030204" charset="0"/>
+                            <a:cs typeface="Cambria Math" panose="02040503050406030204" charset="0"/>
+                          </a:rPr>
+                          <m:t>𝑥</m:t>
+                        </m:r>
+                      </m:e>
+                      <m:sub>
+                        <m:r>
+                          <a:rPr lang="en-US" altLang="zh-CN" i="1">
+                            <a:latin typeface="Cambria Math" panose="02040503050406030204" charset="0"/>
+                            <a:cs typeface="Cambria Math" panose="02040503050406030204" charset="0"/>
+                          </a:rPr>
+                          <m:t>𝑘</m:t>
+                        </m:r>
+                      </m:sub>
+                    </m:sSub>
+                    <m:r>
+                      <a:rPr lang="en-US" altLang="zh-CN" i="1">
+                        <a:latin typeface="Cambria Math" panose="02040503050406030204" charset="0"/>
+                        <a:cs typeface="Cambria Math" panose="02040503050406030204" charset="0"/>
+                      </a:rPr>
+                      <m:t>+</m:t>
+                    </m:r>
+                    <m:r>
+                      <a:rPr lang="en-US" altLang="zh-CN" i="1">
+                        <a:latin typeface="Cambria Math" panose="02040503050406030204" charset="0"/>
+                        <a:cs typeface="Cambria Math" panose="02040503050406030204" charset="0"/>
+                      </a:rPr>
+                      <m:t>𝑑</m:t>
+                    </m:r>
+                  </m:oMath>
+                </a14:m>
+                <a:r>
+                  <a:rPr lang="zh-CN" altLang="en-US">
+                    <a:latin typeface="Cambria Math" panose="02040503050406030204" charset="0"/>
+                    <a:cs typeface="Cambria Math" panose="02040503050406030204" charset="0"/>
+                  </a:rPr>
+                  <a:t>。然后回到第二步</a:t>
+                </a:r>
+                <a:r>
+                  <a:rPr lang="zh-CN" altLang="en-US">
+                    <a:latin typeface="Cambria Math" panose="02040503050406030204" charset="0"/>
+                    <a:cs typeface="Cambria Math" panose="02040503050406030204" charset="0"/>
+                  </a:rPr>
+                  <a:t>循环。</a:t>
+                </a:r>
+                <a:endParaRPr lang="zh-CN" altLang="en-US">
+                  <a:latin typeface="Cambria Math" panose="02040503050406030204" charset="0"/>
+                  <a:cs typeface="Cambria Math" panose="02040503050406030204" charset="0"/>
+                </a:endParaRPr>
+              </a:p>
+            </p:txBody>
+          </p:sp>
+        </mc:Choice>
+        <mc:Fallback>
+          <p:sp>
+            <p:nvSpPr>
+              <p:cNvPr id="6" name="文本框 5"/>
+              <p:cNvSpPr txBox="1">
+                <a:spLocks noRot="1" noChangeAspect="1" noMove="1" noResize="1" noEditPoints="1" noAdjustHandles="1" noChangeArrowheads="1" noChangeShapeType="1" noTextEdit="1"/>
+              </p:cNvSpPr>
+              <p:nvPr/>
+            </p:nvSpPr>
+            <p:spPr>
+              <a:xfrm>
+                <a:off x="280035" y="931545"/>
+                <a:ext cx="11490960" cy="2241550"/>
+              </a:xfrm>
+              <a:prstGeom prst="rect">
+                <a:avLst/>
+              </a:prstGeom>
+              <a:blipFill rotWithShape="1">
+                <a:blip r:embed="rId7"/>
+                <a:stretch>
+                  <a:fillRect/>
+                </a:stretch>
+              </a:blipFill>
+            </p:spPr>
+            <p:txBody>
+              <a:bodyPr/>
+              <a:lstStyle/>
+              <a:p>
+                <a:r>
+                  <a:rPr lang="zh-CN" altLang="en-US">
+                    <a:noFill/>
+                  </a:rPr>
+                  <a:t> </a:t>
+                </a:r>
+              </a:p>
+            </p:txBody>
+          </p:sp>
+        </mc:Fallback>
+      </mc:AlternateContent>
+    </p:spTree>
+  </p:cSld>
+  <p:clrMapOvr>
+    <a:masterClrMapping/>
+  </p:clrMapOvr>
+  <mc:AlternateContent xmlns:mc="http://schemas.openxmlformats.org/markup-compatibility/2006">
+    <mc:Choice xmlns:p14="http://schemas.microsoft.com/office/powerpoint/2010/main" Requires="p14">
+      <p:transition spd="slow" p14:dur="2000" advTm="35111"/>
+    </mc:Choice>
+    <mc:Fallback>
+      <p:transition spd="slow" advTm="35111"/>
+    </mc:Fallback>
+  </mc:AlternateContent>
+</p:sld>
+</file>
+
+<file path=ppt/slides/slide8.xml><?xml version="1.0" encoding="utf-8"?>
+<p:sld xmlns:a="http://schemas.openxmlformats.org/drawingml/2006/main" xmlns:r="http://schemas.openxmlformats.org/officeDocument/2006/relationships" xmlns:p="http://schemas.openxmlformats.org/presentationml/2006/main">
+  <p:cSld>
+    <p:bg>
+      <p:bgPr>
+        <a:blipFill dpi="0" rotWithShape="1">
+          <a:blip r:embed="rId1">
+            <a:lum/>
+          </a:blip>
+          <a:srcRect/>
+          <a:stretch>
+            <a:fillRect/>
+          </a:stretch>
+        </a:blipFill>
+        <a:effectLst/>
+      </p:bgPr>
+    </p:bg>
+    <p:spTree>
+      <p:nvGrpSpPr>
+        <p:cNvPr id="1" name=""/>
+        <p:cNvGrpSpPr/>
+        <p:nvPr/>
+      </p:nvGrpSpPr>
+      <p:grpSpPr>
+        <a:xfrm>
+          <a:off x="0" y="0"/>
+          <a:ext cx="0" cy="0"/>
+          <a:chOff x="0" y="0"/>
+          <a:chExt cx="0" cy="0"/>
+        </a:xfrm>
+      </p:grpSpPr>
+      <p:sp>
+        <p:nvSpPr>
+          <p:cNvPr id="4" name="文本框 3"/>
+          <p:cNvSpPr txBox="1"/>
+          <p:nvPr/>
+        </p:nvSpPr>
+        <p:spPr>
+          <a:xfrm>
+            <a:off x="0" y="6477345"/>
+            <a:ext cx="12192000" cy="400109"/>
+          </a:xfrm>
+          <a:prstGeom prst="rect">
+            <a:avLst/>
+          </a:prstGeom>
+          <a:solidFill>
+            <a:schemeClr val="accent5">
+              <a:lumMod val="50000"/>
+            </a:schemeClr>
+          </a:solidFill>
+          <a:ln>
+            <a:noFill/>
+          </a:ln>
+        </p:spPr>
+        <p:txBody>
+          <a:bodyPr wrap="square" rtlCol="0">
+            <a:spAutoFit/>
+          </a:bodyPr>
+          <a:lstStyle/>
+          <a:p>
+            <a:endParaRPr lang="zh-CN" altLang="en-US" dirty="0"/>
+          </a:p>
+        </p:txBody>
+      </p:sp>
+      <p:grpSp>
+        <p:nvGrpSpPr>
+          <p:cNvPr id="7" name="组合 6"/>
+          <p:cNvGrpSpPr/>
+          <p:nvPr/>
+        </p:nvGrpSpPr>
+        <p:grpSpPr>
+          <a:xfrm>
+            <a:off x="5284670" y="6492733"/>
+            <a:ext cx="1843236" cy="400109"/>
+            <a:chOff x="76140" y="6477345"/>
+            <a:chExt cx="1947504" cy="400109"/>
+          </a:xfrm>
+        </p:grpSpPr>
+        <p:pic>
+          <p:nvPicPr>
+            <p:cNvPr id="8" name="图片 7"/>
+            <p:cNvPicPr>
+              <a:picLocks noChangeAspect="1"/>
+            </p:cNvPicPr>
+            <p:nvPr/>
+          </p:nvPicPr>
+          <p:blipFill>
+            <a:blip r:embed="rId2">
+              <a:biLevel thresh="25000"/>
+              <a:extLst>
+                <a:ext uri="{28A0092B-C50C-407E-A947-70E740481C1C}">
+                  <a14:useLocalDpi xmlns:a14="http://schemas.microsoft.com/office/drawing/2010/main" val="0"/>
+                </a:ext>
+              </a:extLst>
+            </a:blip>
+            <a:stretch>
+              <a:fillRect/>
+            </a:stretch>
+          </p:blipFill>
+          <p:spPr>
+            <a:xfrm>
+              <a:off x="76140" y="6477345"/>
+              <a:ext cx="400109" cy="400109"/>
+            </a:xfrm>
+            <a:prstGeom prst="rect">
+              <a:avLst/>
+            </a:prstGeom>
+          </p:spPr>
+        </p:pic>
+        <p:pic>
+          <p:nvPicPr>
+            <p:cNvPr id="9" name="图片 8"/>
+            <p:cNvPicPr>
+              <a:picLocks noChangeAspect="1"/>
+            </p:cNvPicPr>
+            <p:nvPr/>
+          </p:nvPicPr>
+          <p:blipFill rotWithShape="1">
+            <a:blip r:embed="rId3">
+              <a:biLevel thresh="25000"/>
+            </a:blip>
+            <a:srcRect l="1" t="6582" r="-25334" b="26979"/>
+            <a:stretch>
+              <a:fillRect/>
+            </a:stretch>
+          </p:blipFill>
+          <p:spPr>
+            <a:xfrm>
+              <a:off x="414611" y="6477345"/>
+              <a:ext cx="724874" cy="380655"/>
+            </a:xfrm>
+            <a:prstGeom prst="rect">
+              <a:avLst/>
+            </a:prstGeom>
+          </p:spPr>
+        </p:pic>
+        <p:pic>
+          <p:nvPicPr>
+            <p:cNvPr id="10" name="图片 9"/>
+            <p:cNvPicPr>
+              <a:picLocks noChangeAspect="1"/>
+            </p:cNvPicPr>
+            <p:nvPr/>
+          </p:nvPicPr>
+          <p:blipFill rotWithShape="1">
+            <a:blip r:embed="rId2">
+              <a:biLevel thresh="25000"/>
+              <a:extLst>
+                <a:ext uri="{28A0092B-C50C-407E-A947-70E740481C1C}">
+                  <a14:useLocalDpi xmlns:a14="http://schemas.microsoft.com/office/drawing/2010/main" val="0"/>
+                </a:ext>
+              </a:extLst>
+            </a:blip>
+            <a:srcRect l="32814" t="12432" r="55484" b="78542"/>
+            <a:stretch>
+              <a:fillRect/>
+            </a:stretch>
+          </p:blipFill>
+          <p:spPr>
+            <a:xfrm rot="1259126">
+              <a:off x="895509" y="6508504"/>
+              <a:ext cx="402920" cy="310802"/>
+            </a:xfrm>
+            <a:prstGeom prst="rect">
+              <a:avLst/>
+            </a:prstGeom>
+          </p:spPr>
+        </p:pic>
+        <p:pic>
+          <p:nvPicPr>
+            <p:cNvPr id="11" name="图片 10"/>
+            <p:cNvPicPr>
+              <a:picLocks noChangeAspect="1"/>
+            </p:cNvPicPr>
+            <p:nvPr/>
+          </p:nvPicPr>
+          <p:blipFill rotWithShape="1">
+            <a:blip r:embed="rId4"/>
+            <a:srcRect t="-1" b="16526"/>
+            <a:stretch>
+              <a:fillRect/>
+            </a:stretch>
+          </p:blipFill>
+          <p:spPr>
+            <a:xfrm rot="589386">
+              <a:off x="1256498" y="6481317"/>
+              <a:ext cx="388026" cy="326437"/>
+            </a:xfrm>
+            <a:prstGeom prst="rect">
+              <a:avLst/>
+            </a:prstGeom>
+          </p:spPr>
+        </p:pic>
+        <p:pic>
+          <p:nvPicPr>
+            <p:cNvPr id="12" name="图片 11"/>
+            <p:cNvPicPr>
+              <a:picLocks noChangeAspect="1"/>
+            </p:cNvPicPr>
+            <p:nvPr/>
+          </p:nvPicPr>
+          <p:blipFill rotWithShape="1">
+            <a:blip r:embed="rId5"/>
+            <a:srcRect t="18211" b="8984"/>
+            <a:stretch>
+              <a:fillRect/>
+            </a:stretch>
+          </p:blipFill>
+          <p:spPr>
+            <a:xfrm>
+              <a:off x="1554468" y="6496881"/>
+              <a:ext cx="469176" cy="341581"/>
+            </a:xfrm>
+            <a:prstGeom prst="rect">
+              <a:avLst/>
+            </a:prstGeom>
+          </p:spPr>
+        </p:pic>
+      </p:grpSp>
+      <p:cxnSp>
+        <p:nvCxnSpPr>
+          <p:cNvPr id="48" name="直接连接符 47"/>
+          <p:cNvCxnSpPr/>
+          <p:nvPr/>
+        </p:nvCxnSpPr>
+        <p:spPr>
+          <a:xfrm>
+            <a:off x="9678572" y="560438"/>
+            <a:ext cx="2180493" cy="0"/>
+          </a:xfrm>
+          <a:prstGeom prst="line">
+            <a:avLst/>
+          </a:prstGeom>
+          <a:ln w="15875">
+            <a:solidFill>
+              <a:srgbClr val="1F4E79"/>
+            </a:solidFill>
+          </a:ln>
+        </p:spPr>
+        <p:style>
+          <a:lnRef idx="1">
+            <a:schemeClr val="accent1"/>
+          </a:lnRef>
+          <a:fillRef idx="0">
+            <a:schemeClr val="accent1"/>
+          </a:fillRef>
+          <a:effectRef idx="0">
+            <a:schemeClr val="accent1"/>
+          </a:effectRef>
+          <a:fontRef idx="minor">
+            <a:schemeClr val="tx1"/>
+          </a:fontRef>
+        </p:style>
+      </p:cxnSp>
+      <p:pic>
+        <p:nvPicPr>
+          <p:cNvPr id="49" name="图片 48"/>
+          <p:cNvPicPr>
+            <a:picLocks noChangeAspect="1"/>
+          </p:cNvPicPr>
+          <p:nvPr/>
+        </p:nvPicPr>
+        <p:blipFill>
+          <a:blip r:embed="rId6"/>
+          <a:stretch>
+            <a:fillRect/>
+          </a:stretch>
+        </p:blipFill>
+        <p:spPr>
+          <a:xfrm>
+            <a:off x="10166517" y="67522"/>
+            <a:ext cx="1291381" cy="580723"/>
+          </a:xfrm>
+          <a:prstGeom prst="rect">
+            <a:avLst/>
+          </a:prstGeom>
+        </p:spPr>
+      </p:pic>
+      <p:sp>
+        <p:nvSpPr>
+          <p:cNvPr id="18" name="标题 17"/>
+          <p:cNvSpPr>
+            <a:spLocks noGrp="1"/>
+          </p:cNvSpPr>
+          <p:nvPr>
+            <p:ph type="title"/>
+          </p:nvPr>
+        </p:nvSpPr>
+        <p:spPr>
+          <a:xfrm>
+            <a:off x="95250" y="67310"/>
+            <a:ext cx="3437255" cy="581025"/>
+          </a:xfrm>
+          <a:noFill/>
+          <a:ln>
+            <a:noFill/>
+          </a:ln>
+          <a:extLst>
+            <a:ext uri="{909E8E84-426E-40DD-AFC4-6F175D3DCCD1}">
+              <a14:hiddenFill xmlns:a14="http://schemas.microsoft.com/office/drawing/2010/main">
+                <a:solidFill>
+                  <a:schemeClr val="bg1"/>
+                </a:solidFill>
+              </a14:hiddenFill>
+            </a:ext>
+          </a:extLst>
+        </p:spPr>
+        <p:txBody>
+          <a:bodyPr>
+            <a:normAutofit/>
+          </a:bodyPr>
+          <a:p>
+            <a:pPr marL="342900" indent="-342900">
+              <a:buFont typeface="Wingdings" panose="05000000000000000000" charset="0"/>
+              <a:buChar char="Ø"/>
+            </a:pPr>
+            <a:r>
+              <a:rPr lang="zh-CN" altLang="en-US" sz="2000" b="1" dirty="0">
+                <a:latin typeface="宋体" panose="02010600030101010101" pitchFamily="2" charset="-122"/>
+                <a:ea typeface="宋体" panose="02010600030101010101" pitchFamily="2" charset="-122"/>
+              </a:rPr>
+              <a:t>系统</a:t>
+            </a:r>
+            <a:r>
+              <a:rPr lang="zh-CN" altLang="en-US" sz="2000" b="1" dirty="0">
+                <a:latin typeface="宋体" panose="02010600030101010101" pitchFamily="2" charset="-122"/>
+                <a:ea typeface="宋体" panose="02010600030101010101" pitchFamily="2" charset="-122"/>
+              </a:rPr>
+              <a:t>数据流</a:t>
+            </a:r>
+            <a:endParaRPr lang="zh-CN" altLang="en-US" sz="2000" b="1" dirty="0">
+              <a:latin typeface="宋体" panose="02010600030101010101" pitchFamily="2" charset="-122"/>
+              <a:ea typeface="宋体" panose="02010600030101010101" pitchFamily="2" charset="-122"/>
+            </a:endParaRPr>
+          </a:p>
+        </p:txBody>
+      </p:sp>
+      <p:sp>
+        <p:nvSpPr>
+          <p:cNvPr id="2" name="文本框 1"/>
+          <p:cNvSpPr txBox="1"/>
+          <p:nvPr/>
+        </p:nvSpPr>
+        <p:spPr>
+          <a:xfrm>
+            <a:off x="222250" y="920750"/>
+            <a:ext cx="11748135" cy="3046095"/>
+          </a:xfrm>
+          <a:prstGeom prst="rect">
+            <a:avLst/>
+          </a:prstGeom>
+        </p:spPr>
+        <p:txBody>
+          <a:bodyPr wrap="square">
+            <a:spAutoFit/>
+          </a:bodyPr>
+          <a:p>
+            <a:pPr indent="0" fontAlgn="auto">
+              <a:lnSpc>
+                <a:spcPct val="150000"/>
+              </a:lnSpc>
+              <a:spcBef>
+                <a:spcPct val="0"/>
+              </a:spcBef>
+            </a:pPr>
+            <a:r>
+              <a:rPr lang="zh-CN" altLang="en-US" sz="1600" b="1">
+                <a:latin typeface="+mn-ea"/>
+                <a:cs typeface="+mn-ea"/>
+              </a:rPr>
+              <a:t>第一阶段</a:t>
+            </a:r>
+            <a:endParaRPr lang="zh-CN" altLang="en-US" sz="1600" b="1">
+              <a:latin typeface="+mn-ea"/>
+              <a:cs typeface="+mn-ea"/>
+            </a:endParaRPr>
+          </a:p>
+          <a:p>
+            <a:pPr indent="0" fontAlgn="auto">
+              <a:lnSpc>
+                <a:spcPct val="150000"/>
+              </a:lnSpc>
+              <a:spcBef>
+                <a:spcPct val="0"/>
+              </a:spcBef>
+            </a:pPr>
+            <a:r>
+              <a:rPr lang="zh-CN" altLang="en-US" sz="1600">
+                <a:latin typeface="+mn-ea"/>
+                <a:cs typeface="+mn-ea"/>
+              </a:rPr>
+              <a:t>由</a:t>
+            </a:r>
+            <a:r>
+              <a:rPr lang="en-US" altLang="zh-CN" sz="1600">
+                <a:latin typeface="+mn-ea"/>
+                <a:cs typeface="+mn-ea"/>
+              </a:rPr>
+              <a:t> CPU </a:t>
+            </a:r>
+            <a:r>
+              <a:rPr lang="zh-CN" altLang="en-US" sz="1600">
+                <a:latin typeface="+mn-ea"/>
+                <a:cs typeface="+mn-ea"/>
+              </a:rPr>
+              <a:t>负责，核心目标是将不规则的稀疏结构转化为硬件可执行的规则任务。</a:t>
+            </a:r>
+            <a:endParaRPr lang="zh-CN" altLang="en-US" sz="1600">
+              <a:latin typeface="+mn-ea"/>
+              <a:cs typeface="+mn-ea"/>
+            </a:endParaRPr>
+          </a:p>
+          <a:p>
+            <a:pPr marL="285750" indent="-285750" fontAlgn="auto">
+              <a:lnSpc>
+                <a:spcPct val="150000"/>
+              </a:lnSpc>
+              <a:spcBef>
+                <a:spcPct val="0"/>
+              </a:spcBef>
+              <a:buFont typeface="Wingdings" panose="05000000000000000000" charset="0"/>
+              <a:buChar char="l"/>
+            </a:pPr>
+            <a:r>
+              <a:rPr lang="zh-CN" altLang="en-US" sz="1600">
+                <a:latin typeface="+mn-ea"/>
+                <a:cs typeface="+mn-ea"/>
+              </a:rPr>
+              <a:t>输入解析</a:t>
+            </a:r>
+            <a:r>
+              <a:rPr lang="en-US" altLang="zh-CN" sz="1600">
+                <a:latin typeface="+mn-ea"/>
+                <a:cs typeface="+mn-ea"/>
+              </a:rPr>
+              <a:t> :</a:t>
+            </a:r>
+            <a:r>
+              <a:rPr lang="zh-CN" altLang="en-US" sz="1600">
+                <a:latin typeface="+mn-ea"/>
+                <a:cs typeface="+mn-ea"/>
+              </a:rPr>
+              <a:t>读取原始稀疏矩阵</a:t>
+            </a:r>
+            <a:r>
+              <a:rPr lang="en-US" altLang="zh-CN" sz="1600">
+                <a:latin typeface="+mn-ea"/>
+                <a:cs typeface="+mn-ea"/>
+              </a:rPr>
+              <a:t>A</a:t>
+            </a:r>
+            <a:r>
+              <a:rPr lang="zh-CN" altLang="en-US" sz="1600">
+                <a:latin typeface="+mn-ea"/>
+                <a:cs typeface="+mn-ea"/>
+              </a:rPr>
+              <a:t>和向量</a:t>
+            </a:r>
+            <a:r>
+              <a:rPr lang="en-US" altLang="zh-CN" sz="1600">
+                <a:latin typeface="+mn-ea"/>
+                <a:cs typeface="+mn-ea"/>
+              </a:rPr>
+              <a:t>b</a:t>
+            </a:r>
+            <a:r>
+              <a:rPr lang="zh-CN" altLang="en-US" sz="1600">
+                <a:latin typeface="+mn-ea"/>
+                <a:cs typeface="+mn-ea"/>
+              </a:rPr>
+              <a:t>。</a:t>
+            </a:r>
+            <a:endParaRPr lang="zh-CN" altLang="en-US" sz="1600">
+              <a:latin typeface="+mn-ea"/>
+              <a:cs typeface="+mn-ea"/>
+            </a:endParaRPr>
+          </a:p>
+          <a:p>
+            <a:pPr marL="285750" indent="-285750" fontAlgn="auto">
+              <a:lnSpc>
+                <a:spcPct val="150000"/>
+              </a:lnSpc>
+              <a:spcBef>
+                <a:spcPct val="0"/>
+              </a:spcBef>
+              <a:buFont typeface="Wingdings" panose="05000000000000000000" charset="0"/>
+              <a:buChar char="l"/>
+            </a:pPr>
+            <a:r>
+              <a:rPr lang="zh-CN" altLang="en-US" sz="1600">
+                <a:latin typeface="+mn-ea"/>
+                <a:cs typeface="+mn-ea"/>
+              </a:rPr>
+              <a:t>符号分析</a:t>
+            </a:r>
+            <a:r>
+              <a:rPr lang="en-US" altLang="zh-CN" sz="1600">
+                <a:latin typeface="+mn-ea"/>
+                <a:cs typeface="+mn-ea"/>
+              </a:rPr>
+              <a:t> :</a:t>
+            </a:r>
+            <a:r>
+              <a:rPr lang="zh-CN" altLang="en-US" sz="1600">
+                <a:latin typeface="+mn-ea"/>
+                <a:cs typeface="+mn-ea"/>
+              </a:rPr>
+              <a:t>执行</a:t>
+            </a:r>
+            <a:r>
+              <a:rPr lang="en-US" altLang="zh-CN" sz="1600">
+                <a:latin typeface="+mn-ea"/>
+                <a:cs typeface="+mn-ea"/>
+              </a:rPr>
+              <a:t> AMD </a:t>
+            </a:r>
+            <a:r>
+              <a:rPr lang="zh-CN" altLang="en-US" sz="1600">
+                <a:latin typeface="+mn-ea"/>
+                <a:cs typeface="+mn-ea"/>
+              </a:rPr>
+              <a:t>重排减少填充元。构建</a:t>
+            </a:r>
+            <a:r>
+              <a:rPr lang="en-US" altLang="zh-CN" sz="1600">
+                <a:latin typeface="+mn-ea"/>
+                <a:cs typeface="+mn-ea"/>
+              </a:rPr>
+              <a:t> </a:t>
+            </a:r>
+            <a:r>
+              <a:rPr lang="zh-CN" altLang="en-US" sz="1600">
+                <a:latin typeface="+mn-ea"/>
+                <a:cs typeface="+mn-ea"/>
+              </a:rPr>
+              <a:t>消解树</a:t>
+            </a:r>
+            <a:r>
+              <a:rPr lang="en-US" altLang="zh-CN" sz="1600">
+                <a:latin typeface="+mn-ea"/>
+                <a:cs typeface="+mn-ea"/>
+              </a:rPr>
+              <a:t> (Elimination Tree) </a:t>
+            </a:r>
+            <a:r>
+              <a:rPr lang="zh-CN" altLang="en-US" sz="1600">
+                <a:latin typeface="+mn-ea"/>
+                <a:cs typeface="+mn-ea"/>
+              </a:rPr>
+              <a:t>并识别超节点</a:t>
+            </a:r>
+            <a:r>
+              <a:rPr lang="en-US" altLang="zh-CN" sz="1600">
+                <a:latin typeface="+mn-ea"/>
+                <a:cs typeface="+mn-ea"/>
+              </a:rPr>
+              <a:t> (Supernodes)</a:t>
+            </a:r>
+            <a:r>
+              <a:rPr lang="zh-CN" altLang="en-US" sz="1600">
+                <a:latin typeface="+mn-ea"/>
+                <a:cs typeface="+mn-ea"/>
+              </a:rPr>
+              <a:t>。</a:t>
+            </a:r>
+            <a:endParaRPr lang="zh-CN" altLang="en-US" sz="1600">
+              <a:latin typeface="+mn-ea"/>
+              <a:cs typeface="+mn-ea"/>
+            </a:endParaRPr>
+          </a:p>
+          <a:p>
+            <a:pPr marL="285750" indent="-285750" fontAlgn="auto">
+              <a:lnSpc>
+                <a:spcPct val="150000"/>
+              </a:lnSpc>
+              <a:spcBef>
+                <a:spcPct val="0"/>
+              </a:spcBef>
+              <a:buFont typeface="Wingdings" panose="05000000000000000000" charset="0"/>
+              <a:buChar char="l"/>
+            </a:pPr>
+            <a:r>
+              <a:rPr lang="zh-CN" altLang="en-US" sz="1600">
+                <a:latin typeface="+mn-ea"/>
+                <a:cs typeface="+mn-ea"/>
+              </a:rPr>
+              <a:t>静态预测：提前计算所有非零元的最终位置，生成映射表</a:t>
+            </a:r>
+            <a:r>
+              <a:rPr lang="en-US" altLang="zh-CN" sz="1600">
+                <a:latin typeface="+mn-ea"/>
+                <a:cs typeface="+mn-ea"/>
+              </a:rPr>
+              <a:t> (Map Table)</a:t>
+            </a:r>
+            <a:r>
+              <a:rPr lang="zh-CN" altLang="en-US" sz="1600">
+                <a:latin typeface="+mn-ea"/>
+                <a:cs typeface="+mn-ea"/>
+              </a:rPr>
+              <a:t>。</a:t>
+            </a:r>
+            <a:endParaRPr lang="zh-CN" altLang="en-US" sz="1600">
+              <a:latin typeface="+mn-ea"/>
+              <a:cs typeface="+mn-ea"/>
+            </a:endParaRPr>
+          </a:p>
+          <a:p>
+            <a:pPr marL="285750" indent="-285750" fontAlgn="auto">
+              <a:lnSpc>
+                <a:spcPct val="150000"/>
+              </a:lnSpc>
+              <a:spcBef>
+                <a:spcPct val="0"/>
+              </a:spcBef>
+              <a:buFont typeface="Wingdings" panose="05000000000000000000" charset="0"/>
+              <a:buChar char="l"/>
+            </a:pPr>
+            <a:r>
+              <a:rPr lang="zh-CN" altLang="en-US" sz="1600">
+                <a:latin typeface="+mn-ea"/>
+                <a:cs typeface="+mn-ea"/>
+              </a:rPr>
+              <a:t>内存布局</a:t>
+            </a:r>
+            <a:r>
+              <a:rPr lang="en-US" altLang="zh-CN" sz="1600">
+                <a:latin typeface="+mn-ea"/>
+                <a:cs typeface="+mn-ea"/>
+              </a:rPr>
+              <a:t>:</a:t>
+            </a:r>
+            <a:r>
+              <a:rPr lang="zh-CN" altLang="en-US" sz="1600">
+                <a:latin typeface="+mn-ea"/>
+                <a:cs typeface="+mn-ea"/>
+              </a:rPr>
+              <a:t>在</a:t>
+            </a:r>
+            <a:r>
+              <a:rPr lang="en-US" altLang="zh-CN" sz="1600">
+                <a:latin typeface="+mn-ea"/>
+                <a:cs typeface="+mn-ea"/>
+              </a:rPr>
+              <a:t> DDR </a:t>
+            </a:r>
+            <a:r>
+              <a:rPr lang="zh-CN" altLang="en-US" sz="1600">
+                <a:latin typeface="+mn-ea"/>
+                <a:cs typeface="+mn-ea"/>
+              </a:rPr>
+              <a:t>中预分配每个节点的内存空间。将原始矩阵</a:t>
+            </a:r>
+            <a:r>
+              <a:rPr lang="en-US" altLang="zh-CN" sz="1600">
+                <a:latin typeface="+mn-ea"/>
+                <a:cs typeface="+mn-ea"/>
+              </a:rPr>
+              <a:t> A</a:t>
+            </a:r>
+            <a:r>
+              <a:rPr lang="zh-CN" altLang="en-US" sz="1600">
+                <a:latin typeface="+mn-ea"/>
+                <a:cs typeface="+mn-ea"/>
+              </a:rPr>
+              <a:t>的数值直接填入对应节点的存储区（作为</a:t>
+            </a:r>
+            <a:r>
+              <a:rPr lang="en-US" altLang="zh-CN" sz="1600">
+                <a:latin typeface="+mn-ea"/>
+                <a:cs typeface="+mn-ea"/>
+              </a:rPr>
+              <a:t> Scatter-Add </a:t>
+            </a:r>
+            <a:r>
+              <a:rPr lang="zh-CN" altLang="en-US" sz="1600">
+                <a:latin typeface="+mn-ea"/>
+                <a:cs typeface="+mn-ea"/>
+              </a:rPr>
+              <a:t>的底板）。</a:t>
+            </a:r>
+            <a:endParaRPr lang="zh-CN" altLang="en-US" sz="1600">
+              <a:latin typeface="+mn-ea"/>
+              <a:cs typeface="+mn-ea"/>
+            </a:endParaRPr>
+          </a:p>
+          <a:p>
+            <a:pPr marL="285750" indent="-285750" fontAlgn="auto">
+              <a:lnSpc>
+                <a:spcPct val="150000"/>
+              </a:lnSpc>
+              <a:spcBef>
+                <a:spcPct val="0"/>
+              </a:spcBef>
+              <a:buFont typeface="Wingdings" panose="05000000000000000000" charset="0"/>
+              <a:buChar char="l"/>
+            </a:pPr>
+            <a:r>
+              <a:rPr lang="zh-CN" altLang="en-US" sz="1600">
+                <a:latin typeface="+mn-ea"/>
+                <a:cs typeface="+mn-ea"/>
+              </a:rPr>
+              <a:t>任务生成</a:t>
+            </a:r>
+            <a:r>
+              <a:rPr lang="en-US" altLang="zh-CN" sz="1600">
+                <a:latin typeface="+mn-ea"/>
+                <a:cs typeface="+mn-ea"/>
+              </a:rPr>
+              <a:t> :</a:t>
+            </a:r>
+            <a:r>
+              <a:rPr lang="zh-CN" altLang="en-US" sz="1600">
+                <a:latin typeface="+mn-ea"/>
+                <a:cs typeface="+mn-ea"/>
+              </a:rPr>
+              <a:t>生成包含地址、维度、依赖关系的</a:t>
+            </a:r>
+            <a:r>
+              <a:rPr lang="en-US" altLang="zh-CN" sz="1600">
+                <a:latin typeface="+mn-ea"/>
+                <a:cs typeface="+mn-ea"/>
+              </a:rPr>
+              <a:t> Node_Task </a:t>
+            </a:r>
+            <a:r>
+              <a:rPr lang="zh-CN" altLang="en-US" sz="1600">
+                <a:latin typeface="+mn-ea"/>
+                <a:cs typeface="+mn-ea"/>
+              </a:rPr>
+              <a:t>描述符。采用</a:t>
+            </a:r>
+            <a:r>
+              <a:rPr lang="en-US" altLang="zh-CN" sz="1600">
+                <a:latin typeface="+mn-ea"/>
+                <a:cs typeface="+mn-ea"/>
+              </a:rPr>
+              <a:t> Sibling Scheduling </a:t>
+            </a:r>
+            <a:r>
+              <a:rPr lang="zh-CN" altLang="en-US" sz="1600">
+                <a:latin typeface="+mn-ea"/>
+                <a:cs typeface="+mn-ea"/>
+              </a:rPr>
+              <a:t>策略对任务排序，写入</a:t>
+            </a:r>
+            <a:r>
+              <a:rPr lang="en-US" altLang="zh-CN" sz="1600">
+                <a:latin typeface="+mn-ea"/>
+                <a:cs typeface="+mn-ea"/>
+              </a:rPr>
+              <a:t> DDR </a:t>
+            </a:r>
+            <a:r>
+              <a:rPr lang="zh-CN" altLang="en-US" sz="1600">
+                <a:latin typeface="+mn-ea"/>
+                <a:cs typeface="+mn-ea"/>
+              </a:rPr>
+              <a:t>任务队列。</a:t>
+            </a:r>
+            <a:endParaRPr lang="zh-CN" altLang="en-US" sz="1600">
+              <a:latin typeface="+mn-ea"/>
+              <a:cs typeface="+mn-ea"/>
+            </a:endParaRPr>
+          </a:p>
+        </p:txBody>
+      </p:sp>
+    </p:spTree>
+  </p:cSld>
+  <p:clrMapOvr>
+    <a:masterClrMapping/>
+  </p:clrMapOvr>
+  <mc:AlternateContent xmlns:mc="http://schemas.openxmlformats.org/markup-compatibility/2006">
+    <mc:Choice xmlns:p14="http://schemas.microsoft.com/office/powerpoint/2010/main" Requires="p14">
+      <p:transition spd="slow" p14:dur="2000" advTm="35111"/>
+    </mc:Choice>
+    <mc:Fallback>
+      <p:transition spd="slow" advTm="35111"/>
+    </mc:Fallback>
+  </mc:AlternateContent>
+</p:sld>
+</file>
+
+<file path=ppt/slides/slide9.xml><?xml version="1.0" encoding="utf-8"?>
+<p:sld xmlns:a="http://schemas.openxmlformats.org/drawingml/2006/main" xmlns:r="http://schemas.openxmlformats.org/officeDocument/2006/relationships" xmlns:p="http://schemas.openxmlformats.org/presentationml/2006/main">
+  <p:cSld>
+    <p:bg>
+      <p:bgPr>
+        <a:blipFill dpi="0" rotWithShape="1">
+          <a:blip r:embed="rId1">
+            <a:lum/>
+          </a:blip>
+          <a:srcRect/>
+          <a:stretch>
+            <a:fillRect/>
+          </a:stretch>
+        </a:blipFill>
+        <a:effectLst/>
+      </p:bgPr>
+    </p:bg>
+    <p:spTree>
+      <p:nvGrpSpPr>
+        <p:cNvPr id="1" name=""/>
+        <p:cNvGrpSpPr/>
+        <p:nvPr/>
+      </p:nvGrpSpPr>
+      <p:grpSpPr>
+        <a:xfrm>
+          <a:off x="0" y="0"/>
+          <a:ext cx="0" cy="0"/>
+          <a:chOff x="0" y="0"/>
+          <a:chExt cx="0" cy="0"/>
+        </a:xfrm>
+      </p:grpSpPr>
+      <p:sp>
+        <p:nvSpPr>
+          <p:cNvPr id="4" name="文本框 3"/>
+          <p:cNvSpPr txBox="1"/>
+          <p:nvPr/>
+        </p:nvSpPr>
+        <p:spPr>
+          <a:xfrm>
+            <a:off x="0" y="6477345"/>
+            <a:ext cx="12192000" cy="400109"/>
+          </a:xfrm>
+          <a:prstGeom prst="rect">
+            <a:avLst/>
+          </a:prstGeom>
+          <a:solidFill>
+            <a:schemeClr val="accent5">
+              <a:lumMod val="50000"/>
+            </a:schemeClr>
+          </a:solidFill>
+          <a:ln>
+            <a:noFill/>
+          </a:ln>
+        </p:spPr>
+        <p:txBody>
+          <a:bodyPr wrap="square" rtlCol="0">
+            <a:spAutoFit/>
+          </a:bodyPr>
+          <a:lstStyle/>
+          <a:p>
+            <a:endParaRPr lang="zh-CN" altLang="en-US" dirty="0"/>
+          </a:p>
+        </p:txBody>
+      </p:sp>
+      <p:grpSp>
+        <p:nvGrpSpPr>
+          <p:cNvPr id="7" name="组合 6"/>
+          <p:cNvGrpSpPr/>
+          <p:nvPr/>
+        </p:nvGrpSpPr>
+        <p:grpSpPr>
+          <a:xfrm>
+            <a:off x="5284670" y="6492733"/>
+            <a:ext cx="1843236" cy="400109"/>
+            <a:chOff x="76140" y="6477345"/>
+            <a:chExt cx="1947504" cy="400109"/>
+          </a:xfrm>
+        </p:grpSpPr>
+        <p:pic>
+          <p:nvPicPr>
+            <p:cNvPr id="8" name="图片 7"/>
+            <p:cNvPicPr>
+              <a:picLocks noChangeAspect="1"/>
+            </p:cNvPicPr>
+            <p:nvPr/>
+          </p:nvPicPr>
+          <p:blipFill>
+            <a:blip r:embed="rId2">
+              <a:biLevel thresh="25000"/>
+              <a:extLst>
+                <a:ext uri="{28A0092B-C50C-407E-A947-70E740481C1C}">
+                  <a14:useLocalDpi xmlns:a14="http://schemas.microsoft.com/office/drawing/2010/main" val="0"/>
+                </a:ext>
+              </a:extLst>
+            </a:blip>
+            <a:stretch>
+              <a:fillRect/>
+            </a:stretch>
+          </p:blipFill>
+          <p:spPr>
+            <a:xfrm>
+              <a:off x="76140" y="6477345"/>
+              <a:ext cx="400109" cy="400109"/>
+            </a:xfrm>
+            <a:prstGeom prst="rect">
+              <a:avLst/>
+            </a:prstGeom>
+          </p:spPr>
+        </p:pic>
+        <p:pic>
+          <p:nvPicPr>
+            <p:cNvPr id="9" name="图片 8"/>
+            <p:cNvPicPr>
+              <a:picLocks noChangeAspect="1"/>
+            </p:cNvPicPr>
+            <p:nvPr/>
+          </p:nvPicPr>
+          <p:blipFill rotWithShape="1">
+            <a:blip r:embed="rId3">
+              <a:biLevel thresh="25000"/>
+            </a:blip>
+            <a:srcRect l="1" t="6582" r="-25334" b="26979"/>
+            <a:stretch>
+              <a:fillRect/>
+            </a:stretch>
+          </p:blipFill>
+          <p:spPr>
+            <a:xfrm>
+              <a:off x="414611" y="6477345"/>
+              <a:ext cx="724874" cy="380655"/>
+            </a:xfrm>
+            <a:prstGeom prst="rect">
+              <a:avLst/>
+            </a:prstGeom>
+          </p:spPr>
+        </p:pic>
+        <p:pic>
+          <p:nvPicPr>
+            <p:cNvPr id="10" name="图片 9"/>
+            <p:cNvPicPr>
+              <a:picLocks noChangeAspect="1"/>
+            </p:cNvPicPr>
+            <p:nvPr/>
+          </p:nvPicPr>
+          <p:blipFill rotWithShape="1">
+            <a:blip r:embed="rId2">
+              <a:biLevel thresh="25000"/>
+              <a:extLst>
+                <a:ext uri="{28A0092B-C50C-407E-A947-70E740481C1C}">
+                  <a14:useLocalDpi xmlns:a14="http://schemas.microsoft.com/office/drawing/2010/main" val="0"/>
+                </a:ext>
+              </a:extLst>
+            </a:blip>
+            <a:srcRect l="32814" t="12432" r="55484" b="78542"/>
+            <a:stretch>
+              <a:fillRect/>
+            </a:stretch>
+          </p:blipFill>
+          <p:spPr>
+            <a:xfrm rot="1259126">
+              <a:off x="895509" y="6508504"/>
+              <a:ext cx="402920" cy="310802"/>
+            </a:xfrm>
+            <a:prstGeom prst="rect">
+              <a:avLst/>
+            </a:prstGeom>
+          </p:spPr>
+        </p:pic>
+        <p:pic>
+          <p:nvPicPr>
+            <p:cNvPr id="11" name="图片 10"/>
+            <p:cNvPicPr>
+              <a:picLocks noChangeAspect="1"/>
+            </p:cNvPicPr>
+            <p:nvPr/>
+          </p:nvPicPr>
+          <p:blipFill rotWithShape="1">
+            <a:blip r:embed="rId4"/>
+            <a:srcRect t="-1" b="16526"/>
+            <a:stretch>
+              <a:fillRect/>
+            </a:stretch>
+          </p:blipFill>
+          <p:spPr>
+            <a:xfrm rot="589386">
+              <a:off x="1256498" y="6481317"/>
+              <a:ext cx="388026" cy="326437"/>
+            </a:xfrm>
+            <a:prstGeom prst="rect">
+              <a:avLst/>
+            </a:prstGeom>
+          </p:spPr>
+        </p:pic>
+        <p:pic>
+          <p:nvPicPr>
+            <p:cNvPr id="12" name="图片 11"/>
+            <p:cNvPicPr>
+              <a:picLocks noChangeAspect="1"/>
+            </p:cNvPicPr>
+            <p:nvPr/>
+          </p:nvPicPr>
+          <p:blipFill rotWithShape="1">
+            <a:blip r:embed="rId5"/>
+            <a:srcRect t="18211" b="8984"/>
+            <a:stretch>
+              <a:fillRect/>
+            </a:stretch>
+          </p:blipFill>
+          <p:spPr>
+            <a:xfrm>
+              <a:off x="1554468" y="6496881"/>
+              <a:ext cx="469176" cy="341581"/>
+            </a:xfrm>
+            <a:prstGeom prst="rect">
+              <a:avLst/>
+            </a:prstGeom>
+          </p:spPr>
+        </p:pic>
+      </p:grpSp>
+      <p:cxnSp>
+        <p:nvCxnSpPr>
+          <p:cNvPr id="48" name="直接连接符 47"/>
+          <p:cNvCxnSpPr/>
+          <p:nvPr/>
+        </p:nvCxnSpPr>
+        <p:spPr>
+          <a:xfrm>
+            <a:off x="9678572" y="560438"/>
+            <a:ext cx="2180493" cy="0"/>
+          </a:xfrm>
+          <a:prstGeom prst="line">
+            <a:avLst/>
+          </a:prstGeom>
+          <a:ln w="15875">
+            <a:solidFill>
+              <a:srgbClr val="1F4E79"/>
+            </a:solidFill>
+          </a:ln>
+        </p:spPr>
+        <p:style>
+          <a:lnRef idx="1">
+            <a:schemeClr val="accent1"/>
+          </a:lnRef>
+          <a:fillRef idx="0">
+            <a:schemeClr val="accent1"/>
+          </a:fillRef>
+          <a:effectRef idx="0">
+            <a:schemeClr val="accent1"/>
+          </a:effectRef>
+          <a:fontRef idx="minor">
+            <a:schemeClr val="tx1"/>
+          </a:fontRef>
+        </p:style>
+      </p:cxnSp>
+      <p:pic>
+        <p:nvPicPr>
+          <p:cNvPr id="49" name="图片 48"/>
+          <p:cNvPicPr>
+            <a:picLocks noChangeAspect="1"/>
+          </p:cNvPicPr>
+          <p:nvPr/>
+        </p:nvPicPr>
+        <p:blipFill>
+          <a:blip r:embed="rId6"/>
+          <a:stretch>
+            <a:fillRect/>
+          </a:stretch>
+        </p:blipFill>
+        <p:spPr>
+          <a:xfrm>
+            <a:off x="10166517" y="67522"/>
+            <a:ext cx="1291381" cy="580723"/>
+          </a:xfrm>
+          <a:prstGeom prst="rect">
+            <a:avLst/>
+          </a:prstGeom>
+        </p:spPr>
+      </p:pic>
+      <p:sp>
+        <p:nvSpPr>
+          <p:cNvPr id="18" name="标题 17"/>
+          <p:cNvSpPr>
+            <a:spLocks noGrp="1"/>
+          </p:cNvSpPr>
+          <p:nvPr>
+            <p:ph type="title"/>
+          </p:nvPr>
+        </p:nvSpPr>
+        <p:spPr>
+          <a:xfrm>
+            <a:off x="95250" y="67310"/>
+            <a:ext cx="3437255" cy="581025"/>
+          </a:xfrm>
+          <a:noFill/>
+          <a:ln>
+            <a:noFill/>
+          </a:ln>
+          <a:extLst>
+            <a:ext uri="{909E8E84-426E-40DD-AFC4-6F175D3DCCD1}">
+              <a14:hiddenFill xmlns:a14="http://schemas.microsoft.com/office/drawing/2010/main">
+                <a:solidFill>
+                  <a:schemeClr val="bg1"/>
+                </a:solidFill>
+              </a14:hiddenFill>
+            </a:ext>
+          </a:extLst>
+        </p:spPr>
+        <p:txBody>
+          <a:bodyPr>
+            <a:normAutofit/>
+          </a:bodyPr>
+          <a:p>
+            <a:pPr marL="342900" indent="-342900">
+              <a:buFont typeface="Wingdings" panose="05000000000000000000" charset="0"/>
+              <a:buChar char="Ø"/>
+            </a:pPr>
+            <a:r>
+              <a:rPr lang="zh-CN" altLang="en-US" sz="2000" b="1" dirty="0">
+                <a:latin typeface="宋体" panose="02010600030101010101" pitchFamily="2" charset="-122"/>
+                <a:ea typeface="宋体" panose="02010600030101010101" pitchFamily="2" charset="-122"/>
+              </a:rPr>
+              <a:t>系统</a:t>
+            </a:r>
+            <a:r>
+              <a:rPr lang="zh-CN" altLang="en-US" sz="2000" b="1" dirty="0">
+                <a:latin typeface="宋体" panose="02010600030101010101" pitchFamily="2" charset="-122"/>
+                <a:ea typeface="宋体" panose="02010600030101010101" pitchFamily="2" charset="-122"/>
+              </a:rPr>
+              <a:t>数据流</a:t>
+            </a:r>
+            <a:endParaRPr lang="zh-CN" altLang="en-US" sz="2000" b="1" dirty="0">
+              <a:latin typeface="宋体" panose="02010600030101010101" pitchFamily="2" charset="-122"/>
+              <a:ea typeface="宋体" panose="02010600030101010101" pitchFamily="2" charset="-122"/>
+            </a:endParaRPr>
+          </a:p>
+        </p:txBody>
+      </p:sp>
+      <mc:AlternateContent xmlns:mc="http://schemas.openxmlformats.org/markup-compatibility/2006">
+        <mc:Choice xmlns:a14="http://schemas.microsoft.com/office/drawing/2010/main" Requires="a14">
+          <p:sp>
+            <p:nvSpPr>
+              <p:cNvPr id="2" name="文本框 1"/>
+              <p:cNvSpPr txBox="1"/>
+              <p:nvPr/>
+            </p:nvSpPr>
+            <p:spPr>
+              <a:xfrm>
+                <a:off x="222250" y="859790"/>
+                <a:ext cx="11748135" cy="4526280"/>
+              </a:xfrm>
+              <a:prstGeom prst="rect">
+                <a:avLst/>
+              </a:prstGeom>
+            </p:spPr>
+            <p:txBody>
+              <a:bodyPr wrap="square">
+                <a:spAutoFit/>
+              </a:bodyPr>
+              <a:p>
+                <a:pPr indent="0" fontAlgn="auto">
+                  <a:lnSpc>
+                    <a:spcPct val="150000"/>
+                  </a:lnSpc>
+                  <a:spcBef>
+                    <a:spcPct val="0"/>
+                  </a:spcBef>
+                </a:pPr>
+                <a:r>
+                  <a:rPr lang="zh-CN" altLang="en-US" sz="1600" b="1">
+                    <a:latin typeface="+mn-ea"/>
+                    <a:cs typeface="+mn-ea"/>
+                  </a:rPr>
+                  <a:t>第二阶段</a:t>
+                </a:r>
+                <a:endParaRPr lang="zh-CN" altLang="en-US" sz="1600" b="1">
+                  <a:latin typeface="+mn-ea"/>
+                  <a:cs typeface="+mn-ea"/>
+                </a:endParaRPr>
+              </a:p>
+              <a:p>
+                <a:pPr marL="285750" indent="-285750" fontAlgn="auto">
+                  <a:lnSpc>
+                    <a:spcPct val="150000"/>
+                  </a:lnSpc>
+                  <a:spcBef>
+                    <a:spcPct val="0"/>
+                  </a:spcBef>
+                  <a:buFont typeface="Wingdings" panose="05000000000000000000" charset="0"/>
+                  <a:buChar char="l"/>
+                </a:pPr>
+                <a:r>
+                  <a:rPr lang="zh-CN" altLang="en-US" sz="1600">
+                    <a:latin typeface="+mn-ea"/>
+                    <a:cs typeface="+mn-ea"/>
+                  </a:rPr>
+                  <a:t>任务获取</a:t>
+                </a:r>
+                <a:r>
+                  <a:rPr lang="en-US" altLang="zh-CN" sz="1600">
+                    <a:latin typeface="+mn-ea"/>
+                    <a:cs typeface="+mn-ea"/>
+                  </a:rPr>
+                  <a:t> (Task Fetch):GCU </a:t>
+                </a:r>
+                <a:r>
+                  <a:rPr lang="zh-CN" altLang="en-US" sz="1600">
+                    <a:latin typeface="+mn-ea"/>
+                    <a:cs typeface="+mn-ea"/>
+                  </a:rPr>
+                  <a:t>从</a:t>
+                </a:r>
+                <a:r>
+                  <a:rPr lang="en-US" altLang="zh-CN" sz="1600">
+                    <a:latin typeface="+mn-ea"/>
+                    <a:cs typeface="+mn-ea"/>
+                  </a:rPr>
+                  <a:t> DDR </a:t>
+                </a:r>
+                <a:r>
+                  <a:rPr lang="zh-CN" altLang="en-US" sz="1600">
+                    <a:latin typeface="+mn-ea"/>
+                    <a:cs typeface="+mn-ea"/>
+                  </a:rPr>
+                  <a:t>读取</a:t>
+                </a:r>
+                <a:r>
+                  <a:rPr lang="en-US" altLang="zh-CN" sz="1600">
+                    <a:latin typeface="+mn-ea"/>
+                    <a:cs typeface="+mn-ea"/>
+                  </a:rPr>
+                  <a:t> Node_Task</a:t>
+                </a:r>
+                <a:r>
+                  <a:rPr lang="zh-CN" altLang="en-US" sz="1600">
+                    <a:latin typeface="+mn-ea"/>
+                    <a:cs typeface="+mn-ea"/>
+                  </a:rPr>
+                  <a:t>。</a:t>
+                </a:r>
+                <a:endParaRPr lang="zh-CN" altLang="en-US" sz="1600">
+                  <a:latin typeface="+mn-ea"/>
+                  <a:cs typeface="+mn-ea"/>
+                </a:endParaRPr>
+              </a:p>
+              <a:p>
+                <a:pPr marL="285750" indent="-285750" fontAlgn="auto">
+                  <a:lnSpc>
+                    <a:spcPct val="150000"/>
+                  </a:lnSpc>
+                  <a:spcBef>
+                    <a:spcPct val="0"/>
+                  </a:spcBef>
+                  <a:buFont typeface="Wingdings" panose="05000000000000000000" charset="0"/>
+                  <a:buChar char="l"/>
+                </a:pPr>
+                <a:r>
+                  <a:rPr lang="zh-CN" altLang="en-US" sz="1600">
+                    <a:latin typeface="+mn-ea"/>
+                    <a:cs typeface="+mn-ea"/>
+                  </a:rPr>
+                  <a:t>依赖检查：确保当前任务的父节点数据安全，分配片上</a:t>
+                </a:r>
+                <a:r>
+                  <a:rPr lang="en-US" altLang="zh-CN" sz="1600">
+                    <a:latin typeface="+mn-ea"/>
+                    <a:cs typeface="+mn-ea"/>
+                  </a:rPr>
+                  <a:t> Ping-Pong Buffer</a:t>
+                </a:r>
+                <a:r>
+                  <a:rPr lang="zh-CN" altLang="en-US" sz="1600">
+                    <a:latin typeface="+mn-ea"/>
+                    <a:cs typeface="+mn-ea"/>
+                  </a:rPr>
+                  <a:t>。</a:t>
+                </a:r>
+                <a:endParaRPr lang="zh-CN" altLang="en-US" sz="1600">
+                  <a:latin typeface="+mn-ea"/>
+                  <a:cs typeface="+mn-ea"/>
+                </a:endParaRPr>
+              </a:p>
+              <a:p>
+                <a:pPr marL="285750" indent="-285750" fontAlgn="auto">
+                  <a:lnSpc>
+                    <a:spcPct val="150000"/>
+                  </a:lnSpc>
+                  <a:spcBef>
+                    <a:spcPct val="0"/>
+                  </a:spcBef>
+                  <a:buFont typeface="Wingdings" panose="05000000000000000000" charset="0"/>
+                  <a:buChar char="l"/>
+                </a:pPr>
+                <a:r>
+                  <a:rPr lang="zh-CN" altLang="en-US" sz="1600">
+                    <a:latin typeface="+mn-ea"/>
+                    <a:cs typeface="+mn-ea"/>
+                  </a:rPr>
+                  <a:t>数据加载</a:t>
+                </a:r>
+                <a:r>
+                  <a:rPr lang="en-US" altLang="zh-CN" sz="1600">
+                    <a:latin typeface="+mn-ea"/>
+                    <a:cs typeface="+mn-ea"/>
+                  </a:rPr>
+                  <a:t> (Burst Load):DMA </a:t>
+                </a:r>
+                <a:r>
+                  <a:rPr lang="zh-CN" altLang="en-US" sz="1600">
+                    <a:latin typeface="+mn-ea"/>
+                    <a:cs typeface="+mn-ea"/>
+                  </a:rPr>
+                  <a:t>将当前节点的波前矩阵（</a:t>
+                </a:r>
+                <a:r>
+                  <a:rPr lang="en-US" altLang="zh-CN" sz="1600">
+                    <a:latin typeface="+mn-ea"/>
+                    <a:cs typeface="+mn-ea"/>
+                  </a:rPr>
+                  <a:t>Frontal Matrix</a:t>
+                </a:r>
+                <a:r>
+                  <a:rPr lang="zh-CN" altLang="en-US" sz="1600">
+                    <a:latin typeface="+mn-ea"/>
+                    <a:cs typeface="+mn-ea"/>
+                  </a:rPr>
+                  <a:t>）从</a:t>
+                </a:r>
+                <a:r>
+                  <a:rPr lang="en-US" altLang="zh-CN" sz="1600">
+                    <a:latin typeface="+mn-ea"/>
+                    <a:cs typeface="+mn-ea"/>
+                  </a:rPr>
+                  <a:t> DDR </a:t>
+                </a:r>
+                <a:r>
+                  <a:rPr lang="zh-CN" altLang="en-US" sz="1600">
+                    <a:latin typeface="+mn-ea"/>
+                    <a:cs typeface="+mn-ea"/>
+                  </a:rPr>
+                  <a:t>搬运至片上</a:t>
+                </a:r>
+                <a:r>
+                  <a:rPr lang="en-US" altLang="zh-CN" sz="1600">
+                    <a:latin typeface="+mn-ea"/>
+                    <a:cs typeface="+mn-ea"/>
+                  </a:rPr>
+                  <a:t> SRAM</a:t>
+                </a:r>
+                <a:r>
+                  <a:rPr lang="zh-CN" altLang="en-US" sz="1600">
+                    <a:latin typeface="+mn-ea"/>
+                    <a:cs typeface="+mn-ea"/>
+                  </a:rPr>
+                  <a:t>。</a:t>
+                </a:r>
+                <a:endParaRPr lang="zh-CN" altLang="en-US" sz="1600">
+                  <a:latin typeface="+mn-ea"/>
+                  <a:cs typeface="+mn-ea"/>
+                </a:endParaRPr>
+              </a:p>
+              <a:p>
+                <a:pPr marL="285750" indent="-285750" fontAlgn="auto">
+                  <a:lnSpc>
+                    <a:spcPct val="150000"/>
+                  </a:lnSpc>
+                  <a:spcBef>
+                    <a:spcPct val="0"/>
+                  </a:spcBef>
+                  <a:buFont typeface="Wingdings" panose="05000000000000000000" charset="0"/>
+                  <a:buChar char="l"/>
+                </a:pPr>
+                <a:r>
+                  <a:rPr lang="zh-CN" altLang="en-US" sz="1600">
+                    <a:latin typeface="+mn-ea"/>
+                    <a:cs typeface="+mn-ea"/>
+                  </a:rPr>
+                  <a:t>微流水线计算</a:t>
+                </a:r>
+                <a:r>
+                  <a:rPr lang="en-US" altLang="zh-CN" sz="1600">
+                    <a:latin typeface="+mn-ea"/>
+                    <a:cs typeface="+mn-ea"/>
+                  </a:rPr>
+                  <a:t> (Micro-Pipeline Compute):</a:t>
+                </a:r>
+                <a:endParaRPr lang="en-US" altLang="zh-CN" sz="1600">
+                  <a:latin typeface="+mn-ea"/>
+                  <a:cs typeface="+mn-ea"/>
+                </a:endParaRPr>
+              </a:p>
+              <a:p>
+                <a:pPr indent="457200" fontAlgn="auto">
+                  <a:lnSpc>
+                    <a:spcPct val="150000"/>
+                  </a:lnSpc>
+                  <a:spcBef>
+                    <a:spcPct val="0"/>
+                  </a:spcBef>
+                  <a:buFont typeface="Wingdings" panose="05000000000000000000" charset="0"/>
+                  <a:buNone/>
+                </a:pPr>
+                <a:r>
+                  <a:rPr lang="en-US" altLang="zh-CN" sz="1600">
+                    <a:latin typeface="+mn-ea"/>
+                    <a:cs typeface="+mn-ea"/>
+                  </a:rPr>
+                  <a:t>HPU</a:t>
+                </a:r>
+                <a:r>
+                  <a:rPr lang="zh-CN" altLang="en-US" sz="1600">
+                    <a:latin typeface="+mn-ea"/>
+                    <a:cs typeface="+mn-ea"/>
+                  </a:rPr>
+                  <a:t>：并行搜索主元（</a:t>
+                </a:r>
+                <a:r>
+                  <a:rPr lang="en-US" altLang="zh-CN" sz="1600">
+                    <a:latin typeface="+mn-ea"/>
+                    <a:cs typeface="+mn-ea"/>
+                  </a:rPr>
+                  <a:t>Lookahead</a:t>
+                </a:r>
+                <a:r>
+                  <a:rPr lang="zh-CN" altLang="en-US" sz="1600">
+                    <a:latin typeface="+mn-ea"/>
+                    <a:cs typeface="+mn-ea"/>
+                  </a:rPr>
+                  <a:t>），确定交换行</a:t>
+                </a:r>
+                <a:r>
+                  <a:rPr lang="en-US" altLang="zh-CN" sz="1600">
+                    <a:latin typeface="+mn-ea"/>
+                    <a:cs typeface="+mn-ea"/>
+                  </a:rPr>
+                  <a:t>k</a:t>
+                </a:r>
+                <a:r>
+                  <a:rPr lang="zh-CN" altLang="en-US" sz="1600">
+                    <a:latin typeface="+mn-ea"/>
+                    <a:cs typeface="+mn-ea"/>
+                  </a:rPr>
+                  <a:t>。</a:t>
+                </a:r>
+                <a:endParaRPr lang="zh-CN" altLang="en-US" sz="1600">
+                  <a:latin typeface="+mn-ea"/>
+                  <a:cs typeface="+mn-ea"/>
+                </a:endParaRPr>
+              </a:p>
+              <a:p>
+                <a:pPr indent="457200" fontAlgn="auto">
+                  <a:lnSpc>
+                    <a:spcPct val="150000"/>
+                  </a:lnSpc>
+                  <a:spcBef>
+                    <a:spcPct val="0"/>
+                  </a:spcBef>
+                  <a:buFont typeface="Wingdings" panose="05000000000000000000" charset="0"/>
+                  <a:buNone/>
+                </a:pPr>
+                <a:r>
+                  <a:rPr lang="en-US" altLang="zh-CN" sz="1600">
+                    <a:latin typeface="+mn-ea"/>
+                    <a:cs typeface="+mn-ea"/>
+                  </a:rPr>
+                  <a:t>ATU</a:t>
+                </a:r>
+                <a:r>
+                  <a:rPr lang="zh-CN" altLang="en-US" sz="1600">
+                    <a:latin typeface="+mn-ea"/>
+                    <a:cs typeface="+mn-ea"/>
+                  </a:rPr>
+                  <a:t>：执行逻辑行到物理行的</a:t>
+                </a:r>
+                <a:r>
+                  <a:rPr lang="en-US" altLang="zh-CN" sz="1600">
+                    <a:latin typeface="+mn-ea"/>
+                    <a:cs typeface="+mn-ea"/>
+                  </a:rPr>
+                  <a:t> </a:t>
+                </a:r>
+                <a:r>
+                  <a:rPr lang="zh-CN" altLang="en-US" sz="1600">
+                    <a:latin typeface="+mn-ea"/>
+                    <a:cs typeface="+mn-ea"/>
+                  </a:rPr>
+                  <a:t>零拷贝映射</a:t>
+                </a:r>
+                <a:r>
+                  <a:rPr lang="en-US" altLang="zh-CN" sz="1600">
+                    <a:latin typeface="+mn-ea"/>
+                    <a:cs typeface="+mn-ea"/>
+                  </a:rPr>
+                  <a:t> (Zero-Copy Swap)</a:t>
+                </a:r>
+                <a:r>
+                  <a:rPr lang="zh-CN" altLang="en-US" sz="1600">
+                    <a:latin typeface="+mn-ea"/>
+                    <a:cs typeface="+mn-ea"/>
+                  </a:rPr>
+                  <a:t>。</a:t>
+                </a:r>
+                <a:endParaRPr lang="zh-CN" altLang="en-US" sz="1600">
+                  <a:latin typeface="+mn-ea"/>
+                  <a:cs typeface="+mn-ea"/>
+                </a:endParaRPr>
+              </a:p>
+              <a:p>
+                <a:pPr indent="457200" fontAlgn="auto">
+                  <a:lnSpc>
+                    <a:spcPct val="150000"/>
+                  </a:lnSpc>
+                  <a:spcBef>
+                    <a:spcPct val="0"/>
+                  </a:spcBef>
+                  <a:buFont typeface="Wingdings" panose="05000000000000000000" charset="0"/>
+                  <a:buNone/>
+                </a:pPr>
+                <a:r>
+                  <a:rPr lang="en-US" altLang="zh-CN" sz="1600">
+                    <a:latin typeface="+mn-ea"/>
+                    <a:cs typeface="+mn-ea"/>
+                  </a:rPr>
+                  <a:t>SFU</a:t>
+                </a:r>
+                <a:r>
+                  <a:rPr lang="zh-CN" altLang="en-US" sz="1600">
+                    <a:latin typeface="+mn-ea"/>
+                    <a:cs typeface="+mn-ea"/>
+                  </a:rPr>
+                  <a:t>：计算</a:t>
+                </a:r>
+                <a14:m>
+                  <m:oMath xmlns:m="http://schemas.openxmlformats.org/officeDocument/2006/math">
+                    <m:sSub>
+                      <m:sSubPr>
+                        <m:ctrlPr>
+                          <a:rPr lang="en-US" altLang="zh-CN" sz="1600" i="1">
+                            <a:latin typeface="Cambria Math" panose="02040503050406030204" charset="0"/>
+                            <a:cs typeface="Cambria Math" panose="02040503050406030204" charset="0"/>
+                          </a:rPr>
+                        </m:ctrlPr>
+                      </m:sSubPr>
+                      <m:e>
+                        <m:r>
+                          <a:rPr lang="en-US" altLang="zh-CN" sz="1600" i="1">
+                            <a:latin typeface="Cambria Math" panose="02040503050406030204" charset="0"/>
+                            <a:cs typeface="Cambria Math" panose="02040503050406030204" charset="0"/>
+                          </a:rPr>
+                          <m:t>𝐴</m:t>
+                        </m:r>
+                      </m:e>
+                      <m:sub>
+                        <m:r>
+                          <a:rPr lang="en-US" altLang="zh-CN" sz="1600" i="1">
+                            <a:latin typeface="Cambria Math" panose="02040503050406030204" charset="0"/>
+                            <a:cs typeface="Cambria Math" panose="02040503050406030204" charset="0"/>
+                          </a:rPr>
+                          <m:t>𝑝𝑖𝑣𝑜𝑡</m:t>
+                        </m:r>
+                      </m:sub>
+                    </m:sSub>
+                  </m:oMath>
+                </a14:m>
+                <a:r>
+                  <a:rPr lang="zh-CN" altLang="en-US" sz="1600">
+                    <a:latin typeface="+mn-ea"/>
+                    <a:cs typeface="+mn-ea"/>
+                  </a:rPr>
+                  <a:t>的</a:t>
+                </a:r>
+                <a:r>
+                  <a:rPr lang="en-US" altLang="zh-CN" sz="1600">
+                    <a:latin typeface="+mn-ea"/>
+                    <a:cs typeface="+mn-ea"/>
+                  </a:rPr>
+                  <a:t> L/U </a:t>
+                </a:r>
+                <a:r>
+                  <a:rPr lang="zh-CN" altLang="en-US" sz="1600">
+                    <a:latin typeface="+mn-ea"/>
+                    <a:cs typeface="+mn-ea"/>
+                  </a:rPr>
+                  <a:t>因子及</a:t>
+                </a:r>
+                <a:r>
+                  <a:rPr lang="en-US" altLang="zh-CN" sz="1600">
+                    <a:latin typeface="+mn-ea"/>
+                    <a:cs typeface="+mn-ea"/>
+                  </a:rPr>
+                  <a:t> TRSM</a:t>
+                </a:r>
+                <a:r>
+                  <a:rPr lang="zh-CN" altLang="en-US" sz="1600">
+                    <a:latin typeface="+mn-ea"/>
+                    <a:cs typeface="+mn-ea"/>
+                  </a:rPr>
+                  <a:t>。</a:t>
+                </a:r>
+                <a:endParaRPr lang="zh-CN" altLang="en-US" sz="1600">
+                  <a:latin typeface="+mn-ea"/>
+                  <a:cs typeface="+mn-ea"/>
+                </a:endParaRPr>
+              </a:p>
+              <a:p>
+                <a:pPr indent="457200" fontAlgn="auto">
+                  <a:lnSpc>
+                    <a:spcPct val="150000"/>
+                  </a:lnSpc>
+                  <a:spcBef>
+                    <a:spcPct val="0"/>
+                  </a:spcBef>
+                  <a:buFont typeface="Wingdings" panose="05000000000000000000" charset="0"/>
+                  <a:buNone/>
+                </a:pPr>
+                <a:r>
+                  <a:rPr lang="en-US" altLang="zh-CN" sz="1600">
+                    <a:latin typeface="+mn-ea"/>
+                    <a:cs typeface="+mn-ea"/>
+                  </a:rPr>
+                  <a:t>Tensor Core</a:t>
+                </a:r>
+                <a:r>
+                  <a:rPr lang="zh-CN" altLang="en-US" sz="1600">
+                    <a:latin typeface="+mn-ea"/>
+                    <a:cs typeface="+mn-ea"/>
+                  </a:rPr>
+                  <a:t>：执行大规模</a:t>
+                </a:r>
+                <a:r>
+                  <a:rPr lang="en-US" altLang="zh-CN" sz="1600">
+                    <a:latin typeface="+mn-ea"/>
+                    <a:cs typeface="+mn-ea"/>
+                  </a:rPr>
+                  <a:t> GEMM</a:t>
+                </a:r>
+                <a:r>
+                  <a:rPr lang="zh-CN" altLang="en-US" sz="1600">
+                    <a:latin typeface="+mn-ea"/>
+                    <a:cs typeface="+mn-ea"/>
+                  </a:rPr>
+                  <a:t>，更新</a:t>
+                </a:r>
+                <a:r>
+                  <a:rPr lang="zh-CN" altLang="en-US" sz="1600">
+                    <a:latin typeface="+mn-ea"/>
+                    <a:cs typeface="+mn-ea"/>
+                  </a:rPr>
+                  <a:t>舒尔补。</a:t>
+                </a:r>
+                <a:endParaRPr lang="zh-CN" altLang="en-US" sz="1600">
+                  <a:latin typeface="+mn-ea"/>
+                  <a:cs typeface="+mn-ea"/>
+                </a:endParaRPr>
+              </a:p>
+              <a:p>
+                <a:pPr marL="285750" indent="-285750" fontAlgn="auto">
+                  <a:lnSpc>
+                    <a:spcPct val="150000"/>
+                  </a:lnSpc>
+                  <a:spcBef>
+                    <a:spcPct val="0"/>
+                  </a:spcBef>
+                  <a:buFont typeface="Wingdings" panose="05000000000000000000" charset="0"/>
+                  <a:buChar char="l"/>
+                </a:pPr>
+                <a:r>
+                  <a:rPr lang="zh-CN" altLang="en-US" sz="1600">
+                    <a:latin typeface="+mn-ea"/>
+                    <a:cs typeface="+mn-ea"/>
+                  </a:rPr>
+                  <a:t>结果写回与装配</a:t>
+                </a:r>
+                <a:r>
+                  <a:rPr lang="en-US" altLang="zh-CN" sz="1600">
+                    <a:latin typeface="+mn-ea"/>
+                    <a:cs typeface="+mn-ea"/>
+                  </a:rPr>
+                  <a:t> (Write-back &amp; Scatter):</a:t>
+                </a:r>
+                <a:endParaRPr lang="en-US" altLang="zh-CN" sz="1600">
+                  <a:latin typeface="+mn-ea"/>
+                  <a:cs typeface="+mn-ea"/>
+                </a:endParaRPr>
+              </a:p>
+              <a:p>
+                <a:pPr lvl="1" indent="0" fontAlgn="auto">
+                  <a:lnSpc>
+                    <a:spcPct val="150000"/>
+                  </a:lnSpc>
+                  <a:spcBef>
+                    <a:spcPct val="0"/>
+                  </a:spcBef>
+                  <a:buFont typeface="Wingdings" panose="05000000000000000000" charset="0"/>
+                  <a:buNone/>
+                </a:pPr>
+                <a:r>
+                  <a:rPr lang="en-US" altLang="zh-CN" sz="1600">
+                    <a:latin typeface="+mn-ea"/>
+                    <a:cs typeface="+mn-ea"/>
+                  </a:rPr>
+                  <a:t>L/U Store</a:t>
+                </a:r>
+                <a:r>
+                  <a:rPr lang="zh-CN" altLang="en-US" sz="1600">
+                    <a:latin typeface="+mn-ea"/>
+                    <a:cs typeface="+mn-ea"/>
+                  </a:rPr>
+                  <a:t>：</a:t>
+                </a:r>
+                <a:r>
+                  <a:rPr lang="en-US" altLang="zh-CN" sz="1600">
+                    <a:latin typeface="+mn-ea"/>
+                    <a:cs typeface="+mn-ea"/>
+                  </a:rPr>
+                  <a:t>DMA </a:t>
+                </a:r>
+                <a:r>
+                  <a:rPr lang="zh-CN" altLang="en-US" sz="1600">
+                    <a:latin typeface="+mn-ea"/>
+                    <a:cs typeface="+mn-ea"/>
+                  </a:rPr>
+                  <a:t>将计算好的</a:t>
+                </a:r>
+                <a:r>
+                  <a:rPr lang="en-US" altLang="zh-CN" sz="1600">
+                    <a:latin typeface="+mn-ea"/>
+                    <a:cs typeface="+mn-ea"/>
+                  </a:rPr>
+                  <a:t> L/U </a:t>
+                </a:r>
+                <a:r>
+                  <a:rPr lang="zh-CN" altLang="en-US" sz="1600">
+                    <a:latin typeface="+mn-ea"/>
+                    <a:cs typeface="+mn-ea"/>
+                  </a:rPr>
+                  <a:t>因子写回</a:t>
+                </a:r>
+                <a:r>
+                  <a:rPr lang="en-US" altLang="zh-CN" sz="1600">
+                    <a:latin typeface="+mn-ea"/>
+                    <a:cs typeface="+mn-ea"/>
+                  </a:rPr>
+                  <a:t> DDR </a:t>
+                </a:r>
+                <a:r>
+                  <a:rPr lang="zh-CN" altLang="en-US" sz="1600">
+                    <a:latin typeface="+mn-ea"/>
+                    <a:cs typeface="+mn-ea"/>
+                  </a:rPr>
+                  <a:t>永久存储区。</a:t>
+                </a:r>
+                <a:endParaRPr lang="zh-CN" altLang="en-US" sz="1600">
+                  <a:latin typeface="+mn-ea"/>
+                  <a:cs typeface="+mn-ea"/>
+                </a:endParaRPr>
+              </a:p>
+              <a:p>
+                <a:pPr lvl="1" indent="0" fontAlgn="auto">
+                  <a:lnSpc>
+                    <a:spcPct val="150000"/>
+                  </a:lnSpc>
+                  <a:spcBef>
+                    <a:spcPct val="0"/>
+                  </a:spcBef>
+                  <a:buFont typeface="Wingdings" panose="05000000000000000000" charset="0"/>
+                  <a:buNone/>
+                </a:pPr>
+                <a:r>
+                  <a:rPr lang="zh-CN" altLang="en-US" sz="1600">
+                    <a:latin typeface="+mn-ea"/>
+                    <a:cs typeface="+mn-ea"/>
+                  </a:rPr>
+                  <a:t>隐式装配：</a:t>
+                </a:r>
+                <a:r>
+                  <a:rPr lang="en-US" altLang="zh-CN" sz="1600">
+                    <a:latin typeface="+mn-ea"/>
+                    <a:cs typeface="+mn-ea"/>
+                  </a:rPr>
+                  <a:t>Scatter Engine </a:t>
+                </a:r>
+                <a:r>
+                  <a:rPr lang="zh-CN" altLang="en-US" sz="1600">
+                    <a:latin typeface="+mn-ea"/>
+                    <a:cs typeface="+mn-ea"/>
+                  </a:rPr>
+                  <a:t>读取</a:t>
+                </a:r>
+                <a:r>
+                  <a:rPr lang="zh-CN" altLang="en-US" sz="1600">
+                    <a:latin typeface="+mn-ea"/>
+                    <a:cs typeface="+mn-ea"/>
+                  </a:rPr>
+                  <a:t>引射表，将</a:t>
+                </a:r>
+                <a:r>
+                  <a:rPr lang="en-US" altLang="zh-CN" sz="1600">
+                    <a:latin typeface="+mn-ea"/>
+                    <a:cs typeface="+mn-ea"/>
+                  </a:rPr>
+                  <a:t> Update Matrix </a:t>
+                </a:r>
+                <a:r>
+                  <a:rPr lang="zh-CN" altLang="en-US" sz="1600">
+                    <a:latin typeface="+mn-ea"/>
+                    <a:cs typeface="+mn-ea"/>
+                  </a:rPr>
+                  <a:t>的数据累加</a:t>
+                </a:r>
+                <a:r>
+                  <a:rPr lang="en-US" altLang="zh-CN" sz="1600">
+                    <a:latin typeface="+mn-ea"/>
+                    <a:cs typeface="+mn-ea"/>
+                  </a:rPr>
+                  <a:t> (Atomic Add) </a:t>
+                </a:r>
+                <a:r>
+                  <a:rPr lang="zh-CN" altLang="en-US" sz="1600">
+                    <a:latin typeface="+mn-ea"/>
+                    <a:cs typeface="+mn-ea"/>
+                  </a:rPr>
+                  <a:t>到父节点在</a:t>
+                </a:r>
+                <a:r>
+                  <a:rPr lang="en-US" altLang="zh-CN" sz="1600">
+                    <a:latin typeface="+mn-ea"/>
+                    <a:cs typeface="+mn-ea"/>
+                  </a:rPr>
+                  <a:t> DDR </a:t>
+                </a:r>
+                <a:r>
+                  <a:rPr lang="zh-CN" altLang="en-US" sz="1600">
+                    <a:latin typeface="+mn-ea"/>
+                    <a:cs typeface="+mn-ea"/>
+                  </a:rPr>
+                  <a:t>中的地址空间。</a:t>
+                </a:r>
+                <a:endParaRPr lang="zh-CN" altLang="en-US" sz="1600">
+                  <a:latin typeface="+mn-ea"/>
+                  <a:cs typeface="+mn-ea"/>
+                </a:endParaRPr>
+              </a:p>
+            </p:txBody>
+          </p:sp>
+        </mc:Choice>
+        <mc:Fallback>
+          <p:sp>
+            <p:nvSpPr>
+              <p:cNvPr id="2" name="文本框 1"/>
+              <p:cNvSpPr txBox="1">
+                <a:spLocks noRot="1" noChangeAspect="1" noMove="1" noResize="1" noEditPoints="1" noAdjustHandles="1" noChangeArrowheads="1" noChangeShapeType="1" noTextEdit="1"/>
+              </p:cNvSpPr>
+              <p:nvPr/>
+            </p:nvSpPr>
+            <p:spPr>
+              <a:xfrm>
+                <a:off x="222250" y="859790"/>
+                <a:ext cx="11748135" cy="4526280"/>
+              </a:xfrm>
+              <a:prstGeom prst="rect">
+                <a:avLst/>
+              </a:prstGeom>
+              <a:blipFill rotWithShape="1">
+                <a:blip r:embed="rId7"/>
+                <a:stretch>
+                  <a:fillRect/>
+                </a:stretch>
+              </a:blipFill>
+            </p:spPr>
+            <p:txBody>
+              <a:bodyPr/>
+              <a:lstStyle/>
+              <a:p>
+                <a:r>
+                  <a:rPr lang="zh-CN" altLang="en-US">
+                    <a:noFill/>
+                  </a:rPr>
+                  <a:t> </a:t>
+                </a:r>
+              </a:p>
+            </p:txBody>
+          </p:sp>
+        </mc:Fallback>
+      </mc:AlternateContent>
     </p:spTree>
   </p:cSld>
   <p:clrMapOvr>
